--- a/PPT/week5.pptx
+++ b/PPT/week5.pptx
@@ -21,12 +21,12 @@
   <p:notesSz cx="6858000" cy="9144000"/>
   <p:embeddedFontLst>
     <p:embeddedFont>
-      <p:font typeface="맑은 고딕" panose="020B0503020000020004" pitchFamily="34" charset="-127"/>
+      <p:font typeface="나눔바른고딕" panose="020B0603020101020101" pitchFamily="50" charset="-127"/>
       <p:regular r:id="rId11"/>
       <p:bold r:id="rId12"/>
     </p:embeddedFont>
     <p:embeddedFont>
-      <p:font typeface="나눔바른고딕" panose="020B0603020101020101" pitchFamily="34" charset="-127"/>
+      <p:font typeface="맑은 고딕" panose="020B0503020000020004" pitchFamily="50" charset="-127"/>
       <p:regular r:id="rId13"/>
       <p:bold r:id="rId14"/>
     </p:embeddedFont>
@@ -1186,7 +1186,7 @@
           <p:cNvPr id="2" name="제목 1">
             <a:extLst>
               <a:ext uri="{FF2B5EF4-FFF2-40B4-BE49-F238E27FC236}">
-                <a16:creationId xmlns="" xmlns:a16="http://schemas.microsoft.com/office/drawing/2014/main" id="{47C6A88D-EDAF-CEC2-712F-FA6A7E4FF53C}"/>
+                <a16:creationId xmlns:a16="http://schemas.microsoft.com/office/drawing/2014/main" id="{47C6A88D-EDAF-CEC2-712F-FA6A7E4FF53C}"/>
               </a:ext>
             </a:extLst>
           </p:cNvPr>
@@ -1223,7 +1223,7 @@
           <p:cNvPr id="3" name="부제목 2">
             <a:extLst>
               <a:ext uri="{FF2B5EF4-FFF2-40B4-BE49-F238E27FC236}">
-                <a16:creationId xmlns="" xmlns:a16="http://schemas.microsoft.com/office/drawing/2014/main" id="{1F7A10E8-4E5D-A611-E577-EBA5676A507E}"/>
+                <a16:creationId xmlns:a16="http://schemas.microsoft.com/office/drawing/2014/main" id="{1F7A10E8-4E5D-A611-E577-EBA5676A507E}"/>
               </a:ext>
             </a:extLst>
           </p:cNvPr>
@@ -1293,7 +1293,7 @@
           <p:cNvPr id="4" name="날짜 개체 틀 3">
             <a:extLst>
               <a:ext uri="{FF2B5EF4-FFF2-40B4-BE49-F238E27FC236}">
-                <a16:creationId xmlns="" xmlns:a16="http://schemas.microsoft.com/office/drawing/2014/main" id="{FA4EF1CD-FA03-944B-0EC0-2AABE3B0C471}"/>
+                <a16:creationId xmlns:a16="http://schemas.microsoft.com/office/drawing/2014/main" id="{FA4EF1CD-FA03-944B-0EC0-2AABE3B0C471}"/>
               </a:ext>
             </a:extLst>
           </p:cNvPr>
@@ -1322,7 +1322,7 @@
           <p:cNvPr id="5" name="바닥글 개체 틀 4">
             <a:extLst>
               <a:ext uri="{FF2B5EF4-FFF2-40B4-BE49-F238E27FC236}">
-                <a16:creationId xmlns="" xmlns:a16="http://schemas.microsoft.com/office/drawing/2014/main" id="{D7E1904F-F41F-7809-481D-7E79FCD2132E}"/>
+                <a16:creationId xmlns:a16="http://schemas.microsoft.com/office/drawing/2014/main" id="{D7E1904F-F41F-7809-481D-7E79FCD2132E}"/>
               </a:ext>
             </a:extLst>
           </p:cNvPr>
@@ -1347,7 +1347,7 @@
           <p:cNvPr id="6" name="슬라이드 번호 개체 틀 5">
             <a:extLst>
               <a:ext uri="{FF2B5EF4-FFF2-40B4-BE49-F238E27FC236}">
-                <a16:creationId xmlns="" xmlns:a16="http://schemas.microsoft.com/office/drawing/2014/main" id="{46C721DE-9DEE-BACB-B354-8E260F43215D}"/>
+                <a16:creationId xmlns:a16="http://schemas.microsoft.com/office/drawing/2014/main" id="{46C721DE-9DEE-BACB-B354-8E260F43215D}"/>
               </a:ext>
             </a:extLst>
           </p:cNvPr>
@@ -1406,7 +1406,7 @@
           <p:cNvPr id="2" name="제목 1">
             <a:extLst>
               <a:ext uri="{FF2B5EF4-FFF2-40B4-BE49-F238E27FC236}">
-                <a16:creationId xmlns="" xmlns:a16="http://schemas.microsoft.com/office/drawing/2014/main" id="{8EC6E50E-2954-B290-1563-C4936B9E8431}"/>
+                <a16:creationId xmlns:a16="http://schemas.microsoft.com/office/drawing/2014/main" id="{8EC6E50E-2954-B290-1563-C4936B9E8431}"/>
               </a:ext>
             </a:extLst>
           </p:cNvPr>
@@ -1434,7 +1434,7 @@
           <p:cNvPr id="3" name="세로 텍스트 개체 틀 2">
             <a:extLst>
               <a:ext uri="{FF2B5EF4-FFF2-40B4-BE49-F238E27FC236}">
-                <a16:creationId xmlns="" xmlns:a16="http://schemas.microsoft.com/office/drawing/2014/main" id="{5B6A99E4-1414-E268-7B72-A4C896708AE3}"/>
+                <a16:creationId xmlns:a16="http://schemas.microsoft.com/office/drawing/2014/main" id="{5B6A99E4-1414-E268-7B72-A4C896708AE3}"/>
               </a:ext>
             </a:extLst>
           </p:cNvPr>
@@ -1491,7 +1491,7 @@
           <p:cNvPr id="4" name="날짜 개체 틀 3">
             <a:extLst>
               <a:ext uri="{FF2B5EF4-FFF2-40B4-BE49-F238E27FC236}">
-                <a16:creationId xmlns="" xmlns:a16="http://schemas.microsoft.com/office/drawing/2014/main" id="{3A9BB3C2-1FA4-4151-9ADB-996284F1BDE2}"/>
+                <a16:creationId xmlns:a16="http://schemas.microsoft.com/office/drawing/2014/main" id="{3A9BB3C2-1FA4-4151-9ADB-996284F1BDE2}"/>
               </a:ext>
             </a:extLst>
           </p:cNvPr>
@@ -1520,7 +1520,7 @@
           <p:cNvPr id="5" name="바닥글 개체 틀 4">
             <a:extLst>
               <a:ext uri="{FF2B5EF4-FFF2-40B4-BE49-F238E27FC236}">
-                <a16:creationId xmlns="" xmlns:a16="http://schemas.microsoft.com/office/drawing/2014/main" id="{8A27C81A-BE4E-27CE-6CE4-0AE5876D470A}"/>
+                <a16:creationId xmlns:a16="http://schemas.microsoft.com/office/drawing/2014/main" id="{8A27C81A-BE4E-27CE-6CE4-0AE5876D470A}"/>
               </a:ext>
             </a:extLst>
           </p:cNvPr>
@@ -1545,7 +1545,7 @@
           <p:cNvPr id="6" name="슬라이드 번호 개체 틀 5">
             <a:extLst>
               <a:ext uri="{FF2B5EF4-FFF2-40B4-BE49-F238E27FC236}">
-                <a16:creationId xmlns="" xmlns:a16="http://schemas.microsoft.com/office/drawing/2014/main" id="{B4E3C814-C417-2E3F-F02B-1B9ED6941FBD}"/>
+                <a16:creationId xmlns:a16="http://schemas.microsoft.com/office/drawing/2014/main" id="{B4E3C814-C417-2E3F-F02B-1B9ED6941FBD}"/>
               </a:ext>
             </a:extLst>
           </p:cNvPr>
@@ -1604,7 +1604,7 @@
           <p:cNvPr id="2" name="세로 제목 1">
             <a:extLst>
               <a:ext uri="{FF2B5EF4-FFF2-40B4-BE49-F238E27FC236}">
-                <a16:creationId xmlns="" xmlns:a16="http://schemas.microsoft.com/office/drawing/2014/main" id="{AC1D687F-54E9-57A3-FDA2-5A8060E79A80}"/>
+                <a16:creationId xmlns:a16="http://schemas.microsoft.com/office/drawing/2014/main" id="{AC1D687F-54E9-57A3-FDA2-5A8060E79A80}"/>
               </a:ext>
             </a:extLst>
           </p:cNvPr>
@@ -1637,7 +1637,7 @@
           <p:cNvPr id="3" name="세로 텍스트 개체 틀 2">
             <a:extLst>
               <a:ext uri="{FF2B5EF4-FFF2-40B4-BE49-F238E27FC236}">
-                <a16:creationId xmlns="" xmlns:a16="http://schemas.microsoft.com/office/drawing/2014/main" id="{BC846A14-940B-8FE8-A769-3DABAE11AD25}"/>
+                <a16:creationId xmlns:a16="http://schemas.microsoft.com/office/drawing/2014/main" id="{BC846A14-940B-8FE8-A769-3DABAE11AD25}"/>
               </a:ext>
             </a:extLst>
           </p:cNvPr>
@@ -1699,7 +1699,7 @@
           <p:cNvPr id="4" name="날짜 개체 틀 3">
             <a:extLst>
               <a:ext uri="{FF2B5EF4-FFF2-40B4-BE49-F238E27FC236}">
-                <a16:creationId xmlns="" xmlns:a16="http://schemas.microsoft.com/office/drawing/2014/main" id="{393732A3-4427-5A76-3A9C-DBE87A4364DD}"/>
+                <a16:creationId xmlns:a16="http://schemas.microsoft.com/office/drawing/2014/main" id="{393732A3-4427-5A76-3A9C-DBE87A4364DD}"/>
               </a:ext>
             </a:extLst>
           </p:cNvPr>
@@ -1728,7 +1728,7 @@
           <p:cNvPr id="5" name="바닥글 개체 틀 4">
             <a:extLst>
               <a:ext uri="{FF2B5EF4-FFF2-40B4-BE49-F238E27FC236}">
-                <a16:creationId xmlns="" xmlns:a16="http://schemas.microsoft.com/office/drawing/2014/main" id="{16A5B672-F383-0FF5-2D72-72E1E7F0F0D3}"/>
+                <a16:creationId xmlns:a16="http://schemas.microsoft.com/office/drawing/2014/main" id="{16A5B672-F383-0FF5-2D72-72E1E7F0F0D3}"/>
               </a:ext>
             </a:extLst>
           </p:cNvPr>
@@ -1753,7 +1753,7 @@
           <p:cNvPr id="6" name="슬라이드 번호 개체 틀 5">
             <a:extLst>
               <a:ext uri="{FF2B5EF4-FFF2-40B4-BE49-F238E27FC236}">
-                <a16:creationId xmlns="" xmlns:a16="http://schemas.microsoft.com/office/drawing/2014/main" id="{DE28928A-9906-D889-A8B7-B97D729CDB76}"/>
+                <a16:creationId xmlns:a16="http://schemas.microsoft.com/office/drawing/2014/main" id="{DE28928A-9906-D889-A8B7-B97D729CDB76}"/>
               </a:ext>
             </a:extLst>
           </p:cNvPr>
@@ -1812,7 +1812,7 @@
           <p:cNvPr id="2" name="제목 1">
             <a:extLst>
               <a:ext uri="{FF2B5EF4-FFF2-40B4-BE49-F238E27FC236}">
-                <a16:creationId xmlns="" xmlns:a16="http://schemas.microsoft.com/office/drawing/2014/main" id="{54F5793F-94FE-56B0-E0CB-A317DA7FB4BC}"/>
+                <a16:creationId xmlns:a16="http://schemas.microsoft.com/office/drawing/2014/main" id="{54F5793F-94FE-56B0-E0CB-A317DA7FB4BC}"/>
               </a:ext>
             </a:extLst>
           </p:cNvPr>
@@ -1840,7 +1840,7 @@
           <p:cNvPr id="3" name="내용 개체 틀 2">
             <a:extLst>
               <a:ext uri="{FF2B5EF4-FFF2-40B4-BE49-F238E27FC236}">
-                <a16:creationId xmlns="" xmlns:a16="http://schemas.microsoft.com/office/drawing/2014/main" id="{BFAF79B8-2AD1-69C6-D4D5-21827C6802F8}"/>
+                <a16:creationId xmlns:a16="http://schemas.microsoft.com/office/drawing/2014/main" id="{BFAF79B8-2AD1-69C6-D4D5-21827C6802F8}"/>
               </a:ext>
             </a:extLst>
           </p:cNvPr>
@@ -1897,7 +1897,7 @@
           <p:cNvPr id="4" name="날짜 개체 틀 3">
             <a:extLst>
               <a:ext uri="{FF2B5EF4-FFF2-40B4-BE49-F238E27FC236}">
-                <a16:creationId xmlns="" xmlns:a16="http://schemas.microsoft.com/office/drawing/2014/main" id="{6718AF63-4F49-82B6-24FC-BB457FC964FC}"/>
+                <a16:creationId xmlns:a16="http://schemas.microsoft.com/office/drawing/2014/main" id="{6718AF63-4F49-82B6-24FC-BB457FC964FC}"/>
               </a:ext>
             </a:extLst>
           </p:cNvPr>
@@ -1926,7 +1926,7 @@
           <p:cNvPr id="5" name="바닥글 개체 틀 4">
             <a:extLst>
               <a:ext uri="{FF2B5EF4-FFF2-40B4-BE49-F238E27FC236}">
-                <a16:creationId xmlns="" xmlns:a16="http://schemas.microsoft.com/office/drawing/2014/main" id="{AA45FF19-25D7-1FF3-E311-2C2E07B26764}"/>
+                <a16:creationId xmlns:a16="http://schemas.microsoft.com/office/drawing/2014/main" id="{AA45FF19-25D7-1FF3-E311-2C2E07B26764}"/>
               </a:ext>
             </a:extLst>
           </p:cNvPr>
@@ -1951,7 +1951,7 @@
           <p:cNvPr id="6" name="슬라이드 번호 개체 틀 5">
             <a:extLst>
               <a:ext uri="{FF2B5EF4-FFF2-40B4-BE49-F238E27FC236}">
-                <a16:creationId xmlns="" xmlns:a16="http://schemas.microsoft.com/office/drawing/2014/main" id="{6F43D8BF-52A4-97EB-612B-F9899664EFD5}"/>
+                <a16:creationId xmlns:a16="http://schemas.microsoft.com/office/drawing/2014/main" id="{6F43D8BF-52A4-97EB-612B-F9899664EFD5}"/>
               </a:ext>
             </a:extLst>
           </p:cNvPr>
@@ -2010,7 +2010,7 @@
           <p:cNvPr id="2" name="제목 1">
             <a:extLst>
               <a:ext uri="{FF2B5EF4-FFF2-40B4-BE49-F238E27FC236}">
-                <a16:creationId xmlns="" xmlns:a16="http://schemas.microsoft.com/office/drawing/2014/main" id="{1EB95909-78E9-5BAC-68EA-7DCA2A1271F7}"/>
+                <a16:creationId xmlns:a16="http://schemas.microsoft.com/office/drawing/2014/main" id="{1EB95909-78E9-5BAC-68EA-7DCA2A1271F7}"/>
               </a:ext>
             </a:extLst>
           </p:cNvPr>
@@ -2047,7 +2047,7 @@
           <p:cNvPr id="3" name="텍스트 개체 틀 2">
             <a:extLst>
               <a:ext uri="{FF2B5EF4-FFF2-40B4-BE49-F238E27FC236}">
-                <a16:creationId xmlns="" xmlns:a16="http://schemas.microsoft.com/office/drawing/2014/main" id="{D6B98DAF-2A47-3ECD-807C-96FB70CF9854}"/>
+                <a16:creationId xmlns:a16="http://schemas.microsoft.com/office/drawing/2014/main" id="{D6B98DAF-2A47-3ECD-807C-96FB70CF9854}"/>
               </a:ext>
             </a:extLst>
           </p:cNvPr>
@@ -2172,7 +2172,7 @@
           <p:cNvPr id="4" name="날짜 개체 틀 3">
             <a:extLst>
               <a:ext uri="{FF2B5EF4-FFF2-40B4-BE49-F238E27FC236}">
-                <a16:creationId xmlns="" xmlns:a16="http://schemas.microsoft.com/office/drawing/2014/main" id="{A3AD9670-C268-56FC-281A-FE1F59541EB9}"/>
+                <a16:creationId xmlns:a16="http://schemas.microsoft.com/office/drawing/2014/main" id="{A3AD9670-C268-56FC-281A-FE1F59541EB9}"/>
               </a:ext>
             </a:extLst>
           </p:cNvPr>
@@ -2201,7 +2201,7 @@
           <p:cNvPr id="5" name="바닥글 개체 틀 4">
             <a:extLst>
               <a:ext uri="{FF2B5EF4-FFF2-40B4-BE49-F238E27FC236}">
-                <a16:creationId xmlns="" xmlns:a16="http://schemas.microsoft.com/office/drawing/2014/main" id="{A4946F37-FE38-E38E-7339-DC6E4EFA5B3B}"/>
+                <a16:creationId xmlns:a16="http://schemas.microsoft.com/office/drawing/2014/main" id="{A4946F37-FE38-E38E-7339-DC6E4EFA5B3B}"/>
               </a:ext>
             </a:extLst>
           </p:cNvPr>
@@ -2226,7 +2226,7 @@
           <p:cNvPr id="6" name="슬라이드 번호 개체 틀 5">
             <a:extLst>
               <a:ext uri="{FF2B5EF4-FFF2-40B4-BE49-F238E27FC236}">
-                <a16:creationId xmlns="" xmlns:a16="http://schemas.microsoft.com/office/drawing/2014/main" id="{7C17C39B-6348-28CC-59AF-B1A65BE2F149}"/>
+                <a16:creationId xmlns:a16="http://schemas.microsoft.com/office/drawing/2014/main" id="{7C17C39B-6348-28CC-59AF-B1A65BE2F149}"/>
               </a:ext>
             </a:extLst>
           </p:cNvPr>
@@ -2285,7 +2285,7 @@
           <p:cNvPr id="2" name="제목 1">
             <a:extLst>
               <a:ext uri="{FF2B5EF4-FFF2-40B4-BE49-F238E27FC236}">
-                <a16:creationId xmlns="" xmlns:a16="http://schemas.microsoft.com/office/drawing/2014/main" id="{0D0EFA0F-10D7-865F-1370-4EA34C786709}"/>
+                <a16:creationId xmlns:a16="http://schemas.microsoft.com/office/drawing/2014/main" id="{0D0EFA0F-10D7-865F-1370-4EA34C786709}"/>
               </a:ext>
             </a:extLst>
           </p:cNvPr>
@@ -2313,7 +2313,7 @@
           <p:cNvPr id="3" name="내용 개체 틀 2">
             <a:extLst>
               <a:ext uri="{FF2B5EF4-FFF2-40B4-BE49-F238E27FC236}">
-                <a16:creationId xmlns="" xmlns:a16="http://schemas.microsoft.com/office/drawing/2014/main" id="{0498CDB5-9D2B-5F68-9DD8-ED20454B1044}"/>
+                <a16:creationId xmlns:a16="http://schemas.microsoft.com/office/drawing/2014/main" id="{0498CDB5-9D2B-5F68-9DD8-ED20454B1044}"/>
               </a:ext>
             </a:extLst>
           </p:cNvPr>
@@ -2375,7 +2375,7 @@
           <p:cNvPr id="4" name="내용 개체 틀 3">
             <a:extLst>
               <a:ext uri="{FF2B5EF4-FFF2-40B4-BE49-F238E27FC236}">
-                <a16:creationId xmlns="" xmlns:a16="http://schemas.microsoft.com/office/drawing/2014/main" id="{570EB1B7-8EDE-2794-EA53-E0C1972FAF1A}"/>
+                <a16:creationId xmlns:a16="http://schemas.microsoft.com/office/drawing/2014/main" id="{570EB1B7-8EDE-2794-EA53-E0C1972FAF1A}"/>
               </a:ext>
             </a:extLst>
           </p:cNvPr>
@@ -2437,7 +2437,7 @@
           <p:cNvPr id="5" name="날짜 개체 틀 4">
             <a:extLst>
               <a:ext uri="{FF2B5EF4-FFF2-40B4-BE49-F238E27FC236}">
-                <a16:creationId xmlns="" xmlns:a16="http://schemas.microsoft.com/office/drawing/2014/main" id="{31FBCFA4-CF51-706E-F9F0-8B66CA1A0E1B}"/>
+                <a16:creationId xmlns:a16="http://schemas.microsoft.com/office/drawing/2014/main" id="{31FBCFA4-CF51-706E-F9F0-8B66CA1A0E1B}"/>
               </a:ext>
             </a:extLst>
           </p:cNvPr>
@@ -2466,7 +2466,7 @@
           <p:cNvPr id="6" name="바닥글 개체 틀 5">
             <a:extLst>
               <a:ext uri="{FF2B5EF4-FFF2-40B4-BE49-F238E27FC236}">
-                <a16:creationId xmlns="" xmlns:a16="http://schemas.microsoft.com/office/drawing/2014/main" id="{FD56636A-469F-7FE9-480E-955BCC0E6D70}"/>
+                <a16:creationId xmlns:a16="http://schemas.microsoft.com/office/drawing/2014/main" id="{FD56636A-469F-7FE9-480E-955BCC0E6D70}"/>
               </a:ext>
             </a:extLst>
           </p:cNvPr>
@@ -2491,7 +2491,7 @@
           <p:cNvPr id="7" name="슬라이드 번호 개체 틀 6">
             <a:extLst>
               <a:ext uri="{FF2B5EF4-FFF2-40B4-BE49-F238E27FC236}">
-                <a16:creationId xmlns="" xmlns:a16="http://schemas.microsoft.com/office/drawing/2014/main" id="{3971D272-167D-EE36-E685-CD8BFE8CC9A6}"/>
+                <a16:creationId xmlns:a16="http://schemas.microsoft.com/office/drawing/2014/main" id="{3971D272-167D-EE36-E685-CD8BFE8CC9A6}"/>
               </a:ext>
             </a:extLst>
           </p:cNvPr>
@@ -2550,7 +2550,7 @@
           <p:cNvPr id="2" name="제목 1">
             <a:extLst>
               <a:ext uri="{FF2B5EF4-FFF2-40B4-BE49-F238E27FC236}">
-                <a16:creationId xmlns="" xmlns:a16="http://schemas.microsoft.com/office/drawing/2014/main" id="{9AC7230E-A2F3-4027-B6F6-9C5C289B1314}"/>
+                <a16:creationId xmlns:a16="http://schemas.microsoft.com/office/drawing/2014/main" id="{9AC7230E-A2F3-4027-B6F6-9C5C289B1314}"/>
               </a:ext>
             </a:extLst>
           </p:cNvPr>
@@ -2583,7 +2583,7 @@
           <p:cNvPr id="3" name="텍스트 개체 틀 2">
             <a:extLst>
               <a:ext uri="{FF2B5EF4-FFF2-40B4-BE49-F238E27FC236}">
-                <a16:creationId xmlns="" xmlns:a16="http://schemas.microsoft.com/office/drawing/2014/main" id="{0C685356-7419-AD93-377A-8D9A0293423E}"/>
+                <a16:creationId xmlns:a16="http://schemas.microsoft.com/office/drawing/2014/main" id="{0C685356-7419-AD93-377A-8D9A0293423E}"/>
               </a:ext>
             </a:extLst>
           </p:cNvPr>
@@ -2654,7 +2654,7 @@
           <p:cNvPr id="4" name="내용 개체 틀 3">
             <a:extLst>
               <a:ext uri="{FF2B5EF4-FFF2-40B4-BE49-F238E27FC236}">
-                <a16:creationId xmlns="" xmlns:a16="http://schemas.microsoft.com/office/drawing/2014/main" id="{CC36E6CA-94A6-3223-C91A-F6E9648C8EAD}"/>
+                <a16:creationId xmlns:a16="http://schemas.microsoft.com/office/drawing/2014/main" id="{CC36E6CA-94A6-3223-C91A-F6E9648C8EAD}"/>
               </a:ext>
             </a:extLst>
           </p:cNvPr>
@@ -2716,7 +2716,7 @@
           <p:cNvPr id="5" name="텍스트 개체 틀 4">
             <a:extLst>
               <a:ext uri="{FF2B5EF4-FFF2-40B4-BE49-F238E27FC236}">
-                <a16:creationId xmlns="" xmlns:a16="http://schemas.microsoft.com/office/drawing/2014/main" id="{F4DFD790-787A-88A3-300F-C173DAD2E1AF}"/>
+                <a16:creationId xmlns:a16="http://schemas.microsoft.com/office/drawing/2014/main" id="{F4DFD790-787A-88A3-300F-C173DAD2E1AF}"/>
               </a:ext>
             </a:extLst>
           </p:cNvPr>
@@ -2787,7 +2787,7 @@
           <p:cNvPr id="6" name="내용 개체 틀 5">
             <a:extLst>
               <a:ext uri="{FF2B5EF4-FFF2-40B4-BE49-F238E27FC236}">
-                <a16:creationId xmlns="" xmlns:a16="http://schemas.microsoft.com/office/drawing/2014/main" id="{012AE83D-2990-A6E4-CC9C-06D342A67C09}"/>
+                <a16:creationId xmlns:a16="http://schemas.microsoft.com/office/drawing/2014/main" id="{012AE83D-2990-A6E4-CC9C-06D342A67C09}"/>
               </a:ext>
             </a:extLst>
           </p:cNvPr>
@@ -2849,7 +2849,7 @@
           <p:cNvPr id="7" name="날짜 개체 틀 6">
             <a:extLst>
               <a:ext uri="{FF2B5EF4-FFF2-40B4-BE49-F238E27FC236}">
-                <a16:creationId xmlns="" xmlns:a16="http://schemas.microsoft.com/office/drawing/2014/main" id="{3C11F8C3-5AD3-730B-8ADB-304185DAA67E}"/>
+                <a16:creationId xmlns:a16="http://schemas.microsoft.com/office/drawing/2014/main" id="{3C11F8C3-5AD3-730B-8ADB-304185DAA67E}"/>
               </a:ext>
             </a:extLst>
           </p:cNvPr>
@@ -2878,7 +2878,7 @@
           <p:cNvPr id="8" name="바닥글 개체 틀 7">
             <a:extLst>
               <a:ext uri="{FF2B5EF4-FFF2-40B4-BE49-F238E27FC236}">
-                <a16:creationId xmlns="" xmlns:a16="http://schemas.microsoft.com/office/drawing/2014/main" id="{EF36ABA7-53C4-C11E-CC9D-F5E59BDBBD9B}"/>
+                <a16:creationId xmlns:a16="http://schemas.microsoft.com/office/drawing/2014/main" id="{EF36ABA7-53C4-C11E-CC9D-F5E59BDBBD9B}"/>
               </a:ext>
             </a:extLst>
           </p:cNvPr>
@@ -2903,7 +2903,7 @@
           <p:cNvPr id="9" name="슬라이드 번호 개체 틀 8">
             <a:extLst>
               <a:ext uri="{FF2B5EF4-FFF2-40B4-BE49-F238E27FC236}">
-                <a16:creationId xmlns="" xmlns:a16="http://schemas.microsoft.com/office/drawing/2014/main" id="{5E29E145-D4AE-F9FB-A218-47B323C43E03}"/>
+                <a16:creationId xmlns:a16="http://schemas.microsoft.com/office/drawing/2014/main" id="{5E29E145-D4AE-F9FB-A218-47B323C43E03}"/>
               </a:ext>
             </a:extLst>
           </p:cNvPr>
@@ -2962,7 +2962,7 @@
           <p:cNvPr id="2" name="제목 1">
             <a:extLst>
               <a:ext uri="{FF2B5EF4-FFF2-40B4-BE49-F238E27FC236}">
-                <a16:creationId xmlns="" xmlns:a16="http://schemas.microsoft.com/office/drawing/2014/main" id="{13D855E6-5AD7-B657-346A-38D87715A5E7}"/>
+                <a16:creationId xmlns:a16="http://schemas.microsoft.com/office/drawing/2014/main" id="{13D855E6-5AD7-B657-346A-38D87715A5E7}"/>
               </a:ext>
             </a:extLst>
           </p:cNvPr>
@@ -2990,7 +2990,7 @@
           <p:cNvPr id="3" name="날짜 개체 틀 2">
             <a:extLst>
               <a:ext uri="{FF2B5EF4-FFF2-40B4-BE49-F238E27FC236}">
-                <a16:creationId xmlns="" xmlns:a16="http://schemas.microsoft.com/office/drawing/2014/main" id="{F3052B06-09E1-1CD0-A032-AEB30F69A0E7}"/>
+                <a16:creationId xmlns:a16="http://schemas.microsoft.com/office/drawing/2014/main" id="{F3052B06-09E1-1CD0-A032-AEB30F69A0E7}"/>
               </a:ext>
             </a:extLst>
           </p:cNvPr>
@@ -3019,7 +3019,7 @@
           <p:cNvPr id="4" name="바닥글 개체 틀 3">
             <a:extLst>
               <a:ext uri="{FF2B5EF4-FFF2-40B4-BE49-F238E27FC236}">
-                <a16:creationId xmlns="" xmlns:a16="http://schemas.microsoft.com/office/drawing/2014/main" id="{DE18691A-8582-987D-DF06-E6D8B618E7BB}"/>
+                <a16:creationId xmlns:a16="http://schemas.microsoft.com/office/drawing/2014/main" id="{DE18691A-8582-987D-DF06-E6D8B618E7BB}"/>
               </a:ext>
             </a:extLst>
           </p:cNvPr>
@@ -3044,7 +3044,7 @@
           <p:cNvPr id="5" name="슬라이드 번호 개체 틀 4">
             <a:extLst>
               <a:ext uri="{FF2B5EF4-FFF2-40B4-BE49-F238E27FC236}">
-                <a16:creationId xmlns="" xmlns:a16="http://schemas.microsoft.com/office/drawing/2014/main" id="{6F997ACE-7D00-7B35-1F16-F56C5450EF85}"/>
+                <a16:creationId xmlns:a16="http://schemas.microsoft.com/office/drawing/2014/main" id="{6F997ACE-7D00-7B35-1F16-F56C5450EF85}"/>
               </a:ext>
             </a:extLst>
           </p:cNvPr>
@@ -3103,7 +3103,7 @@
           <p:cNvPr id="2" name="날짜 개체 틀 1">
             <a:extLst>
               <a:ext uri="{FF2B5EF4-FFF2-40B4-BE49-F238E27FC236}">
-                <a16:creationId xmlns="" xmlns:a16="http://schemas.microsoft.com/office/drawing/2014/main" id="{2703D88F-9D50-1761-731E-68DD1FC6B740}"/>
+                <a16:creationId xmlns:a16="http://schemas.microsoft.com/office/drawing/2014/main" id="{2703D88F-9D50-1761-731E-68DD1FC6B740}"/>
               </a:ext>
             </a:extLst>
           </p:cNvPr>
@@ -3132,7 +3132,7 @@
           <p:cNvPr id="3" name="바닥글 개체 틀 2">
             <a:extLst>
               <a:ext uri="{FF2B5EF4-FFF2-40B4-BE49-F238E27FC236}">
-                <a16:creationId xmlns="" xmlns:a16="http://schemas.microsoft.com/office/drawing/2014/main" id="{70793086-842E-7906-6019-4284A9E469F4}"/>
+                <a16:creationId xmlns:a16="http://schemas.microsoft.com/office/drawing/2014/main" id="{70793086-842E-7906-6019-4284A9E469F4}"/>
               </a:ext>
             </a:extLst>
           </p:cNvPr>
@@ -3157,7 +3157,7 @@
           <p:cNvPr id="4" name="슬라이드 번호 개체 틀 3">
             <a:extLst>
               <a:ext uri="{FF2B5EF4-FFF2-40B4-BE49-F238E27FC236}">
-                <a16:creationId xmlns="" xmlns:a16="http://schemas.microsoft.com/office/drawing/2014/main" id="{6D4FE3DE-7F26-4352-74EE-A720C7AF5564}"/>
+                <a16:creationId xmlns:a16="http://schemas.microsoft.com/office/drawing/2014/main" id="{6D4FE3DE-7F26-4352-74EE-A720C7AF5564}"/>
               </a:ext>
             </a:extLst>
           </p:cNvPr>
@@ -3216,7 +3216,7 @@
           <p:cNvPr id="2" name="제목 1">
             <a:extLst>
               <a:ext uri="{FF2B5EF4-FFF2-40B4-BE49-F238E27FC236}">
-                <a16:creationId xmlns="" xmlns:a16="http://schemas.microsoft.com/office/drawing/2014/main" id="{0AFB6F63-D5C7-EB4A-A651-8DA5561AD0DC}"/>
+                <a16:creationId xmlns:a16="http://schemas.microsoft.com/office/drawing/2014/main" id="{0AFB6F63-D5C7-EB4A-A651-8DA5561AD0DC}"/>
               </a:ext>
             </a:extLst>
           </p:cNvPr>
@@ -3253,7 +3253,7 @@
           <p:cNvPr id="3" name="내용 개체 틀 2">
             <a:extLst>
               <a:ext uri="{FF2B5EF4-FFF2-40B4-BE49-F238E27FC236}">
-                <a16:creationId xmlns="" xmlns:a16="http://schemas.microsoft.com/office/drawing/2014/main" id="{2000FB2D-0CF3-1A3C-E704-F8CA96C2D5D5}"/>
+                <a16:creationId xmlns:a16="http://schemas.microsoft.com/office/drawing/2014/main" id="{2000FB2D-0CF3-1A3C-E704-F8CA96C2D5D5}"/>
               </a:ext>
             </a:extLst>
           </p:cNvPr>
@@ -3343,7 +3343,7 @@
           <p:cNvPr id="4" name="텍스트 개체 틀 3">
             <a:extLst>
               <a:ext uri="{FF2B5EF4-FFF2-40B4-BE49-F238E27FC236}">
-                <a16:creationId xmlns="" xmlns:a16="http://schemas.microsoft.com/office/drawing/2014/main" id="{88C3C47D-E633-BB5D-0FA3-41A5E3C28A6A}"/>
+                <a16:creationId xmlns:a16="http://schemas.microsoft.com/office/drawing/2014/main" id="{88C3C47D-E633-BB5D-0FA3-41A5E3C28A6A}"/>
               </a:ext>
             </a:extLst>
           </p:cNvPr>
@@ -3414,7 +3414,7 @@
           <p:cNvPr id="5" name="날짜 개체 틀 4">
             <a:extLst>
               <a:ext uri="{FF2B5EF4-FFF2-40B4-BE49-F238E27FC236}">
-                <a16:creationId xmlns="" xmlns:a16="http://schemas.microsoft.com/office/drawing/2014/main" id="{603DA118-0D2F-73A1-6311-85E95462C569}"/>
+                <a16:creationId xmlns:a16="http://schemas.microsoft.com/office/drawing/2014/main" id="{603DA118-0D2F-73A1-6311-85E95462C569}"/>
               </a:ext>
             </a:extLst>
           </p:cNvPr>
@@ -3443,7 +3443,7 @@
           <p:cNvPr id="6" name="바닥글 개체 틀 5">
             <a:extLst>
               <a:ext uri="{FF2B5EF4-FFF2-40B4-BE49-F238E27FC236}">
-                <a16:creationId xmlns="" xmlns:a16="http://schemas.microsoft.com/office/drawing/2014/main" id="{DE46749A-348F-886F-32BD-A562F1A2A3B9}"/>
+                <a16:creationId xmlns:a16="http://schemas.microsoft.com/office/drawing/2014/main" id="{DE46749A-348F-886F-32BD-A562F1A2A3B9}"/>
               </a:ext>
             </a:extLst>
           </p:cNvPr>
@@ -3468,7 +3468,7 @@
           <p:cNvPr id="7" name="슬라이드 번호 개체 틀 6">
             <a:extLst>
               <a:ext uri="{FF2B5EF4-FFF2-40B4-BE49-F238E27FC236}">
-                <a16:creationId xmlns="" xmlns:a16="http://schemas.microsoft.com/office/drawing/2014/main" id="{0BF22D09-FBE9-294C-014E-9A808723A1A7}"/>
+                <a16:creationId xmlns:a16="http://schemas.microsoft.com/office/drawing/2014/main" id="{0BF22D09-FBE9-294C-014E-9A808723A1A7}"/>
               </a:ext>
             </a:extLst>
           </p:cNvPr>
@@ -3527,7 +3527,7 @@
           <p:cNvPr id="2" name="제목 1">
             <a:extLst>
               <a:ext uri="{FF2B5EF4-FFF2-40B4-BE49-F238E27FC236}">
-                <a16:creationId xmlns="" xmlns:a16="http://schemas.microsoft.com/office/drawing/2014/main" id="{DA50C132-3A30-7E9C-0BBB-1CD1A789CE68}"/>
+                <a16:creationId xmlns:a16="http://schemas.microsoft.com/office/drawing/2014/main" id="{DA50C132-3A30-7E9C-0BBB-1CD1A789CE68}"/>
               </a:ext>
             </a:extLst>
           </p:cNvPr>
@@ -3564,7 +3564,7 @@
           <p:cNvPr id="3" name="그림 개체 틀 2">
             <a:extLst>
               <a:ext uri="{FF2B5EF4-FFF2-40B4-BE49-F238E27FC236}">
-                <a16:creationId xmlns="" xmlns:a16="http://schemas.microsoft.com/office/drawing/2014/main" id="{2F31776A-D32D-34F5-8A99-A26F4F6535B9}"/>
+                <a16:creationId xmlns:a16="http://schemas.microsoft.com/office/drawing/2014/main" id="{2F31776A-D32D-34F5-8A99-A26F4F6535B9}"/>
               </a:ext>
             </a:extLst>
           </p:cNvPr>
@@ -3631,7 +3631,7 @@
           <p:cNvPr id="4" name="텍스트 개체 틀 3">
             <a:extLst>
               <a:ext uri="{FF2B5EF4-FFF2-40B4-BE49-F238E27FC236}">
-                <a16:creationId xmlns="" xmlns:a16="http://schemas.microsoft.com/office/drawing/2014/main" id="{3E500BF3-C366-20F6-6257-8233A0794521}"/>
+                <a16:creationId xmlns:a16="http://schemas.microsoft.com/office/drawing/2014/main" id="{3E500BF3-C366-20F6-6257-8233A0794521}"/>
               </a:ext>
             </a:extLst>
           </p:cNvPr>
@@ -3702,7 +3702,7 @@
           <p:cNvPr id="5" name="날짜 개체 틀 4">
             <a:extLst>
               <a:ext uri="{FF2B5EF4-FFF2-40B4-BE49-F238E27FC236}">
-                <a16:creationId xmlns="" xmlns:a16="http://schemas.microsoft.com/office/drawing/2014/main" id="{DB1C119C-B590-D055-6B10-AAE861F0D2B1}"/>
+                <a16:creationId xmlns:a16="http://schemas.microsoft.com/office/drawing/2014/main" id="{DB1C119C-B590-D055-6B10-AAE861F0D2B1}"/>
               </a:ext>
             </a:extLst>
           </p:cNvPr>
@@ -3731,7 +3731,7 @@
           <p:cNvPr id="6" name="바닥글 개체 틀 5">
             <a:extLst>
               <a:ext uri="{FF2B5EF4-FFF2-40B4-BE49-F238E27FC236}">
-                <a16:creationId xmlns="" xmlns:a16="http://schemas.microsoft.com/office/drawing/2014/main" id="{00064F92-4550-973E-464E-89CA3E7EED4F}"/>
+                <a16:creationId xmlns:a16="http://schemas.microsoft.com/office/drawing/2014/main" id="{00064F92-4550-973E-464E-89CA3E7EED4F}"/>
               </a:ext>
             </a:extLst>
           </p:cNvPr>
@@ -3756,7 +3756,7 @@
           <p:cNvPr id="7" name="슬라이드 번호 개체 틀 6">
             <a:extLst>
               <a:ext uri="{FF2B5EF4-FFF2-40B4-BE49-F238E27FC236}">
-                <a16:creationId xmlns="" xmlns:a16="http://schemas.microsoft.com/office/drawing/2014/main" id="{708384D1-792D-8EA8-718E-F756CEE623A7}"/>
+                <a16:creationId xmlns:a16="http://schemas.microsoft.com/office/drawing/2014/main" id="{708384D1-792D-8EA8-718E-F756CEE623A7}"/>
               </a:ext>
             </a:extLst>
           </p:cNvPr>
@@ -3820,7 +3820,7 @@
           <p:cNvPr id="2" name="제목 개체 틀 1">
             <a:extLst>
               <a:ext uri="{FF2B5EF4-FFF2-40B4-BE49-F238E27FC236}">
-                <a16:creationId xmlns="" xmlns:a16="http://schemas.microsoft.com/office/drawing/2014/main" id="{C0AC0570-6E75-D8C0-582D-3A448969CF8B}"/>
+                <a16:creationId xmlns:a16="http://schemas.microsoft.com/office/drawing/2014/main" id="{C0AC0570-6E75-D8C0-582D-3A448969CF8B}"/>
               </a:ext>
             </a:extLst>
           </p:cNvPr>
@@ -3858,7 +3858,7 @@
           <p:cNvPr id="3" name="텍스트 개체 틀 2">
             <a:extLst>
               <a:ext uri="{FF2B5EF4-FFF2-40B4-BE49-F238E27FC236}">
-                <a16:creationId xmlns="" xmlns:a16="http://schemas.microsoft.com/office/drawing/2014/main" id="{79ADFDDF-DF3C-19FA-0ED8-5D640C08DB4B}"/>
+                <a16:creationId xmlns:a16="http://schemas.microsoft.com/office/drawing/2014/main" id="{79ADFDDF-DF3C-19FA-0ED8-5D640C08DB4B}"/>
               </a:ext>
             </a:extLst>
           </p:cNvPr>
@@ -3925,7 +3925,7 @@
           <p:cNvPr id="4" name="날짜 개체 틀 3">
             <a:extLst>
               <a:ext uri="{FF2B5EF4-FFF2-40B4-BE49-F238E27FC236}">
-                <a16:creationId xmlns="" xmlns:a16="http://schemas.microsoft.com/office/drawing/2014/main" id="{AB9AC677-7913-29B2-30F7-969771FA5D05}"/>
+                <a16:creationId xmlns:a16="http://schemas.microsoft.com/office/drawing/2014/main" id="{AB9AC677-7913-29B2-30F7-969771FA5D05}"/>
               </a:ext>
             </a:extLst>
           </p:cNvPr>
@@ -3972,7 +3972,7 @@
           <p:cNvPr id="5" name="바닥글 개체 틀 4">
             <a:extLst>
               <a:ext uri="{FF2B5EF4-FFF2-40B4-BE49-F238E27FC236}">
-                <a16:creationId xmlns="" xmlns:a16="http://schemas.microsoft.com/office/drawing/2014/main" id="{3A6836E4-21B2-245A-8933-7F64F64AC382}"/>
+                <a16:creationId xmlns:a16="http://schemas.microsoft.com/office/drawing/2014/main" id="{3A6836E4-21B2-245A-8933-7F64F64AC382}"/>
               </a:ext>
             </a:extLst>
           </p:cNvPr>
@@ -4015,7 +4015,7 @@
           <p:cNvPr id="6" name="슬라이드 번호 개체 틀 5">
             <a:extLst>
               <a:ext uri="{FF2B5EF4-FFF2-40B4-BE49-F238E27FC236}">
-                <a16:creationId xmlns="" xmlns:a16="http://schemas.microsoft.com/office/drawing/2014/main" id="{6F2D0B4E-8F0D-F1B8-2A71-9862FC9749C5}"/>
+                <a16:creationId xmlns:a16="http://schemas.microsoft.com/office/drawing/2014/main" id="{6F2D0B4E-8F0D-F1B8-2A71-9862FC9749C5}"/>
               </a:ext>
             </a:extLst>
           </p:cNvPr>
@@ -4442,7 +4442,7 @@
               <a:t>5</a:t>
             </a:r>
             <a:r>
-              <a:rPr lang="ko-KR" altLang="en-US" sz="2400" dirty="0" smtClean="0">
+              <a:rPr lang="ko-KR" altLang="en-US" sz="2400" dirty="0">
                 <a:latin typeface="나눔바른고딕" panose="020B0603020101020101" pitchFamily="34" charset="-127"/>
                 <a:ea typeface="나눔바른고딕" panose="020B0603020101020101" pitchFamily="34" charset="-127"/>
               </a:rPr>
@@ -4521,7 +4521,7 @@
         <p:cNvPr id="1" name="">
           <a:extLst>
             <a:ext uri="{FF2B5EF4-FFF2-40B4-BE49-F238E27FC236}">
-              <a16:creationId xmlns="" xmlns:a16="http://schemas.microsoft.com/office/drawing/2014/main" id="{49DA7EAA-204E-2F90-E52A-6C83B9013025}"/>
+              <a16:creationId xmlns:a16="http://schemas.microsoft.com/office/drawing/2014/main" id="{49DA7EAA-204E-2F90-E52A-6C83B9013025}"/>
             </a:ext>
           </a:extLst>
         </p:cNvPr>
@@ -4541,7 +4541,7 @@
           <p:cNvPr id="8" name="TextBox 7">
             <a:extLst>
               <a:ext uri="{FF2B5EF4-FFF2-40B4-BE49-F238E27FC236}">
-                <a16:creationId xmlns="" xmlns:a16="http://schemas.microsoft.com/office/drawing/2014/main" id="{701093AF-254C-83D7-8032-465A5FB513FB}"/>
+                <a16:creationId xmlns:a16="http://schemas.microsoft.com/office/drawing/2014/main" id="{701093AF-254C-83D7-8032-465A5FB513FB}"/>
               </a:ext>
             </a:extLst>
           </p:cNvPr>
@@ -4583,7 +4583,7 @@
           <p:cNvPr id="10" name="TextBox 9">
             <a:extLst>
               <a:ext uri="{FF2B5EF4-FFF2-40B4-BE49-F238E27FC236}">
-                <a16:creationId xmlns="" xmlns:a16="http://schemas.microsoft.com/office/drawing/2014/main" id="{2D538815-CBEF-E37B-5659-B5091F86B485}"/>
+                <a16:creationId xmlns:a16="http://schemas.microsoft.com/office/drawing/2014/main" id="{2D538815-CBEF-E37B-5659-B5091F86B485}"/>
               </a:ext>
             </a:extLst>
           </p:cNvPr>
@@ -4607,11 +4607,11 @@
           <a:lstStyle/>
           <a:p>
             <a:r>
-              <a:rPr lang="ko-KR" altLang="en-US" sz="1600" dirty="0" smtClean="0">
-                <a:latin typeface="나눔바른고딕" panose="020B0603020101020101" pitchFamily="34" charset="-127"/>
-                <a:ea typeface="나눔바른고딕" panose="020B0603020101020101" pitchFamily="34" charset="-127"/>
-              </a:rPr>
-              <a:t>지형 인식 및 인식 결과 처리 분리</a:t>
+              <a:rPr lang="ko-KR" altLang="en-US" sz="1600" dirty="0">
+                <a:latin typeface="나눔바른고딕" panose="020B0603020101020101" pitchFamily="34" charset="-127"/>
+                <a:ea typeface="나눔바른고딕" panose="020B0603020101020101" pitchFamily="34" charset="-127"/>
+              </a:rPr>
+              <a:t>지형 인식과 인식 결과 처리 분리</a:t>
             </a:r>
             <a:endParaRPr lang="en-US" altLang="ko-KR" sz="1600" dirty="0">
               <a:latin typeface="나눔바른고딕" panose="020B0603020101020101" pitchFamily="34" charset="-127"/>
@@ -4625,7 +4625,7 @@
           <p:cNvPr id="3" name="직선 연결선 2">
             <a:extLst>
               <a:ext uri="{FF2B5EF4-FFF2-40B4-BE49-F238E27FC236}">
-                <a16:creationId xmlns="" xmlns:a16="http://schemas.microsoft.com/office/drawing/2014/main" id="{76FFFECF-4B1C-95DF-32C3-2D2F19BEDAFB}"/>
+                <a16:creationId xmlns:a16="http://schemas.microsoft.com/office/drawing/2014/main" id="{76FFFECF-4B1C-95DF-32C3-2D2F19BEDAFB}"/>
               </a:ext>
             </a:extLst>
           </p:cNvPr>
@@ -4761,7 +4761,7 @@
           <p:cNvPr id="11" name="TextBox 10">
             <a:extLst>
               <a:ext uri="{FF2B5EF4-FFF2-40B4-BE49-F238E27FC236}">
-                <a16:creationId xmlns="" xmlns:a16="http://schemas.microsoft.com/office/drawing/2014/main" id="{2D538815-CBEF-E37B-5659-B5091F86B485}"/>
+                <a16:creationId xmlns:a16="http://schemas.microsoft.com/office/drawing/2014/main" id="{2D538815-CBEF-E37B-5659-B5091F86B485}"/>
               </a:ext>
             </a:extLst>
           </p:cNvPr>
@@ -4770,8 +4770,8 @@
         </p:nvSpPr>
         <p:spPr>
           <a:xfrm>
-            <a:off x="302449" y="1342316"/>
-            <a:ext cx="7464813" cy="830997"/>
+            <a:off x="302450" y="1342316"/>
+            <a:ext cx="5138684" cy="2123658"/>
           </a:xfrm>
           <a:prstGeom prst="rect">
             <a:avLst/>
@@ -4785,292 +4785,510 @@
           <a:lstStyle/>
           <a:p>
             <a:r>
-              <a:rPr lang="ko-KR" altLang="en-US" sz="1200" dirty="0" smtClean="0">
-                <a:latin typeface="나눔바른고딕" panose="020B0603020101020101" pitchFamily="34" charset="-127"/>
-                <a:ea typeface="나눔바른고딕" panose="020B0603020101020101" pitchFamily="34" charset="-127"/>
-              </a:rPr>
-              <a:t>기존</a:t>
-            </a:r>
-            <a:r>
-              <a:rPr lang="ko-KR" altLang="en-US" sz="1200" dirty="0" smtClean="0">
-                <a:latin typeface="나눔바른고딕" panose="020B0603020101020101" pitchFamily="34" charset="-127"/>
-                <a:ea typeface="나눔바른고딕" panose="020B0603020101020101" pitchFamily="34" charset="-127"/>
-              </a:rPr>
-              <a:t>엔 </a:t>
-            </a:r>
-            <a:r>
-              <a:rPr lang="ko-KR" altLang="en-US" sz="1200" dirty="0" smtClean="0">
-                <a:latin typeface="나눔바른고딕" panose="020B0603020101020101" pitchFamily="34" charset="-127"/>
-                <a:ea typeface="나눔바른고딕" panose="020B0603020101020101" pitchFamily="34" charset="-127"/>
-              </a:rPr>
-              <a:t>지형 인식 과정에서 예상되는 행동까지 판단해서 전달</a:t>
-            </a:r>
-            <a:endParaRPr lang="en-US" altLang="ko-KR" sz="1200" dirty="0" smtClean="0">
+              <a:rPr lang="ko-KR" altLang="en-US" sz="1200" dirty="0">
+                <a:latin typeface="나눔바른고딕" panose="020B0603020101020101" pitchFamily="34" charset="-127"/>
+                <a:ea typeface="나눔바른고딕" panose="020B0603020101020101" pitchFamily="34" charset="-127"/>
+              </a:rPr>
+              <a:t>기존엔 지형 인식 과정에서 예상되는 행동까지 판단해서 전달</a:t>
+            </a:r>
+            <a:endParaRPr lang="en-US" altLang="ko-KR" sz="1200" dirty="0">
               <a:latin typeface="나눔바른고딕" panose="020B0603020101020101" pitchFamily="34" charset="-127"/>
               <a:ea typeface="나눔바른고딕" panose="020B0603020101020101" pitchFamily="34" charset="-127"/>
             </a:endParaRPr>
           </a:p>
           <a:p>
-            <a:endParaRPr lang="en-US" altLang="ko-KR" sz="1200" dirty="0" smtClean="0">
+            <a:endParaRPr lang="en-US" altLang="ko-KR" sz="1200" dirty="0">
               <a:latin typeface="나눔바른고딕" panose="020B0603020101020101" pitchFamily="34" charset="-127"/>
               <a:ea typeface="나눔바른고딕" panose="020B0603020101020101" pitchFamily="34" charset="-127"/>
             </a:endParaRPr>
           </a:p>
           <a:p>
             <a:r>
-              <a:rPr lang="ko-KR" altLang="en-US" sz="1200" dirty="0" smtClean="0">
-                <a:latin typeface="나눔바른고딕" panose="020B0603020101020101" pitchFamily="34" charset="-127"/>
-                <a:ea typeface="나눔바른고딕" panose="020B0603020101020101" pitchFamily="34" charset="-127"/>
-              </a:rPr>
-              <a:t>캐릭터의 상태가 세분화되면서</a:t>
-            </a:r>
-            <a:r>
-              <a:rPr lang="en-US" altLang="ko-KR" sz="1200" dirty="0" smtClean="0">
+              <a:rPr lang="ko-KR" altLang="en-US" sz="1200" dirty="0">
+                <a:latin typeface="나눔바른고딕" panose="020B0603020101020101" pitchFamily="34" charset="-127"/>
+                <a:ea typeface="나눔바른고딕" panose="020B0603020101020101" pitchFamily="34" charset="-127"/>
+              </a:rPr>
+              <a:t>캐릭터의 상태가 세분화하면서 상태</a:t>
+            </a:r>
+            <a:r>
+              <a:rPr lang="en-US" altLang="ko-KR" sz="1200" dirty="0">
                 <a:latin typeface="나눔바른고딕" panose="020B0603020101020101" pitchFamily="34" charset="-127"/>
                 <a:ea typeface="나눔바른고딕" panose="020B0603020101020101" pitchFamily="34" charset="-127"/>
               </a:rPr>
               <a:t>, </a:t>
             </a:r>
             <a:r>
-              <a:rPr lang="ko-KR" altLang="en-US" sz="1200" dirty="0" smtClean="0">
-                <a:latin typeface="나눔바른고딕" panose="020B0603020101020101" pitchFamily="34" charset="-127"/>
-                <a:ea typeface="나눔바른고딕" panose="020B0603020101020101" pitchFamily="34" charset="-127"/>
-              </a:rPr>
-              <a:t>경우에 따라 기존 판단 결과를 번복하고</a:t>
-            </a:r>
-            <a:endParaRPr lang="en-US" altLang="ko-KR" sz="1200" dirty="0" smtClean="0">
+              <a:rPr lang="ko-KR" altLang="en-US" sz="1200" dirty="0">
+                <a:latin typeface="나눔바른고딕" panose="020B0603020101020101" pitchFamily="34" charset="-127"/>
+                <a:ea typeface="나눔바른고딕" panose="020B0603020101020101" pitchFamily="34" charset="-127"/>
+              </a:rPr>
+              <a:t>장애물 따라 기존 판단 결과를 번복하고</a:t>
+            </a:r>
+            <a:endParaRPr lang="en-US" altLang="ko-KR" sz="1200" dirty="0">
               <a:latin typeface="나눔바른고딕" panose="020B0603020101020101" pitchFamily="34" charset="-127"/>
               <a:ea typeface="나눔바른고딕" panose="020B0603020101020101" pitchFamily="34" charset="-127"/>
             </a:endParaRPr>
           </a:p>
           <a:p>
             <a:r>
-              <a:rPr lang="ko-KR" altLang="en-US" sz="1200" dirty="0" smtClean="0">
+              <a:rPr lang="ko-KR" altLang="en-US" sz="1200" dirty="0">
                 <a:latin typeface="나눔바른고딕" panose="020B0603020101020101" pitchFamily="34" charset="-127"/>
                 <a:ea typeface="나눔바른고딕" panose="020B0603020101020101" pitchFamily="34" charset="-127"/>
               </a:rPr>
               <a:t>캐릭터의 현재 상태</a:t>
             </a:r>
             <a:r>
-              <a:rPr lang="en-US" altLang="ko-KR" sz="1200" dirty="0" smtClean="0">
+              <a:rPr lang="en-US" altLang="ko-KR" sz="1200" dirty="0">
                 <a:latin typeface="나눔바른고딕" panose="020B0603020101020101" pitchFamily="34" charset="-127"/>
                 <a:ea typeface="나눔바른고딕" panose="020B0603020101020101" pitchFamily="34" charset="-127"/>
               </a:rPr>
               <a:t>, </a:t>
             </a:r>
             <a:r>
-              <a:rPr lang="ko-KR" altLang="en-US" sz="1200" dirty="0" smtClean="0">
+              <a:rPr lang="ko-KR" altLang="en-US" sz="1200" dirty="0">
                 <a:latin typeface="나눔바른고딕" panose="020B0603020101020101" pitchFamily="34" charset="-127"/>
                 <a:ea typeface="나눔바른고딕" panose="020B0603020101020101" pitchFamily="34" charset="-127"/>
               </a:rPr>
               <a:t>위치에 따라 새로 행동을 찾아야 하는 상황이 발생</a:t>
             </a:r>
-            <a:r>
-              <a:rPr lang="en-US" altLang="ko-KR" sz="1200" dirty="0" smtClean="0">
-                <a:latin typeface="나눔바른고딕" panose="020B0603020101020101" pitchFamily="34" charset="-127"/>
-                <a:ea typeface="나눔바른고딕" panose="020B0603020101020101" pitchFamily="34" charset="-127"/>
-              </a:rPr>
-              <a:t>.</a:t>
-            </a:r>
-          </a:p>
-        </p:txBody>
-      </p:sp>
-      <p:sp>
-        <p:nvSpPr>
-          <p:cNvPr id="2" name="직사각형 1"/>
-          <p:cNvSpPr/>
+            <a:endParaRPr lang="en-US" altLang="ko-KR" sz="1200" dirty="0">
+              <a:latin typeface="나눔바른고딕" panose="020B0603020101020101" pitchFamily="34" charset="-127"/>
+              <a:ea typeface="나눔바른고딕" panose="020B0603020101020101" pitchFamily="34" charset="-127"/>
+            </a:endParaRPr>
+          </a:p>
+          <a:p>
+            <a:endParaRPr lang="en-US" altLang="ko-KR" sz="1200" dirty="0">
+              <a:latin typeface="나눔바른고딕" panose="020B0603020101020101" pitchFamily="34" charset="-127"/>
+              <a:ea typeface="나눔바른고딕" panose="020B0603020101020101" pitchFamily="34" charset="-127"/>
+            </a:endParaRPr>
+          </a:p>
+          <a:p>
+            <a:endParaRPr lang="en-US" altLang="ko-KR" sz="1200" dirty="0">
+              <a:latin typeface="나눔바른고딕" panose="020B0603020101020101" pitchFamily="34" charset="-127"/>
+              <a:ea typeface="나눔바른고딕" panose="020B0603020101020101" pitchFamily="34" charset="-127"/>
+            </a:endParaRPr>
+          </a:p>
+          <a:p>
+            <a:r>
+              <a:rPr lang="ko-KR" altLang="en-US" sz="1200" dirty="0">
+                <a:latin typeface="나눔바른고딕" panose="020B0603020101020101" pitchFamily="34" charset="-127"/>
+                <a:ea typeface="나눔바른고딕" panose="020B0603020101020101" pitchFamily="34" charset="-127"/>
+              </a:rPr>
+              <a:t>문제 원인 </a:t>
+            </a:r>
+            <a:r>
+              <a:rPr lang="en-US" altLang="ko-KR" sz="1200" dirty="0">
+                <a:latin typeface="나눔바른고딕" panose="020B0603020101020101" pitchFamily="34" charset="-127"/>
+                <a:ea typeface="나눔바른고딕" panose="020B0603020101020101" pitchFamily="34" charset="-127"/>
+              </a:rPr>
+              <a:t>:</a:t>
+            </a:r>
+          </a:p>
+          <a:p>
+            <a:r>
+              <a:rPr lang="ko-KR" altLang="en-US" sz="1200" dirty="0">
+                <a:latin typeface="나눔바른고딕" panose="020B0603020101020101" pitchFamily="34" charset="-127"/>
+                <a:ea typeface="나눔바른고딕" panose="020B0603020101020101" pitchFamily="34" charset="-127"/>
+              </a:rPr>
+              <a:t>지형 인식과 행동 선택이 같은 곳에서 이루어 지는 것이 문제</a:t>
+            </a:r>
+            <a:endParaRPr lang="en-US" altLang="ko-KR" sz="1200" dirty="0">
+              <a:latin typeface="나눔바른고딕" panose="020B0603020101020101" pitchFamily="34" charset="-127"/>
+              <a:ea typeface="나눔바른고딕" panose="020B0603020101020101" pitchFamily="34" charset="-127"/>
+            </a:endParaRPr>
+          </a:p>
+          <a:p>
+            <a:endParaRPr lang="en-US" altLang="ko-KR" sz="1200" dirty="0">
+              <a:latin typeface="나눔바른고딕" panose="020B0603020101020101" pitchFamily="34" charset="-127"/>
+              <a:ea typeface="나눔바른고딕" panose="020B0603020101020101" pitchFamily="34" charset="-127"/>
+            </a:endParaRPr>
+          </a:p>
+          <a:p>
+            <a:r>
+              <a:rPr lang="ko-KR" altLang="en-US" sz="1200" dirty="0">
+                <a:latin typeface="나눔바른고딕" panose="020B0603020101020101" pitchFamily="34" charset="-127"/>
+                <a:ea typeface="나눔바른고딕" panose="020B0603020101020101" pitchFamily="34" charset="-127"/>
+              </a:rPr>
+              <a:t>해결 방법 </a:t>
+            </a:r>
+            <a:r>
+              <a:rPr lang="en-US" altLang="ko-KR" sz="1200" dirty="0">
+                <a:latin typeface="나눔바른고딕" panose="020B0603020101020101" pitchFamily="34" charset="-127"/>
+                <a:ea typeface="나눔바른고딕" panose="020B0603020101020101" pitchFamily="34" charset="-127"/>
+              </a:rPr>
+              <a:t>:</a:t>
+            </a:r>
+          </a:p>
+          <a:p>
+            <a:r>
+              <a:rPr lang="ko-KR" altLang="en-US" sz="1200" dirty="0">
+                <a:latin typeface="나눔바른고딕" panose="020B0603020101020101" pitchFamily="34" charset="-127"/>
+                <a:ea typeface="나눔바른고딕" panose="020B0603020101020101" pitchFamily="34" charset="-127"/>
+              </a:rPr>
+              <a:t>이 부분을 해소하기 위해 지형 인식과 처리를 분리 작업을 진행</a:t>
+            </a:r>
+            <a:endParaRPr lang="en-US" altLang="ko-KR" sz="1200" dirty="0">
+              <a:latin typeface="나눔바른고딕" panose="020B0603020101020101" pitchFamily="34" charset="-127"/>
+              <a:ea typeface="나눔바른고딕" panose="020B0603020101020101" pitchFamily="34" charset="-127"/>
+            </a:endParaRPr>
+          </a:p>
+        </p:txBody>
+      </p:sp>
+      <p:pic>
+        <p:nvPicPr>
+          <p:cNvPr id="5" name="그림 4">
+            <a:extLst>
+              <a:ext uri="{FF2B5EF4-FFF2-40B4-BE49-F238E27FC236}">
+                <a16:creationId xmlns:a16="http://schemas.microsoft.com/office/drawing/2014/main" id="{6C34DFFA-E592-0721-82E0-F9FED048F378}"/>
+              </a:ext>
+            </a:extLst>
+          </p:cNvPr>
+          <p:cNvPicPr>
+            <a:picLocks noChangeAspect="1"/>
+          </p:cNvPicPr>
           <p:nvPr/>
-        </p:nvSpPr>
+        </p:nvPicPr>
+        <p:blipFill>
+          <a:blip r:embed="rId3"/>
+          <a:stretch>
+            <a:fillRect/>
+          </a:stretch>
+        </p:blipFill>
         <p:spPr>
           <a:xfrm>
-            <a:off x="302449" y="2435517"/>
-            <a:ext cx="6096000" cy="1569660"/>
+            <a:off x="5669280" y="1003763"/>
+            <a:ext cx="4642617" cy="2360798"/>
           </a:xfrm>
           <a:prstGeom prst="rect">
             <a:avLst/>
           </a:prstGeom>
         </p:spPr>
-        <p:txBody>
-          <a:bodyPr>
+      </p:pic>
+      <p:sp>
+        <p:nvSpPr>
+          <p:cNvPr id="13" name="TextBox 12">
+            <a:extLst>
+              <a:ext uri="{FF2B5EF4-FFF2-40B4-BE49-F238E27FC236}">
+                <a16:creationId xmlns:a16="http://schemas.microsoft.com/office/drawing/2014/main" id="{4D7468A1-FE42-10CE-451E-6C93240EF165}"/>
+              </a:ext>
+            </a:extLst>
+          </p:cNvPr>
+          <p:cNvSpPr txBox="1"/>
+          <p:nvPr/>
+        </p:nvSpPr>
+        <p:spPr>
+          <a:xfrm>
+            <a:off x="4716877" y="3493440"/>
+            <a:ext cx="2279619" cy="246221"/>
+          </a:xfrm>
+          <a:prstGeom prst="rect">
+            <a:avLst/>
+          </a:prstGeom>
+          <a:noFill/>
+        </p:spPr>
+        <p:txBody>
+          <a:bodyPr wrap="square" rtlCol="0">
             <a:spAutoFit/>
           </a:bodyPr>
           <a:lstStyle/>
           <a:p>
-            <a:r>
-              <a:rPr lang="ko-KR" altLang="en-US" sz="1200" dirty="0" smtClean="0">
-                <a:latin typeface="나눔바른고딕" panose="020B0603020101020101" pitchFamily="34" charset="-127"/>
-                <a:ea typeface="나눔바른고딕" panose="020B0603020101020101" pitchFamily="34" charset="-127"/>
-              </a:rPr>
-              <a:t>특정한 장애물에 대해서 고정적으로 특정한 행동을 하라는 현재 방식에서 발생한 문제</a:t>
-            </a:r>
-            <a:r>
-              <a:rPr lang="en-US" altLang="ko-KR" sz="1200" dirty="0" smtClean="0">
-                <a:latin typeface="나눔바른고딕" panose="020B0603020101020101" pitchFamily="34" charset="-127"/>
-                <a:ea typeface="나눔바른고딕" panose="020B0603020101020101" pitchFamily="34" charset="-127"/>
-              </a:rPr>
-              <a:t>.</a:t>
-            </a:r>
-          </a:p>
-          <a:p>
-            <a:r>
-              <a:rPr lang="ko-KR" altLang="en-US" sz="1200" dirty="0" smtClean="0">
-                <a:latin typeface="나눔바른고딕" panose="020B0603020101020101" pitchFamily="34" charset="-127"/>
-                <a:ea typeface="나눔바른고딕" panose="020B0603020101020101" pitchFamily="34" charset="-127"/>
-              </a:rPr>
-              <a:t>이 부분을 해소하기 위해 지형 인식과 처리를 분리</a:t>
-            </a:r>
-            <a:r>
-              <a:rPr lang="en-US" altLang="ko-KR" sz="1200" dirty="0" smtClean="0">
-                <a:latin typeface="나눔바른고딕" panose="020B0603020101020101" pitchFamily="34" charset="-127"/>
-                <a:ea typeface="나눔바른고딕" panose="020B0603020101020101" pitchFamily="34" charset="-127"/>
-              </a:rPr>
-              <a:t>.</a:t>
-            </a:r>
-          </a:p>
-          <a:p>
-            <a:endParaRPr lang="en-US" altLang="ko-KR" sz="1200" dirty="0">
+            <a:pPr algn="ctr"/>
+            <a:r>
+              <a:rPr lang="en-US" altLang="ko-KR" sz="1000" dirty="0">
+                <a:latin typeface="나눔바른고딕" panose="020B0603020101020101" pitchFamily="34" charset="-127"/>
+                <a:ea typeface="나눔바른고딕" panose="020B0603020101020101" pitchFamily="34" charset="-127"/>
+              </a:rPr>
+              <a:t>Beam Stand -&gt; Landing Idle</a:t>
+            </a:r>
+          </a:p>
+        </p:txBody>
+      </p:sp>
+      <p:sp>
+        <p:nvSpPr>
+          <p:cNvPr id="17" name="TextBox 16">
+            <a:extLst>
+              <a:ext uri="{FF2B5EF4-FFF2-40B4-BE49-F238E27FC236}">
+                <a16:creationId xmlns:a16="http://schemas.microsoft.com/office/drawing/2014/main" id="{C05A1B2C-B9A6-4251-A625-337E28E52A88}"/>
+              </a:ext>
+            </a:extLst>
+          </p:cNvPr>
+          <p:cNvSpPr txBox="1"/>
+          <p:nvPr/>
+        </p:nvSpPr>
+        <p:spPr>
+          <a:xfrm>
+            <a:off x="2217216" y="3703115"/>
+            <a:ext cx="2279619" cy="246221"/>
+          </a:xfrm>
+          <a:prstGeom prst="rect">
+            <a:avLst/>
+          </a:prstGeom>
+          <a:noFill/>
+        </p:spPr>
+        <p:txBody>
+          <a:bodyPr wrap="square" rtlCol="0">
+            <a:spAutoFit/>
+          </a:bodyPr>
+          <a:lstStyle/>
+          <a:p>
+            <a:pPr algn="ctr"/>
+            <a:r>
+              <a:rPr lang="ko-KR" altLang="en-US" sz="1000" dirty="0">
+                <a:latin typeface="나눔바른고딕" panose="020B0603020101020101" pitchFamily="34" charset="-127"/>
+                <a:ea typeface="나눔바른고딕" panose="020B0603020101020101" pitchFamily="34" charset="-127"/>
+              </a:rPr>
+              <a:t>번복 전</a:t>
+            </a:r>
+            <a:endParaRPr lang="en-US" altLang="ko-KR" sz="1000" dirty="0">
               <a:latin typeface="나눔바른고딕" panose="020B0603020101020101" pitchFamily="34" charset="-127"/>
               <a:ea typeface="나눔바른고딕" panose="020B0603020101020101" pitchFamily="34" charset="-127"/>
             </a:endParaRPr>
           </a:p>
-          <a:p>
-            <a:r>
-              <a:rPr lang="ko-KR" altLang="en-US" sz="1200" dirty="0" smtClean="0">
-                <a:latin typeface="나눔바른고딕" panose="020B0603020101020101" pitchFamily="34" charset="-127"/>
-                <a:ea typeface="나눔바른고딕" panose="020B0603020101020101" pitchFamily="34" charset="-127"/>
-              </a:rPr>
-              <a:t>지형 인식에선 행동 유형 대신 인지한 지형에 대한 정보를 제공</a:t>
-            </a:r>
-            <a:endParaRPr lang="en-US" altLang="ko-KR" sz="1200" dirty="0" smtClean="0">
+        </p:txBody>
+      </p:sp>
+      <p:sp>
+        <p:nvSpPr>
+          <p:cNvPr id="19" name="TextBox 18">
+            <a:extLst>
+              <a:ext uri="{FF2B5EF4-FFF2-40B4-BE49-F238E27FC236}">
+                <a16:creationId xmlns:a16="http://schemas.microsoft.com/office/drawing/2014/main" id="{52EBA000-A36C-DD17-1CCB-57E6DE88BBD3}"/>
+              </a:ext>
+            </a:extLst>
+          </p:cNvPr>
+          <p:cNvSpPr txBox="1"/>
+          <p:nvPr/>
+        </p:nvSpPr>
+        <p:spPr>
+          <a:xfrm>
+            <a:off x="7216539" y="3703115"/>
+            <a:ext cx="2279619" cy="246221"/>
+          </a:xfrm>
+          <a:prstGeom prst="rect">
+            <a:avLst/>
+          </a:prstGeom>
+          <a:noFill/>
+        </p:spPr>
+        <p:txBody>
+          <a:bodyPr wrap="square" rtlCol="0">
+            <a:spAutoFit/>
+          </a:bodyPr>
+          <a:lstStyle/>
+          <a:p>
+            <a:pPr algn="ctr"/>
+            <a:r>
+              <a:rPr lang="ko-KR" altLang="en-US" sz="1000" dirty="0">
+                <a:latin typeface="나눔바른고딕" panose="020B0603020101020101" pitchFamily="34" charset="-127"/>
+                <a:ea typeface="나눔바른고딕" panose="020B0603020101020101" pitchFamily="34" charset="-127"/>
+              </a:rPr>
+              <a:t>번복 후</a:t>
+            </a:r>
+            <a:endParaRPr lang="en-US" altLang="ko-KR" sz="1000" dirty="0">
               <a:latin typeface="나눔바른고딕" panose="020B0603020101020101" pitchFamily="34" charset="-127"/>
               <a:ea typeface="나눔바른고딕" panose="020B0603020101020101" pitchFamily="34" charset="-127"/>
             </a:endParaRPr>
           </a:p>
-          <a:p>
-            <a:r>
-              <a:rPr lang="ko-KR" altLang="en-US" sz="1200" dirty="0" smtClean="0">
-                <a:latin typeface="나눔바른고딕" panose="020B0603020101020101" pitchFamily="34" charset="-127"/>
-                <a:ea typeface="나눔바른고딕" panose="020B0603020101020101" pitchFamily="34" charset="-127"/>
-              </a:rPr>
-              <a:t>장애물 포인터</a:t>
-            </a:r>
-            <a:r>
-              <a:rPr lang="en-US" altLang="ko-KR" sz="1200" dirty="0" smtClean="0">
-                <a:latin typeface="나눔바른고딕" panose="020B0603020101020101" pitchFamily="34" charset="-127"/>
-                <a:ea typeface="나눔바른고딕" panose="020B0603020101020101" pitchFamily="34" charset="-127"/>
-              </a:rPr>
-              <a:t>, </a:t>
-            </a:r>
-            <a:r>
-              <a:rPr lang="ko-KR" altLang="en-US" sz="1200" dirty="0" smtClean="0">
-                <a:latin typeface="나눔바른고딕" panose="020B0603020101020101" pitchFamily="34" charset="-127"/>
-                <a:ea typeface="나눔바른고딕" panose="020B0603020101020101" pitchFamily="34" charset="-127"/>
-              </a:rPr>
-              <a:t>최초 접촉 위치</a:t>
-            </a:r>
-            <a:r>
-              <a:rPr lang="en-US" altLang="ko-KR" sz="1200" dirty="0" smtClean="0">
-                <a:latin typeface="나눔바른고딕" panose="020B0603020101020101" pitchFamily="34" charset="-127"/>
-                <a:ea typeface="나눔바른고딕" panose="020B0603020101020101" pitchFamily="34" charset="-127"/>
-              </a:rPr>
-              <a:t>, </a:t>
-            </a:r>
-            <a:r>
-              <a:rPr lang="ko-KR" altLang="en-US" sz="1200" dirty="0" smtClean="0">
-                <a:latin typeface="나눔바른고딕" panose="020B0603020101020101" pitchFamily="34" charset="-127"/>
-                <a:ea typeface="나눔바른고딕" panose="020B0603020101020101" pitchFamily="34" charset="-127"/>
-              </a:rPr>
-              <a:t>파악한 모서리 위치</a:t>
-            </a:r>
-            <a:r>
-              <a:rPr lang="en-US" altLang="ko-KR" sz="1200" dirty="0" smtClean="0">
-                <a:latin typeface="나눔바른고딕" panose="020B0603020101020101" pitchFamily="34" charset="-127"/>
-                <a:ea typeface="나눔바른고딕" panose="020B0603020101020101" pitchFamily="34" charset="-127"/>
-              </a:rPr>
-              <a:t>(</a:t>
-            </a:r>
-            <a:r>
-              <a:rPr lang="ko-KR" altLang="en-US" sz="1200" dirty="0" smtClean="0">
-                <a:latin typeface="나눔바른고딕" panose="020B0603020101020101" pitchFamily="34" charset="-127"/>
-                <a:ea typeface="나눔바른고딕" panose="020B0603020101020101" pitchFamily="34" charset="-127"/>
-              </a:rPr>
-              <a:t>높이</a:t>
-            </a:r>
-            <a:r>
-              <a:rPr lang="en-US" altLang="ko-KR" sz="1200" dirty="0" smtClean="0">
-                <a:latin typeface="나눔바른고딕" panose="020B0603020101020101" pitchFamily="34" charset="-127"/>
-                <a:ea typeface="나눔바른고딕" panose="020B0603020101020101" pitchFamily="34" charset="-127"/>
-              </a:rPr>
-              <a:t>), </a:t>
-            </a:r>
-            <a:r>
-              <a:rPr lang="ko-KR" altLang="en-US" sz="1200" dirty="0" smtClean="0">
-                <a:latin typeface="나눔바른고딕" panose="020B0603020101020101" pitchFamily="34" charset="-127"/>
-                <a:ea typeface="나눔바른고딕" panose="020B0603020101020101" pitchFamily="34" charset="-127"/>
-              </a:rPr>
-              <a:t>장애물의 깊이</a:t>
-            </a:r>
-            <a:endParaRPr lang="en-US" altLang="ko-KR" sz="1200" dirty="0">
+        </p:txBody>
+      </p:sp>
+      <p:pic>
+        <p:nvPicPr>
+          <p:cNvPr id="21" name="그림 20">
+            <a:extLst>
+              <a:ext uri="{FF2B5EF4-FFF2-40B4-BE49-F238E27FC236}">
+                <a16:creationId xmlns:a16="http://schemas.microsoft.com/office/drawing/2014/main" id="{987B03BB-50EE-ED78-BE06-674052D6B5B5}"/>
+              </a:ext>
+            </a:extLst>
+          </p:cNvPr>
+          <p:cNvPicPr>
+            <a:picLocks noChangeAspect="1"/>
+          </p:cNvPicPr>
+          <p:nvPr/>
+        </p:nvPicPr>
+        <p:blipFill>
+          <a:blip r:embed="rId4">
+            <a:extLst>
+              <a:ext uri="{28A0092B-C50C-407E-A947-70E740481C1C}">
+                <a14:useLocalDpi xmlns:a14="http://schemas.microsoft.com/office/drawing/2010/main" val="0"/>
+              </a:ext>
+            </a:extLst>
+          </a:blip>
+          <a:stretch>
+            <a:fillRect/>
+          </a:stretch>
+        </p:blipFill>
+        <p:spPr>
+          <a:xfrm>
+            <a:off x="1356232" y="4041670"/>
+            <a:ext cx="4001585" cy="2114659"/>
+          </a:xfrm>
+          <a:prstGeom prst="rect">
+            <a:avLst/>
+          </a:prstGeom>
+        </p:spPr>
+      </p:pic>
+      <p:pic>
+        <p:nvPicPr>
+          <p:cNvPr id="23" name="그림 22">
+            <a:extLst>
+              <a:ext uri="{FF2B5EF4-FFF2-40B4-BE49-F238E27FC236}">
+                <a16:creationId xmlns:a16="http://schemas.microsoft.com/office/drawing/2014/main" id="{C0D3F082-C8A6-4222-3936-39CA7F1A9F85}"/>
+              </a:ext>
+            </a:extLst>
+          </p:cNvPr>
+          <p:cNvPicPr>
+            <a:picLocks noChangeAspect="1"/>
+          </p:cNvPicPr>
+          <p:nvPr/>
+        </p:nvPicPr>
+        <p:blipFill>
+          <a:blip r:embed="rId5">
+            <a:extLst>
+              <a:ext uri="{28A0092B-C50C-407E-A947-70E740481C1C}">
+                <a14:useLocalDpi xmlns:a14="http://schemas.microsoft.com/office/drawing/2010/main" val="0"/>
+              </a:ext>
+            </a:extLst>
+          </a:blip>
+          <a:stretch>
+            <a:fillRect/>
+          </a:stretch>
+        </p:blipFill>
+        <p:spPr>
+          <a:xfrm>
+            <a:off x="6355555" y="4041670"/>
+            <a:ext cx="4001585" cy="2114659"/>
+          </a:xfrm>
+          <a:prstGeom prst="rect">
+            <a:avLst/>
+          </a:prstGeom>
+        </p:spPr>
+      </p:pic>
+      <p:sp>
+        <p:nvSpPr>
+          <p:cNvPr id="25" name="TextBox 24">
+            <a:extLst>
+              <a:ext uri="{FF2B5EF4-FFF2-40B4-BE49-F238E27FC236}">
+                <a16:creationId xmlns:a16="http://schemas.microsoft.com/office/drawing/2014/main" id="{15DF56F4-C669-FCF6-18D9-A9B7A2C5CACD}"/>
+              </a:ext>
+            </a:extLst>
+          </p:cNvPr>
+          <p:cNvSpPr txBox="1"/>
+          <p:nvPr/>
+        </p:nvSpPr>
+        <p:spPr>
+          <a:xfrm>
+            <a:off x="2190078" y="6259409"/>
+            <a:ext cx="2279619" cy="246221"/>
+          </a:xfrm>
+          <a:prstGeom prst="rect">
+            <a:avLst/>
+          </a:prstGeom>
+          <a:noFill/>
+        </p:spPr>
+        <p:txBody>
+          <a:bodyPr wrap="square" rtlCol="0">
+            <a:spAutoFit/>
+          </a:bodyPr>
+          <a:lstStyle/>
+          <a:p>
+            <a:pPr algn="ctr"/>
+            <a:r>
+              <a:rPr lang="en-US" altLang="ko-KR" sz="1000" dirty="0">
+                <a:latin typeface="나눔바른고딕" panose="020B0603020101020101" pitchFamily="34" charset="-127"/>
+                <a:ea typeface="나눔바른고딕" panose="020B0603020101020101" pitchFamily="34" charset="-127"/>
+              </a:rPr>
+              <a:t>Default</a:t>
+            </a:r>
+            <a:r>
+              <a:rPr lang="ko-KR" altLang="en-US" sz="1000" dirty="0">
+                <a:latin typeface="나눔바른고딕" panose="020B0603020101020101" pitchFamily="34" charset="-127"/>
+                <a:ea typeface="나눔바른고딕" panose="020B0603020101020101" pitchFamily="34" charset="-127"/>
+              </a:rPr>
+              <a:t> 지형에 대해 </a:t>
+            </a:r>
+            <a:r>
+              <a:rPr lang="en-US" altLang="ko-KR" sz="1000" dirty="0">
+                <a:latin typeface="나눔바른고딕" panose="020B0603020101020101" pitchFamily="34" charset="-127"/>
+                <a:ea typeface="나눔바른고딕" panose="020B0603020101020101" pitchFamily="34" charset="-127"/>
+              </a:rPr>
+              <a:t>Vault Low </a:t>
+            </a:r>
+            <a:r>
+              <a:rPr lang="ko-KR" altLang="en-US" sz="1000" dirty="0">
+                <a:latin typeface="나눔바른고딕" panose="020B0603020101020101" pitchFamily="34" charset="-127"/>
+                <a:ea typeface="나눔바른고딕" panose="020B0603020101020101" pitchFamily="34" charset="-127"/>
+              </a:rPr>
+              <a:t>결과</a:t>
+            </a:r>
+            <a:endParaRPr lang="en-US" altLang="ko-KR" sz="1000" dirty="0">
               <a:latin typeface="나눔바른고딕" panose="020B0603020101020101" pitchFamily="34" charset="-127"/>
               <a:ea typeface="나눔바른고딕" panose="020B0603020101020101" pitchFamily="34" charset="-127"/>
             </a:endParaRPr>
           </a:p>
-          <a:p>
-            <a:endParaRPr lang="en-US" altLang="ko-KR" sz="1200" dirty="0" smtClean="0">
-              <a:latin typeface="나눔바른고딕" panose="020B0603020101020101" pitchFamily="34" charset="-127"/>
-              <a:ea typeface="나눔바른고딕" panose="020B0603020101020101" pitchFamily="34" charset="-127"/>
-            </a:endParaRPr>
-          </a:p>
-          <a:p>
-            <a:r>
-              <a:rPr lang="ko-KR" altLang="en-US" sz="1200" dirty="0" smtClean="0">
-                <a:latin typeface="나눔바른고딕" panose="020B0603020101020101" pitchFamily="34" charset="-127"/>
-                <a:ea typeface="나눔바른고딕" panose="020B0603020101020101" pitchFamily="34" charset="-127"/>
-              </a:rPr>
-              <a:t>인식 처리 파트</a:t>
-            </a:r>
-            <a:r>
-              <a:rPr lang="en-US" altLang="ko-KR" sz="1200" dirty="0" smtClean="0">
-                <a:latin typeface="나눔바른고딕" panose="020B0603020101020101" pitchFamily="34" charset="-127"/>
-                <a:ea typeface="나눔바른고딕" panose="020B0603020101020101" pitchFamily="34" charset="-127"/>
-              </a:rPr>
-              <a:t>(</a:t>
-            </a:r>
-            <a:r>
-              <a:rPr lang="en-US" altLang="ko-KR" sz="1200" dirty="0" err="1" smtClean="0">
-                <a:latin typeface="나눔바른고딕" panose="020B0603020101020101" pitchFamily="34" charset="-127"/>
-                <a:ea typeface="나눔바른고딕" panose="020B0603020101020101" pitchFamily="34" charset="-127"/>
-              </a:rPr>
-              <a:t>CharacterFSM</a:t>
-            </a:r>
-            <a:r>
-              <a:rPr lang="en-US" altLang="ko-KR" sz="1200" dirty="0" smtClean="0">
-                <a:latin typeface="나눔바른고딕" panose="020B0603020101020101" pitchFamily="34" charset="-127"/>
-                <a:ea typeface="나눔바른고딕" panose="020B0603020101020101" pitchFamily="34" charset="-127"/>
-              </a:rPr>
-              <a:t>)</a:t>
-            </a:r>
-            <a:r>
-              <a:rPr lang="ko-KR" altLang="en-US" sz="1200" dirty="0" smtClean="0">
-                <a:latin typeface="나눔바른고딕" panose="020B0603020101020101" pitchFamily="34" charset="-127"/>
-                <a:ea typeface="나눔바른고딕" panose="020B0603020101020101" pitchFamily="34" charset="-127"/>
-              </a:rPr>
-              <a:t>에선 인지 정보를 사용해서</a:t>
-            </a:r>
-            <a:endParaRPr lang="en-US" altLang="ko-KR" sz="1200" dirty="0" smtClean="0">
-              <a:latin typeface="나눔바른고딕" panose="020B0603020101020101" pitchFamily="34" charset="-127"/>
-              <a:ea typeface="나눔바른고딕" panose="020B0603020101020101" pitchFamily="34" charset="-127"/>
-            </a:endParaRPr>
-          </a:p>
-          <a:p>
-            <a:r>
-              <a:rPr lang="ko-KR" altLang="en-US" sz="1200" dirty="0" smtClean="0">
-                <a:latin typeface="나눔바른고딕" panose="020B0603020101020101" pitchFamily="34" charset="-127"/>
-                <a:ea typeface="나눔바른고딕" panose="020B0603020101020101" pitchFamily="34" charset="-127"/>
-              </a:rPr>
-              <a:t>현재 상태에 맞는 액션을 선택</a:t>
-            </a:r>
-            <a:endParaRPr lang="en-US" altLang="ko-KR" sz="1200" dirty="0" smtClean="0">
+        </p:txBody>
+      </p:sp>
+      <p:sp>
+        <p:nvSpPr>
+          <p:cNvPr id="27" name="TextBox 26">
+            <a:extLst>
+              <a:ext uri="{FF2B5EF4-FFF2-40B4-BE49-F238E27FC236}">
+                <a16:creationId xmlns:a16="http://schemas.microsoft.com/office/drawing/2014/main" id="{ACF7169D-30C9-01BC-E147-7051DC00FA06}"/>
+              </a:ext>
+            </a:extLst>
+          </p:cNvPr>
+          <p:cNvSpPr txBox="1"/>
+          <p:nvPr/>
+        </p:nvSpPr>
+        <p:spPr>
+          <a:xfrm>
+            <a:off x="6355555" y="6212117"/>
+            <a:ext cx="4001584" cy="400110"/>
+          </a:xfrm>
+          <a:prstGeom prst="rect">
+            <a:avLst/>
+          </a:prstGeom>
+          <a:noFill/>
+        </p:spPr>
+        <p:txBody>
+          <a:bodyPr wrap="square" rtlCol="0">
+            <a:spAutoFit/>
+          </a:bodyPr>
+          <a:lstStyle/>
+          <a:p>
+            <a:pPr algn="ctr"/>
+            <a:r>
+              <a:rPr lang="en-US" altLang="ko-KR" sz="1000" dirty="0">
+                <a:latin typeface="나눔바른고딕" panose="020B0603020101020101" pitchFamily="34" charset="-127"/>
+                <a:ea typeface="나눔바른고딕" panose="020B0603020101020101" pitchFamily="34" charset="-127"/>
+              </a:rPr>
+              <a:t>Vault Low </a:t>
+            </a:r>
+            <a:r>
+              <a:rPr lang="ko-KR" altLang="en-US" sz="1000" dirty="0">
+                <a:latin typeface="나눔바른고딕" panose="020B0603020101020101" pitchFamily="34" charset="-127"/>
+                <a:ea typeface="나눔바른고딕" panose="020B0603020101020101" pitchFamily="34" charset="-127"/>
+              </a:rPr>
+              <a:t>결과를 무시하고</a:t>
+            </a:r>
+            <a:r>
+              <a:rPr lang="en-US" altLang="ko-KR" sz="1000" dirty="0">
+                <a:latin typeface="나눔바른고딕" panose="020B0603020101020101" pitchFamily="34" charset="-127"/>
+                <a:ea typeface="나눔바른고딕" panose="020B0603020101020101" pitchFamily="34" charset="-127"/>
+              </a:rPr>
+              <a:t>,</a:t>
+            </a:r>
+            <a:br>
+              <a:rPr lang="en-US" altLang="ko-KR" sz="1000" dirty="0">
+                <a:latin typeface="나눔바른고딕" panose="020B0603020101020101" pitchFamily="34" charset="-127"/>
+                <a:ea typeface="나눔바른고딕" panose="020B0603020101020101" pitchFamily="34" charset="-127"/>
+              </a:rPr>
+            </a:br>
+            <a:r>
+              <a:rPr lang="ko-KR" altLang="en-US" sz="1000" dirty="0">
+                <a:latin typeface="나눔바른고딕" panose="020B0603020101020101" pitchFamily="34" charset="-127"/>
+                <a:ea typeface="나눔바른고딕" panose="020B0603020101020101" pitchFamily="34" charset="-127"/>
+              </a:rPr>
+              <a:t>현재 상태와 지형의 높이에 따라 다른 모션 선택</a:t>
+            </a:r>
+            <a:endParaRPr lang="en-US" altLang="ko-KR" sz="1000" dirty="0">
               <a:latin typeface="나눔바른고딕" panose="020B0603020101020101" pitchFamily="34" charset="-127"/>
               <a:ea typeface="나눔바른고딕" panose="020B0603020101020101" pitchFamily="34" charset="-127"/>
             </a:endParaRPr>
@@ -5098,7 +5316,7 @@
         <p:cNvPr id="1" name="">
           <a:extLst>
             <a:ext uri="{FF2B5EF4-FFF2-40B4-BE49-F238E27FC236}">
-              <a16:creationId xmlns="" xmlns:a16="http://schemas.microsoft.com/office/drawing/2014/main" id="{49DA7EAA-204E-2F90-E52A-6C83B9013025}"/>
+              <a16:creationId xmlns:a16="http://schemas.microsoft.com/office/drawing/2014/main" id="{49DA7EAA-204E-2F90-E52A-6C83B9013025}"/>
             </a:ext>
           </a:extLst>
         </p:cNvPr>
@@ -5118,7 +5336,7 @@
           <p:cNvPr id="8" name="TextBox 7">
             <a:extLst>
               <a:ext uri="{FF2B5EF4-FFF2-40B4-BE49-F238E27FC236}">
-                <a16:creationId xmlns="" xmlns:a16="http://schemas.microsoft.com/office/drawing/2014/main" id="{701093AF-254C-83D7-8032-465A5FB513FB}"/>
+                <a16:creationId xmlns:a16="http://schemas.microsoft.com/office/drawing/2014/main" id="{701093AF-254C-83D7-8032-465A5FB513FB}"/>
               </a:ext>
             </a:extLst>
           </p:cNvPr>
@@ -5160,7 +5378,7 @@
           <p:cNvPr id="10" name="TextBox 9">
             <a:extLst>
               <a:ext uri="{FF2B5EF4-FFF2-40B4-BE49-F238E27FC236}">
-                <a16:creationId xmlns="" xmlns:a16="http://schemas.microsoft.com/office/drawing/2014/main" id="{2D538815-CBEF-E37B-5659-B5091F86B485}"/>
+                <a16:creationId xmlns:a16="http://schemas.microsoft.com/office/drawing/2014/main" id="{2D538815-CBEF-E37B-5659-B5091F86B485}"/>
               </a:ext>
             </a:extLst>
           </p:cNvPr>
@@ -5184,7 +5402,7 @@
           <a:lstStyle/>
           <a:p>
             <a:r>
-              <a:rPr lang="ko-KR" altLang="en-US" sz="1600" dirty="0" smtClean="0">
+              <a:rPr lang="ko-KR" altLang="en-US" sz="1600" dirty="0">
                 <a:latin typeface="나눔바른고딕" panose="020B0603020101020101" pitchFamily="34" charset="-127"/>
                 <a:ea typeface="나눔바른고딕" panose="020B0603020101020101" pitchFamily="34" charset="-127"/>
               </a:rPr>
@@ -5202,7 +5420,7 @@
           <p:cNvPr id="3" name="직선 연결선 2">
             <a:extLst>
               <a:ext uri="{FF2B5EF4-FFF2-40B4-BE49-F238E27FC236}">
-                <a16:creationId xmlns="" xmlns:a16="http://schemas.microsoft.com/office/drawing/2014/main" id="{76FFFECF-4B1C-95DF-32C3-2D2F19BEDAFB}"/>
+                <a16:creationId xmlns:a16="http://schemas.microsoft.com/office/drawing/2014/main" id="{76FFFECF-4B1C-95DF-32C3-2D2F19BEDAFB}"/>
               </a:ext>
             </a:extLst>
           </p:cNvPr>
@@ -5338,7 +5556,7 @@
           <p:cNvPr id="11" name="TextBox 10">
             <a:extLst>
               <a:ext uri="{FF2B5EF4-FFF2-40B4-BE49-F238E27FC236}">
-                <a16:creationId xmlns="" xmlns:a16="http://schemas.microsoft.com/office/drawing/2014/main" id="{2D538815-CBEF-E37B-5659-B5091F86B485}"/>
+                <a16:creationId xmlns:a16="http://schemas.microsoft.com/office/drawing/2014/main" id="{2D538815-CBEF-E37B-5659-B5091F86B485}"/>
               </a:ext>
             </a:extLst>
           </p:cNvPr>
@@ -5347,8 +5565,8 @@
         </p:nvSpPr>
         <p:spPr>
           <a:xfrm>
-            <a:off x="302449" y="1342316"/>
-            <a:ext cx="7464813" cy="830997"/>
+            <a:off x="302449" y="2938494"/>
+            <a:ext cx="4676957" cy="646331"/>
           </a:xfrm>
           <a:prstGeom prst="rect">
             <a:avLst/>
@@ -5366,7 +5584,7 @@
                 <a:latin typeface="나눔바른고딕" panose="020B0603020101020101" pitchFamily="34" charset="-127"/>
                 <a:ea typeface="나눔바른고딕" panose="020B0603020101020101" pitchFamily="34" charset="-127"/>
               </a:rPr>
-              <a:t>기존에 장애물에 대한 행동 판단 기준이</a:t>
+              <a:t>장애물에 대한 행동 판단 기준이</a:t>
             </a:r>
             <a:endParaRPr lang="en-US" altLang="ko-KR" sz="1200" dirty="0">
               <a:latin typeface="나눔바른고딕" panose="020B0603020101020101" pitchFamily="34" charset="-127"/>
@@ -5379,7 +5597,7 @@
                 <a:latin typeface="나눔바른고딕" panose="020B0603020101020101" pitchFamily="34" charset="-127"/>
                 <a:ea typeface="나눔바른고딕" panose="020B0603020101020101" pitchFamily="34" charset="-127"/>
               </a:rPr>
-              <a:t>지형 인식 파트에 매개변수 형태로 섞여있던 것을</a:t>
+              <a:t>지형 인식 로직에 매개변수 형태로 섞여있던 것을</a:t>
             </a:r>
             <a:r>
               <a:rPr lang="en-US" altLang="ko-KR" sz="1200" dirty="0">
@@ -5393,7 +5611,7 @@
                 <a:latin typeface="나눔바른고딕" panose="020B0603020101020101" pitchFamily="34" charset="-127"/>
                 <a:ea typeface="나눔바른고딕" panose="020B0603020101020101" pitchFamily="34" charset="-127"/>
               </a:rPr>
-              <a:t>분리</a:t>
+              <a:t>분리하고</a:t>
             </a:r>
             <a:endParaRPr lang="en-US" altLang="ko-KR" sz="1200" dirty="0">
               <a:latin typeface="나눔바른고딕" panose="020B0603020101020101" pitchFamily="34" charset="-127"/>
@@ -5401,40 +5619,250 @@
             </a:endParaRPr>
           </a:p>
           <a:p>
+            <a:r>
+              <a:rPr lang="ko-KR" altLang="en-US" sz="1200" dirty="0">
+                <a:latin typeface="나눔바른고딕" panose="020B0603020101020101" pitchFamily="34" charset="-127"/>
+                <a:ea typeface="나눔바른고딕" panose="020B0603020101020101" pitchFamily="34" charset="-127"/>
+              </a:rPr>
+              <a:t>보다 편리하게 변경할 수 있도록 데이터화</a:t>
+            </a:r>
             <a:endParaRPr lang="en-US" altLang="ko-KR" sz="1200" dirty="0">
               <a:latin typeface="나눔바른고딕" panose="020B0603020101020101" pitchFamily="34" charset="-127"/>
               <a:ea typeface="나눔바른고딕" panose="020B0603020101020101" pitchFamily="34" charset="-127"/>
             </a:endParaRPr>
           </a:p>
+        </p:txBody>
+      </p:sp>
+      <p:sp>
+        <p:nvSpPr>
+          <p:cNvPr id="6" name="직사각형 5">
+            <a:extLst>
+              <a:ext uri="{FF2B5EF4-FFF2-40B4-BE49-F238E27FC236}">
+                <a16:creationId xmlns:a16="http://schemas.microsoft.com/office/drawing/2014/main" id="{C080597D-D3BC-43A8-E2AA-2A1712A9FD72}"/>
+              </a:ext>
+            </a:extLst>
+          </p:cNvPr>
+          <p:cNvSpPr/>
+          <p:nvPr/>
+        </p:nvSpPr>
+        <p:spPr>
+          <a:xfrm>
+            <a:off x="302449" y="1342316"/>
+            <a:ext cx="6096000" cy="1015663"/>
+          </a:xfrm>
+          <a:prstGeom prst="rect">
+            <a:avLst/>
+          </a:prstGeom>
+        </p:spPr>
+        <p:txBody>
+          <a:bodyPr>
+            <a:spAutoFit/>
+          </a:bodyPr>
+          <a:lstStyle/>
           <a:p>
             <a:r>
               <a:rPr lang="ko-KR" altLang="en-US" sz="1200" dirty="0">
                 <a:latin typeface="나눔바른고딕" panose="020B0603020101020101" pitchFamily="34" charset="-127"/>
                 <a:ea typeface="나눔바른고딕" panose="020B0603020101020101" pitchFamily="34" charset="-127"/>
               </a:rPr>
-              <a:t>지형 인식을 위한 </a:t>
-            </a:r>
-            <a:r>
-              <a:rPr lang="ko-KR" altLang="en-US" sz="1200" dirty="0" err="1">
-                <a:latin typeface="나눔바른고딕" panose="020B0603020101020101" pitchFamily="34" charset="-127"/>
-                <a:ea typeface="나눔바른고딕" panose="020B0603020101020101" pitchFamily="34" charset="-127"/>
-              </a:rPr>
-              <a:t>기준값으로</a:t>
-            </a:r>
-            <a:r>
-              <a:rPr lang="ko-KR" altLang="en-US" sz="1200" dirty="0">
-                <a:latin typeface="나눔바른고딕" panose="020B0603020101020101" pitchFamily="34" charset="-127"/>
-                <a:ea typeface="나눔바른고딕" panose="020B0603020101020101" pitchFamily="34" charset="-127"/>
-              </a:rPr>
-              <a:t> 활용할 수 있으므로 데이터화</a:t>
+              <a:t>지형 인식에선 행동 유형 대신 인지한 지형에 대한 정보를 제공</a:t>
             </a:r>
             <a:endParaRPr lang="en-US" altLang="ko-KR" sz="1200" dirty="0">
               <a:latin typeface="나눔바른고딕" panose="020B0603020101020101" pitchFamily="34" charset="-127"/>
               <a:ea typeface="나눔바른고딕" panose="020B0603020101020101" pitchFamily="34" charset="-127"/>
             </a:endParaRPr>
           </a:p>
-        </p:txBody>
-      </p:sp>
+          <a:p>
+            <a:r>
+              <a:rPr lang="ko-KR" altLang="en-US" sz="1200" dirty="0">
+                <a:latin typeface="나눔바른고딕" panose="020B0603020101020101" pitchFamily="34" charset="-127"/>
+                <a:ea typeface="나눔바른고딕" panose="020B0603020101020101" pitchFamily="34" charset="-127"/>
+              </a:rPr>
+              <a:t>장애물 포인터</a:t>
+            </a:r>
+            <a:r>
+              <a:rPr lang="en-US" altLang="ko-KR" sz="1200" dirty="0">
+                <a:latin typeface="나눔바른고딕" panose="020B0603020101020101" pitchFamily="34" charset="-127"/>
+                <a:ea typeface="나눔바른고딕" panose="020B0603020101020101" pitchFamily="34" charset="-127"/>
+              </a:rPr>
+              <a:t>, </a:t>
+            </a:r>
+            <a:r>
+              <a:rPr lang="ko-KR" altLang="en-US" sz="1200" dirty="0">
+                <a:latin typeface="나눔바른고딕" panose="020B0603020101020101" pitchFamily="34" charset="-127"/>
+                <a:ea typeface="나눔바른고딕" panose="020B0603020101020101" pitchFamily="34" charset="-127"/>
+              </a:rPr>
+              <a:t>최초 접촉 위치</a:t>
+            </a:r>
+            <a:r>
+              <a:rPr lang="en-US" altLang="ko-KR" sz="1200" dirty="0">
+                <a:latin typeface="나눔바른고딕" panose="020B0603020101020101" pitchFamily="34" charset="-127"/>
+                <a:ea typeface="나눔바른고딕" panose="020B0603020101020101" pitchFamily="34" charset="-127"/>
+              </a:rPr>
+              <a:t>, </a:t>
+            </a:r>
+            <a:r>
+              <a:rPr lang="ko-KR" altLang="en-US" sz="1200" dirty="0">
+                <a:latin typeface="나눔바른고딕" panose="020B0603020101020101" pitchFamily="34" charset="-127"/>
+                <a:ea typeface="나눔바른고딕" panose="020B0603020101020101" pitchFamily="34" charset="-127"/>
+              </a:rPr>
+              <a:t>파악한 모서리 위치</a:t>
+            </a:r>
+            <a:r>
+              <a:rPr lang="en-US" altLang="ko-KR" sz="1200" dirty="0">
+                <a:latin typeface="나눔바른고딕" panose="020B0603020101020101" pitchFamily="34" charset="-127"/>
+                <a:ea typeface="나눔바른고딕" panose="020B0603020101020101" pitchFamily="34" charset="-127"/>
+              </a:rPr>
+              <a:t>(</a:t>
+            </a:r>
+            <a:r>
+              <a:rPr lang="ko-KR" altLang="en-US" sz="1200" dirty="0">
+                <a:latin typeface="나눔바른고딕" panose="020B0603020101020101" pitchFamily="34" charset="-127"/>
+                <a:ea typeface="나눔바른고딕" panose="020B0603020101020101" pitchFamily="34" charset="-127"/>
+              </a:rPr>
+              <a:t>높이</a:t>
+            </a:r>
+            <a:r>
+              <a:rPr lang="en-US" altLang="ko-KR" sz="1200" dirty="0">
+                <a:latin typeface="나눔바른고딕" panose="020B0603020101020101" pitchFamily="34" charset="-127"/>
+                <a:ea typeface="나눔바른고딕" panose="020B0603020101020101" pitchFamily="34" charset="-127"/>
+              </a:rPr>
+              <a:t>), </a:t>
+            </a:r>
+            <a:r>
+              <a:rPr lang="ko-KR" altLang="en-US" sz="1200" dirty="0">
+                <a:latin typeface="나눔바른고딕" panose="020B0603020101020101" pitchFamily="34" charset="-127"/>
+                <a:ea typeface="나눔바른고딕" panose="020B0603020101020101" pitchFamily="34" charset="-127"/>
+              </a:rPr>
+              <a:t>장애물의 깊이</a:t>
+            </a:r>
+            <a:endParaRPr lang="en-US" altLang="ko-KR" sz="1200" dirty="0">
+              <a:latin typeface="나눔바른고딕" panose="020B0603020101020101" pitchFamily="34" charset="-127"/>
+              <a:ea typeface="나눔바른고딕" panose="020B0603020101020101" pitchFamily="34" charset="-127"/>
+            </a:endParaRPr>
+          </a:p>
+          <a:p>
+            <a:endParaRPr lang="en-US" altLang="ko-KR" sz="1200" dirty="0">
+              <a:latin typeface="나눔바른고딕" panose="020B0603020101020101" pitchFamily="34" charset="-127"/>
+              <a:ea typeface="나눔바른고딕" panose="020B0603020101020101" pitchFamily="34" charset="-127"/>
+            </a:endParaRPr>
+          </a:p>
+          <a:p>
+            <a:r>
+              <a:rPr lang="ko-KR" altLang="en-US" sz="1200" dirty="0">
+                <a:latin typeface="나눔바른고딕" panose="020B0603020101020101" pitchFamily="34" charset="-127"/>
+                <a:ea typeface="나눔바른고딕" panose="020B0603020101020101" pitchFamily="34" charset="-127"/>
+              </a:rPr>
+              <a:t>인식 처리 파트</a:t>
+            </a:r>
+            <a:r>
+              <a:rPr lang="en-US" altLang="ko-KR" sz="1200" dirty="0">
+                <a:latin typeface="나눔바른고딕" panose="020B0603020101020101" pitchFamily="34" charset="-127"/>
+                <a:ea typeface="나눔바른고딕" panose="020B0603020101020101" pitchFamily="34" charset="-127"/>
+              </a:rPr>
+              <a:t>(</a:t>
+            </a:r>
+            <a:r>
+              <a:rPr lang="en-US" altLang="ko-KR" sz="1200" dirty="0" err="1">
+                <a:latin typeface="나눔바른고딕" panose="020B0603020101020101" pitchFamily="34" charset="-127"/>
+                <a:ea typeface="나눔바른고딕" panose="020B0603020101020101" pitchFamily="34" charset="-127"/>
+              </a:rPr>
+              <a:t>CharacterFSM</a:t>
+            </a:r>
+            <a:r>
+              <a:rPr lang="en-US" altLang="ko-KR" sz="1200" dirty="0">
+                <a:latin typeface="나눔바른고딕" panose="020B0603020101020101" pitchFamily="34" charset="-127"/>
+                <a:ea typeface="나눔바른고딕" panose="020B0603020101020101" pitchFamily="34" charset="-127"/>
+              </a:rPr>
+              <a:t>)</a:t>
+            </a:r>
+            <a:r>
+              <a:rPr lang="ko-KR" altLang="en-US" sz="1200" dirty="0">
+                <a:latin typeface="나눔바른고딕" panose="020B0603020101020101" pitchFamily="34" charset="-127"/>
+                <a:ea typeface="나눔바른고딕" panose="020B0603020101020101" pitchFamily="34" charset="-127"/>
+              </a:rPr>
+              <a:t>에선 인지 정보를 사용해서</a:t>
+            </a:r>
+            <a:endParaRPr lang="en-US" altLang="ko-KR" sz="1200" dirty="0">
+              <a:latin typeface="나눔바른고딕" panose="020B0603020101020101" pitchFamily="34" charset="-127"/>
+              <a:ea typeface="나눔바른고딕" panose="020B0603020101020101" pitchFamily="34" charset="-127"/>
+            </a:endParaRPr>
+          </a:p>
+          <a:p>
+            <a:r>
+              <a:rPr lang="ko-KR" altLang="en-US" sz="1200" dirty="0">
+                <a:latin typeface="나눔바른고딕" panose="020B0603020101020101" pitchFamily="34" charset="-127"/>
+                <a:ea typeface="나눔바른고딕" panose="020B0603020101020101" pitchFamily="34" charset="-127"/>
+              </a:rPr>
+              <a:t>현재 상태에 맞는 액션을 선택</a:t>
+            </a:r>
+            <a:endParaRPr lang="en-US" altLang="ko-KR" sz="1200" dirty="0">
+              <a:latin typeface="나눔바른고딕" panose="020B0603020101020101" pitchFamily="34" charset="-127"/>
+              <a:ea typeface="나눔바른고딕" panose="020B0603020101020101" pitchFamily="34" charset="-127"/>
+            </a:endParaRPr>
+          </a:p>
+        </p:txBody>
+      </p:sp>
+      <p:pic>
+        <p:nvPicPr>
+          <p:cNvPr id="9" name="그림 8">
+            <a:extLst>
+              <a:ext uri="{FF2B5EF4-FFF2-40B4-BE49-F238E27FC236}">
+                <a16:creationId xmlns:a16="http://schemas.microsoft.com/office/drawing/2014/main" id="{2A3D9E6F-4B08-02F3-95BF-F946C7DFC9DE}"/>
+              </a:ext>
+            </a:extLst>
+          </p:cNvPr>
+          <p:cNvPicPr>
+            <a:picLocks noChangeAspect="1"/>
+          </p:cNvPicPr>
+          <p:nvPr/>
+        </p:nvPicPr>
+        <p:blipFill>
+          <a:blip r:embed="rId3"/>
+          <a:stretch>
+            <a:fillRect/>
+          </a:stretch>
+        </p:blipFill>
+        <p:spPr>
+          <a:xfrm>
+            <a:off x="7686002" y="1173039"/>
+            <a:ext cx="4203548" cy="1596178"/>
+          </a:xfrm>
+          <a:prstGeom prst="rect">
+            <a:avLst/>
+          </a:prstGeom>
+        </p:spPr>
+      </p:pic>
+      <p:pic>
+        <p:nvPicPr>
+          <p:cNvPr id="14" name="그림 13">
+            <a:extLst>
+              <a:ext uri="{FF2B5EF4-FFF2-40B4-BE49-F238E27FC236}">
+                <a16:creationId xmlns:a16="http://schemas.microsoft.com/office/drawing/2014/main" id="{9E8110FE-3640-F57D-C910-76A28312B388}"/>
+              </a:ext>
+            </a:extLst>
+          </p:cNvPr>
+          <p:cNvPicPr>
+            <a:picLocks noChangeAspect="1"/>
+          </p:cNvPicPr>
+          <p:nvPr/>
+        </p:nvPicPr>
+        <p:blipFill>
+          <a:blip r:embed="rId4"/>
+          <a:stretch>
+            <a:fillRect/>
+          </a:stretch>
+        </p:blipFill>
+        <p:spPr>
+          <a:xfrm>
+            <a:off x="5510820" y="2938494"/>
+            <a:ext cx="2604379" cy="3516257"/>
+          </a:xfrm>
+          <a:prstGeom prst="rect">
+            <a:avLst/>
+          </a:prstGeom>
+        </p:spPr>
+      </p:pic>
     </p:spTree>
     <p:extLst>
       <p:ext uri="{BB962C8B-B14F-4D97-AF65-F5344CB8AC3E}">
@@ -5456,7 +5884,7 @@
         <p:cNvPr id="1" name="">
           <a:extLst>
             <a:ext uri="{FF2B5EF4-FFF2-40B4-BE49-F238E27FC236}">
-              <a16:creationId xmlns="" xmlns:a16="http://schemas.microsoft.com/office/drawing/2014/main" id="{49DA7EAA-204E-2F90-E52A-6C83B9013025}"/>
+              <a16:creationId xmlns:a16="http://schemas.microsoft.com/office/drawing/2014/main" id="{49DA7EAA-204E-2F90-E52A-6C83B9013025}"/>
             </a:ext>
           </a:extLst>
         </p:cNvPr>
@@ -5476,7 +5904,7 @@
           <p:cNvPr id="8" name="TextBox 7">
             <a:extLst>
               <a:ext uri="{FF2B5EF4-FFF2-40B4-BE49-F238E27FC236}">
-                <a16:creationId xmlns="" xmlns:a16="http://schemas.microsoft.com/office/drawing/2014/main" id="{701093AF-254C-83D7-8032-465A5FB513FB}"/>
+                <a16:creationId xmlns:a16="http://schemas.microsoft.com/office/drawing/2014/main" id="{701093AF-254C-83D7-8032-465A5FB513FB}"/>
               </a:ext>
             </a:extLst>
           </p:cNvPr>
@@ -5518,7 +5946,7 @@
           <p:cNvPr id="10" name="TextBox 9">
             <a:extLst>
               <a:ext uri="{FF2B5EF4-FFF2-40B4-BE49-F238E27FC236}">
-                <a16:creationId xmlns="" xmlns:a16="http://schemas.microsoft.com/office/drawing/2014/main" id="{2D538815-CBEF-E37B-5659-B5091F86B485}"/>
+                <a16:creationId xmlns:a16="http://schemas.microsoft.com/office/drawing/2014/main" id="{2D538815-CBEF-E37B-5659-B5091F86B485}"/>
               </a:ext>
             </a:extLst>
           </p:cNvPr>
@@ -5542,21 +5970,21 @@
           <a:lstStyle/>
           <a:p>
             <a:r>
-              <a:rPr lang="ko-KR" altLang="en-US" sz="1600" dirty="0" smtClean="0">
+              <a:rPr lang="ko-KR" altLang="en-US" sz="1600" dirty="0">
                 <a:latin typeface="나눔바른고딕" panose="020B0603020101020101" pitchFamily="34" charset="-127"/>
                 <a:ea typeface="나눔바른고딕" panose="020B0603020101020101" pitchFamily="34" charset="-127"/>
               </a:rPr>
               <a:t>애니메이션 </a:t>
             </a:r>
             <a:r>
-              <a:rPr lang="en-US" altLang="ko-KR" sz="1600" dirty="0" smtClean="0">
+              <a:rPr lang="en-US" altLang="ko-KR" sz="1600" dirty="0">
                 <a:latin typeface="나눔바른고딕" panose="020B0603020101020101" pitchFamily="34" charset="-127"/>
                 <a:ea typeface="나눔바른고딕" panose="020B0603020101020101" pitchFamily="34" charset="-127"/>
               </a:rPr>
               <a:t>IK </a:t>
             </a:r>
             <a:r>
-              <a:rPr lang="ko-KR" altLang="en-US" sz="1600" dirty="0" smtClean="0">
+              <a:rPr lang="ko-KR" altLang="en-US" sz="1600" dirty="0">
                 <a:latin typeface="나눔바른고딕" panose="020B0603020101020101" pitchFamily="34" charset="-127"/>
                 <a:ea typeface="나눔바른고딕" panose="020B0603020101020101" pitchFamily="34" charset="-127"/>
               </a:rPr>
@@ -5574,7 +6002,7 @@
           <p:cNvPr id="3" name="직선 연결선 2">
             <a:extLst>
               <a:ext uri="{FF2B5EF4-FFF2-40B4-BE49-F238E27FC236}">
-                <a16:creationId xmlns="" xmlns:a16="http://schemas.microsoft.com/office/drawing/2014/main" id="{76FFFECF-4B1C-95DF-32C3-2D2F19BEDAFB}"/>
+                <a16:creationId xmlns:a16="http://schemas.microsoft.com/office/drawing/2014/main" id="{76FFFECF-4B1C-95DF-32C3-2D2F19BEDAFB}"/>
               </a:ext>
             </a:extLst>
           </p:cNvPr>
@@ -5710,7 +6138,7 @@
           <p:cNvPr id="13" name="TextBox 12">
             <a:extLst>
               <a:ext uri="{FF2B5EF4-FFF2-40B4-BE49-F238E27FC236}">
-                <a16:creationId xmlns="" xmlns:a16="http://schemas.microsoft.com/office/drawing/2014/main" id="{2D538815-CBEF-E37B-5659-B5091F86B485}"/>
+                <a16:creationId xmlns:a16="http://schemas.microsoft.com/office/drawing/2014/main" id="{2D538815-CBEF-E37B-5659-B5091F86B485}"/>
               </a:ext>
             </a:extLst>
           </p:cNvPr>
@@ -5734,28 +6162,14 @@
           <a:lstStyle/>
           <a:p>
             <a:r>
-              <a:rPr lang="en-US" altLang="ko-KR" sz="1200" dirty="0" smtClean="0">
-                <a:latin typeface="나눔바른고딕" panose="020B0603020101020101" pitchFamily="34" charset="-127"/>
-                <a:ea typeface="나눔바른고딕" panose="020B0603020101020101" pitchFamily="34" charset="-127"/>
-              </a:rPr>
-              <a:t>CCD </a:t>
-            </a:r>
-            <a:r>
-              <a:rPr lang="ko-KR" altLang="en-US" sz="1200" dirty="0" smtClean="0">
-                <a:latin typeface="나눔바른고딕" panose="020B0603020101020101" pitchFamily="34" charset="-127"/>
-                <a:ea typeface="나눔바른고딕" panose="020B0603020101020101" pitchFamily="34" charset="-127"/>
-              </a:rPr>
-              <a:t>방식 </a:t>
-            </a:r>
-            <a:r>
-              <a:rPr lang="en-US" altLang="ko-KR" sz="1200" dirty="0" smtClean="0">
+              <a:rPr lang="en-US" altLang="ko-KR" sz="1200" dirty="0">
                 <a:latin typeface="나눔바른고딕" panose="020B0603020101020101" pitchFamily="34" charset="-127"/>
                 <a:ea typeface="나눔바른고딕" panose="020B0603020101020101" pitchFamily="34" charset="-127"/>
               </a:rPr>
               <a:t>2 bone IK </a:t>
             </a:r>
             <a:r>
-              <a:rPr lang="ko-KR" altLang="en-US" sz="1200" dirty="0" smtClean="0">
+              <a:rPr lang="ko-KR" altLang="en-US" sz="1200" dirty="0">
                 <a:latin typeface="나눔바른고딕" panose="020B0603020101020101" pitchFamily="34" charset="-127"/>
                 <a:ea typeface="나눔바른고딕" panose="020B0603020101020101" pitchFamily="34" charset="-127"/>
               </a:rPr>
@@ -5773,7 +6187,7 @@
           <p:cNvPr id="16" name="TextBox 15">
             <a:extLst>
               <a:ext uri="{FF2B5EF4-FFF2-40B4-BE49-F238E27FC236}">
-                <a16:creationId xmlns="" xmlns:a16="http://schemas.microsoft.com/office/drawing/2014/main" id="{2D538815-CBEF-E37B-5659-B5091F86B485}"/>
+                <a16:creationId xmlns:a16="http://schemas.microsoft.com/office/drawing/2014/main" id="{2D538815-CBEF-E37B-5659-B5091F86B485}"/>
               </a:ext>
             </a:extLst>
           </p:cNvPr>
@@ -5797,41 +6211,41 @@
           <a:lstStyle/>
           <a:p>
             <a:r>
-              <a:rPr lang="ko-KR" altLang="en-US" sz="1200" dirty="0" smtClean="0">
+              <a:rPr lang="ko-KR" altLang="en-US" sz="1200" dirty="0">
                 <a:latin typeface="나눔바른고딕" panose="020B0603020101020101" pitchFamily="34" charset="-127"/>
                 <a:ea typeface="나눔바른고딕" panose="020B0603020101020101" pitchFamily="34" charset="-127"/>
               </a:rPr>
               <a:t>장애물을 넘어갈 때</a:t>
             </a:r>
             <a:r>
-              <a:rPr lang="en-US" altLang="ko-KR" sz="1200" dirty="0" smtClean="0">
+              <a:rPr lang="en-US" altLang="ko-KR" sz="1200" dirty="0">
                 <a:latin typeface="나눔바른고딕" panose="020B0603020101020101" pitchFamily="34" charset="-127"/>
                 <a:ea typeface="나눔바른고딕" panose="020B0603020101020101" pitchFamily="34" charset="-127"/>
               </a:rPr>
               <a:t>, </a:t>
             </a:r>
             <a:r>
-              <a:rPr lang="ko-KR" altLang="en-US" sz="1200" dirty="0" smtClean="0">
+              <a:rPr lang="ko-KR" altLang="en-US" sz="1200" dirty="0">
                 <a:latin typeface="나눔바른고딕" panose="020B0603020101020101" pitchFamily="34" charset="-127"/>
                 <a:ea typeface="나눔바른고딕" panose="020B0603020101020101" pitchFamily="34" charset="-127"/>
               </a:rPr>
               <a:t>손이 파 들어가거나 손이 붕 뜨며 어색해짐</a:t>
             </a:r>
-            <a:endParaRPr lang="en-US" altLang="ko-KR" sz="1200" dirty="0" smtClean="0">
+            <a:endParaRPr lang="en-US" altLang="ko-KR" sz="1200" dirty="0">
               <a:latin typeface="나눔바른고딕" panose="020B0603020101020101" pitchFamily="34" charset="-127"/>
               <a:ea typeface="나눔바른고딕" panose="020B0603020101020101" pitchFamily="34" charset="-127"/>
             </a:endParaRPr>
           </a:p>
           <a:p>
             <a:r>
-              <a:rPr lang="ko-KR" altLang="en-US" sz="1200" dirty="0" smtClean="0">
+              <a:rPr lang="ko-KR" altLang="en-US" sz="1200" dirty="0">
                 <a:latin typeface="나눔바른고딕" panose="020B0603020101020101" pitchFamily="34" charset="-127"/>
                 <a:ea typeface="나눔바른고딕" panose="020B0603020101020101" pitchFamily="34" charset="-127"/>
               </a:rPr>
               <a:t>이 부분을 해결하기 위해서 </a:t>
             </a:r>
             <a:r>
-              <a:rPr lang="ko-KR" altLang="en-US" sz="1200" dirty="0" err="1" smtClean="0">
+              <a:rPr lang="ko-KR" altLang="en-US" sz="1200" dirty="0" err="1">
                 <a:latin typeface="나눔바른고딕" panose="020B0603020101020101" pitchFamily="34" charset="-127"/>
                 <a:ea typeface="나눔바른고딕" panose="020B0603020101020101" pitchFamily="34" charset="-127"/>
               </a:rPr>
@@ -5845,27 +6259,27 @@
               <a:t> </a:t>
             </a:r>
             <a:r>
-              <a:rPr lang="ko-KR" altLang="en-US" sz="1200" dirty="0" smtClean="0">
+              <a:rPr lang="ko-KR" altLang="en-US" sz="1200" dirty="0">
                 <a:latin typeface="나눔바른고딕" panose="020B0603020101020101" pitchFamily="34" charset="-127"/>
                 <a:ea typeface="나눔바른고딕" panose="020B0603020101020101" pitchFamily="34" charset="-127"/>
               </a:rPr>
               <a:t>및 장애물에 매달린 상태에서 </a:t>
             </a:r>
             <a:r>
-              <a:rPr lang="en-US" altLang="ko-KR" sz="1200" dirty="0" smtClean="0">
+              <a:rPr lang="en-US" altLang="ko-KR" sz="1200" dirty="0">
                 <a:latin typeface="나눔바른고딕" panose="020B0603020101020101" pitchFamily="34" charset="-127"/>
                 <a:ea typeface="나눔바른고딕" panose="020B0603020101020101" pitchFamily="34" charset="-127"/>
               </a:rPr>
               <a:t>IK</a:t>
             </a:r>
             <a:r>
-              <a:rPr lang="ko-KR" altLang="en-US" sz="1200" dirty="0" smtClean="0">
+              <a:rPr lang="ko-KR" altLang="en-US" sz="1200" dirty="0">
                 <a:latin typeface="나눔바른고딕" panose="020B0603020101020101" pitchFamily="34" charset="-127"/>
                 <a:ea typeface="나눔바른고딕" panose="020B0603020101020101" pitchFamily="34" charset="-127"/>
               </a:rPr>
               <a:t>를 적용</a:t>
             </a:r>
-            <a:endParaRPr lang="en-US" altLang="ko-KR" sz="1200" dirty="0" smtClean="0">
+            <a:endParaRPr lang="en-US" altLang="ko-KR" sz="1200" dirty="0">
               <a:latin typeface="나눔바른고딕" panose="020B0603020101020101" pitchFamily="34" charset="-127"/>
               <a:ea typeface="나눔바른고딕" panose="020B0603020101020101" pitchFamily="34" charset="-127"/>
             </a:endParaRPr>
@@ -5893,7 +6307,7 @@
         <p:cNvPr id="1" name="">
           <a:extLst>
             <a:ext uri="{FF2B5EF4-FFF2-40B4-BE49-F238E27FC236}">
-              <a16:creationId xmlns="" xmlns:a16="http://schemas.microsoft.com/office/drawing/2014/main" id="{49DA7EAA-204E-2F90-E52A-6C83B9013025}"/>
+              <a16:creationId xmlns:a16="http://schemas.microsoft.com/office/drawing/2014/main" id="{49DA7EAA-204E-2F90-E52A-6C83B9013025}"/>
             </a:ext>
           </a:extLst>
         </p:cNvPr>
@@ -5913,7 +6327,7 @@
           <p:cNvPr id="8" name="TextBox 7">
             <a:extLst>
               <a:ext uri="{FF2B5EF4-FFF2-40B4-BE49-F238E27FC236}">
-                <a16:creationId xmlns="" xmlns:a16="http://schemas.microsoft.com/office/drawing/2014/main" id="{701093AF-254C-83D7-8032-465A5FB513FB}"/>
+                <a16:creationId xmlns:a16="http://schemas.microsoft.com/office/drawing/2014/main" id="{701093AF-254C-83D7-8032-465A5FB513FB}"/>
               </a:ext>
             </a:extLst>
           </p:cNvPr>
@@ -5955,7 +6369,7 @@
           <p:cNvPr id="10" name="TextBox 9">
             <a:extLst>
               <a:ext uri="{FF2B5EF4-FFF2-40B4-BE49-F238E27FC236}">
-                <a16:creationId xmlns="" xmlns:a16="http://schemas.microsoft.com/office/drawing/2014/main" id="{2D538815-CBEF-E37B-5659-B5091F86B485}"/>
+                <a16:creationId xmlns:a16="http://schemas.microsoft.com/office/drawing/2014/main" id="{2D538815-CBEF-E37B-5659-B5091F86B485}"/>
               </a:ext>
             </a:extLst>
           </p:cNvPr>
@@ -5979,21 +6393,21 @@
           <a:lstStyle/>
           <a:p>
             <a:r>
-              <a:rPr lang="ko-KR" altLang="en-US" sz="1600" dirty="0" smtClean="0">
+              <a:rPr lang="ko-KR" altLang="en-US" sz="1600" dirty="0">
                 <a:latin typeface="나눔바른고딕" panose="020B0603020101020101" pitchFamily="34" charset="-127"/>
                 <a:ea typeface="나눔바른고딕" panose="020B0603020101020101" pitchFamily="34" charset="-127"/>
               </a:rPr>
               <a:t>애니메이션 </a:t>
             </a:r>
             <a:r>
-              <a:rPr lang="en-US" altLang="ko-KR" sz="1600" dirty="0" smtClean="0">
+              <a:rPr lang="en-US" altLang="ko-KR" sz="1600" dirty="0">
                 <a:latin typeface="나눔바른고딕" panose="020B0603020101020101" pitchFamily="34" charset="-127"/>
                 <a:ea typeface="나눔바른고딕" panose="020B0603020101020101" pitchFamily="34" charset="-127"/>
               </a:rPr>
               <a:t>IK </a:t>
             </a:r>
             <a:r>
-              <a:rPr lang="ko-KR" altLang="en-US" sz="1600" dirty="0" smtClean="0">
+              <a:rPr lang="ko-KR" altLang="en-US" sz="1600" dirty="0">
                 <a:latin typeface="나눔바른고딕" panose="020B0603020101020101" pitchFamily="34" charset="-127"/>
                 <a:ea typeface="나눔바른고딕" panose="020B0603020101020101" pitchFamily="34" charset="-127"/>
               </a:rPr>
@@ -6011,7 +6425,7 @@
           <p:cNvPr id="3" name="직선 연결선 2">
             <a:extLst>
               <a:ext uri="{FF2B5EF4-FFF2-40B4-BE49-F238E27FC236}">
-                <a16:creationId xmlns="" xmlns:a16="http://schemas.microsoft.com/office/drawing/2014/main" id="{76FFFECF-4B1C-95DF-32C3-2D2F19BEDAFB}"/>
+                <a16:creationId xmlns:a16="http://schemas.microsoft.com/office/drawing/2014/main" id="{76FFFECF-4B1C-95DF-32C3-2D2F19BEDAFB}"/>
               </a:ext>
             </a:extLst>
           </p:cNvPr>
@@ -6147,7 +6561,7 @@
           <p:cNvPr id="13" name="TextBox 12">
             <a:extLst>
               <a:ext uri="{FF2B5EF4-FFF2-40B4-BE49-F238E27FC236}">
-                <a16:creationId xmlns="" xmlns:a16="http://schemas.microsoft.com/office/drawing/2014/main" id="{2D538815-CBEF-E37B-5659-B5091F86B485}"/>
+                <a16:creationId xmlns:a16="http://schemas.microsoft.com/office/drawing/2014/main" id="{2D538815-CBEF-E37B-5659-B5091F86B485}"/>
               </a:ext>
             </a:extLst>
           </p:cNvPr>
@@ -6171,28 +6585,14 @@
           <a:lstStyle/>
           <a:p>
             <a:r>
-              <a:rPr lang="en-US" altLang="ko-KR" sz="1200" dirty="0" smtClean="0">
-                <a:latin typeface="나눔바른고딕" panose="020B0603020101020101" pitchFamily="34" charset="-127"/>
-                <a:ea typeface="나눔바른고딕" panose="020B0603020101020101" pitchFamily="34" charset="-127"/>
-              </a:rPr>
-              <a:t>CCD </a:t>
-            </a:r>
-            <a:r>
-              <a:rPr lang="ko-KR" altLang="en-US" sz="1200" dirty="0" smtClean="0">
-                <a:latin typeface="나눔바른고딕" panose="020B0603020101020101" pitchFamily="34" charset="-127"/>
-                <a:ea typeface="나눔바른고딕" panose="020B0603020101020101" pitchFamily="34" charset="-127"/>
-              </a:rPr>
-              <a:t>방식 </a:t>
-            </a:r>
-            <a:r>
-              <a:rPr lang="en-US" altLang="ko-KR" sz="1200" dirty="0" smtClean="0">
+              <a:rPr lang="en-US" altLang="ko-KR" sz="1200" dirty="0">
                 <a:latin typeface="나눔바른고딕" panose="020B0603020101020101" pitchFamily="34" charset="-127"/>
                 <a:ea typeface="나눔바른고딕" panose="020B0603020101020101" pitchFamily="34" charset="-127"/>
               </a:rPr>
               <a:t>2 bone IK </a:t>
             </a:r>
             <a:r>
-              <a:rPr lang="ko-KR" altLang="en-US" sz="1200" dirty="0" smtClean="0">
+              <a:rPr lang="ko-KR" altLang="en-US" sz="1200" dirty="0">
                 <a:latin typeface="나눔바른고딕" panose="020B0603020101020101" pitchFamily="34" charset="-127"/>
                 <a:ea typeface="나눔바른고딕" panose="020B0603020101020101" pitchFamily="34" charset="-127"/>
               </a:rPr>
@@ -6210,7 +6610,7 @@
           <p:cNvPr id="16" name="TextBox 15">
             <a:extLst>
               <a:ext uri="{FF2B5EF4-FFF2-40B4-BE49-F238E27FC236}">
-                <a16:creationId xmlns="" xmlns:a16="http://schemas.microsoft.com/office/drawing/2014/main" id="{2D538815-CBEF-E37B-5659-B5091F86B485}"/>
+                <a16:creationId xmlns:a16="http://schemas.microsoft.com/office/drawing/2014/main" id="{2D538815-CBEF-E37B-5659-B5091F86B485}"/>
               </a:ext>
             </a:extLst>
           </p:cNvPr>
@@ -6234,27 +6634,27 @@
           <a:lstStyle/>
           <a:p>
             <a:r>
-              <a:rPr lang="ko-KR" altLang="en-US" sz="1200" dirty="0" smtClean="0">
+              <a:rPr lang="ko-KR" altLang="en-US" sz="1200" dirty="0">
                 <a:latin typeface="나눔바른고딕" panose="020B0603020101020101" pitchFamily="34" charset="-127"/>
                 <a:ea typeface="나눔바른고딕" panose="020B0603020101020101" pitchFamily="34" charset="-127"/>
               </a:rPr>
               <a:t>발생한 문제점 </a:t>
             </a:r>
             <a:r>
-              <a:rPr lang="en-US" altLang="ko-KR" sz="1200" dirty="0" smtClean="0">
+              <a:rPr lang="en-US" altLang="ko-KR" sz="1200" dirty="0">
                 <a:latin typeface="나눔바른고딕" panose="020B0603020101020101" pitchFamily="34" charset="-127"/>
                 <a:ea typeface="나눔바른고딕" panose="020B0603020101020101" pitchFamily="34" charset="-127"/>
               </a:rPr>
               <a:t>1. Update </a:t>
             </a:r>
             <a:r>
-              <a:rPr lang="ko-KR" altLang="en-US" sz="1200" dirty="0" smtClean="0">
+              <a:rPr lang="ko-KR" altLang="en-US" sz="1200" dirty="0">
                 <a:latin typeface="나눔바른고딕" panose="020B0603020101020101" pitchFamily="34" charset="-127"/>
                 <a:ea typeface="나눔바른고딕" panose="020B0603020101020101" pitchFamily="34" charset="-127"/>
               </a:rPr>
               <a:t>순서</a:t>
             </a:r>
-            <a:endParaRPr lang="en-US" altLang="ko-KR" sz="1200" dirty="0" smtClean="0">
+            <a:endParaRPr lang="en-US" altLang="ko-KR" sz="1200" dirty="0">
               <a:latin typeface="나눔바른고딕" panose="020B0603020101020101" pitchFamily="34" charset="-127"/>
               <a:ea typeface="나눔바른고딕" panose="020B0603020101020101" pitchFamily="34" charset="-127"/>
             </a:endParaRPr>
@@ -6265,20 +6665,20 @@
               <a:buChar char="•"/>
             </a:pPr>
             <a:r>
-              <a:rPr lang="en-US" altLang="ko-KR" sz="1200" dirty="0" smtClean="0">
+              <a:rPr lang="en-US" altLang="ko-KR" sz="1200" dirty="0">
                 <a:latin typeface="나눔바른고딕" panose="020B0603020101020101" pitchFamily="34" charset="-127"/>
                 <a:ea typeface="나눔바른고딕" panose="020B0603020101020101" pitchFamily="34" charset="-127"/>
               </a:rPr>
               <a:t>IK</a:t>
             </a:r>
             <a:r>
-              <a:rPr lang="ko-KR" altLang="en-US" sz="1200" dirty="0" smtClean="0">
+              <a:rPr lang="ko-KR" altLang="en-US" sz="1200" dirty="0">
                 <a:latin typeface="나눔바른고딕" panose="020B0603020101020101" pitchFamily="34" charset="-127"/>
                 <a:ea typeface="나눔바른고딕" panose="020B0603020101020101" pitchFamily="34" charset="-127"/>
               </a:rPr>
               <a:t>는 애니메이션이 호출된 이후에 적용되어야 정상적</a:t>
             </a:r>
-            <a:endParaRPr lang="en-US" altLang="ko-KR" sz="1200" dirty="0" smtClean="0">
+            <a:endParaRPr lang="en-US" altLang="ko-KR" sz="1200" dirty="0">
               <a:latin typeface="나눔바른고딕" panose="020B0603020101020101" pitchFamily="34" charset="-127"/>
               <a:ea typeface="나눔바른고딕" panose="020B0603020101020101" pitchFamily="34" charset="-127"/>
             </a:endParaRPr>
@@ -6289,55 +6689,55 @@
               <a:buChar char="•"/>
             </a:pPr>
             <a:r>
-              <a:rPr lang="ko-KR" altLang="en-US" sz="1200" dirty="0" smtClean="0">
+              <a:rPr lang="ko-KR" altLang="en-US" sz="1200" dirty="0">
                 <a:latin typeface="나눔바른고딕" panose="020B0603020101020101" pitchFamily="34" charset="-127"/>
                 <a:ea typeface="나눔바른고딕" panose="020B0603020101020101" pitchFamily="34" charset="-127"/>
               </a:rPr>
               <a:t>기존에 물리 처리용 </a:t>
             </a:r>
             <a:r>
-              <a:rPr lang="en-US" altLang="ko-KR" sz="1200" dirty="0" err="1" smtClean="0">
+              <a:rPr lang="en-US" altLang="ko-KR" sz="1200" dirty="0" err="1">
                 <a:latin typeface="나눔바른고딕" panose="020B0603020101020101" pitchFamily="34" charset="-127"/>
                 <a:ea typeface="나눔바른고딕" panose="020B0603020101020101" pitchFamily="34" charset="-127"/>
               </a:rPr>
               <a:t>FixedUpdate</a:t>
             </a:r>
             <a:r>
-              <a:rPr lang="en-US" altLang="ko-KR" sz="1200" dirty="0" smtClean="0">
+              <a:rPr lang="en-US" altLang="ko-KR" sz="1200" dirty="0">
                 <a:latin typeface="나눔바른고딕" panose="020B0603020101020101" pitchFamily="34" charset="-127"/>
                 <a:ea typeface="나눔바른고딕" panose="020B0603020101020101" pitchFamily="34" charset="-127"/>
               </a:rPr>
               <a:t>(Tick), Update(Tick) </a:t>
             </a:r>
             <a:r>
-              <a:rPr lang="ko-KR" altLang="en-US" sz="1200" dirty="0" smtClean="0">
+              <a:rPr lang="ko-KR" altLang="en-US" sz="1200" dirty="0">
                 <a:latin typeface="나눔바른고딕" panose="020B0603020101020101" pitchFamily="34" charset="-127"/>
                 <a:ea typeface="나눔바른고딕" panose="020B0603020101020101" pitchFamily="34" charset="-127"/>
               </a:rPr>
               <a:t>외에 가장 마지막에 호출되는 </a:t>
             </a:r>
             <a:r>
-              <a:rPr lang="en-US" altLang="ko-KR" sz="1200" dirty="0" err="1" smtClean="0">
+              <a:rPr lang="en-US" altLang="ko-KR" sz="1200" dirty="0" err="1">
                 <a:latin typeface="나눔바른고딕" panose="020B0603020101020101" pitchFamily="34" charset="-127"/>
                 <a:ea typeface="나눔바른고딕" panose="020B0603020101020101" pitchFamily="34" charset="-127"/>
               </a:rPr>
               <a:t>LateUpdate</a:t>
             </a:r>
             <a:r>
-              <a:rPr lang="en-US" altLang="ko-KR" sz="1200" dirty="0" smtClean="0">
+              <a:rPr lang="en-US" altLang="ko-KR" sz="1200" dirty="0">
                 <a:latin typeface="나눔바른고딕" panose="020B0603020101020101" pitchFamily="34" charset="-127"/>
                 <a:ea typeface="나눔바른고딕" panose="020B0603020101020101" pitchFamily="34" charset="-127"/>
               </a:rPr>
               <a:t> </a:t>
             </a:r>
             <a:r>
-              <a:rPr lang="ko-KR" altLang="en-US" sz="1200" dirty="0" smtClean="0">
+              <a:rPr lang="ko-KR" altLang="en-US" sz="1200" dirty="0">
                 <a:latin typeface="나눔바른고딕" panose="020B0603020101020101" pitchFamily="34" charset="-127"/>
                 <a:ea typeface="나눔바른고딕" panose="020B0603020101020101" pitchFamily="34" charset="-127"/>
               </a:rPr>
               <a:t>추가</a:t>
             </a:r>
-            <a:endParaRPr lang="en-US" altLang="ko-KR" sz="1200" dirty="0" smtClean="0">
+            <a:endParaRPr lang="en-US" altLang="ko-KR" sz="1200" dirty="0">
               <a:latin typeface="나눔바른고딕" panose="020B0603020101020101" pitchFamily="34" charset="-127"/>
               <a:ea typeface="나눔바른고딕" panose="020B0603020101020101" pitchFamily="34" charset="-127"/>
             </a:endParaRPr>
@@ -6365,7 +6765,7 @@
         <p:cNvPr id="1" name="">
           <a:extLst>
             <a:ext uri="{FF2B5EF4-FFF2-40B4-BE49-F238E27FC236}">
-              <a16:creationId xmlns="" xmlns:a16="http://schemas.microsoft.com/office/drawing/2014/main" id="{49DA7EAA-204E-2F90-E52A-6C83B9013025}"/>
+              <a16:creationId xmlns:a16="http://schemas.microsoft.com/office/drawing/2014/main" id="{49DA7EAA-204E-2F90-E52A-6C83B9013025}"/>
             </a:ext>
           </a:extLst>
         </p:cNvPr>
@@ -6385,7 +6785,7 @@
           <p:cNvPr id="8" name="TextBox 7">
             <a:extLst>
               <a:ext uri="{FF2B5EF4-FFF2-40B4-BE49-F238E27FC236}">
-                <a16:creationId xmlns="" xmlns:a16="http://schemas.microsoft.com/office/drawing/2014/main" id="{701093AF-254C-83D7-8032-465A5FB513FB}"/>
+                <a16:creationId xmlns:a16="http://schemas.microsoft.com/office/drawing/2014/main" id="{701093AF-254C-83D7-8032-465A5FB513FB}"/>
               </a:ext>
             </a:extLst>
           </p:cNvPr>
@@ -6427,7 +6827,7 @@
           <p:cNvPr id="10" name="TextBox 9">
             <a:extLst>
               <a:ext uri="{FF2B5EF4-FFF2-40B4-BE49-F238E27FC236}">
-                <a16:creationId xmlns="" xmlns:a16="http://schemas.microsoft.com/office/drawing/2014/main" id="{2D538815-CBEF-E37B-5659-B5091F86B485}"/>
+                <a16:creationId xmlns:a16="http://schemas.microsoft.com/office/drawing/2014/main" id="{2D538815-CBEF-E37B-5659-B5091F86B485}"/>
               </a:ext>
             </a:extLst>
           </p:cNvPr>
@@ -6451,21 +6851,21 @@
           <a:lstStyle/>
           <a:p>
             <a:r>
-              <a:rPr lang="ko-KR" altLang="en-US" sz="1600" dirty="0" smtClean="0">
+              <a:rPr lang="ko-KR" altLang="en-US" sz="1600" dirty="0">
                 <a:latin typeface="나눔바른고딕" panose="020B0603020101020101" pitchFamily="34" charset="-127"/>
                 <a:ea typeface="나눔바른고딕" panose="020B0603020101020101" pitchFamily="34" charset="-127"/>
               </a:rPr>
               <a:t>애니메이션 </a:t>
             </a:r>
             <a:r>
-              <a:rPr lang="en-US" altLang="ko-KR" sz="1600" dirty="0" smtClean="0">
+              <a:rPr lang="en-US" altLang="ko-KR" sz="1600" dirty="0">
                 <a:latin typeface="나눔바른고딕" panose="020B0603020101020101" pitchFamily="34" charset="-127"/>
                 <a:ea typeface="나눔바른고딕" panose="020B0603020101020101" pitchFamily="34" charset="-127"/>
               </a:rPr>
               <a:t>IK </a:t>
             </a:r>
             <a:r>
-              <a:rPr lang="ko-KR" altLang="en-US" sz="1600" dirty="0" smtClean="0">
+              <a:rPr lang="ko-KR" altLang="en-US" sz="1600" dirty="0">
                 <a:latin typeface="나눔바른고딕" panose="020B0603020101020101" pitchFamily="34" charset="-127"/>
                 <a:ea typeface="나눔바른고딕" panose="020B0603020101020101" pitchFamily="34" charset="-127"/>
               </a:rPr>
@@ -6483,7 +6883,7 @@
           <p:cNvPr id="3" name="직선 연결선 2">
             <a:extLst>
               <a:ext uri="{FF2B5EF4-FFF2-40B4-BE49-F238E27FC236}">
-                <a16:creationId xmlns="" xmlns:a16="http://schemas.microsoft.com/office/drawing/2014/main" id="{76FFFECF-4B1C-95DF-32C3-2D2F19BEDAFB}"/>
+                <a16:creationId xmlns:a16="http://schemas.microsoft.com/office/drawing/2014/main" id="{76FFFECF-4B1C-95DF-32C3-2D2F19BEDAFB}"/>
               </a:ext>
             </a:extLst>
           </p:cNvPr>
@@ -6619,7 +7019,7 @@
           <p:cNvPr id="13" name="TextBox 12">
             <a:extLst>
               <a:ext uri="{FF2B5EF4-FFF2-40B4-BE49-F238E27FC236}">
-                <a16:creationId xmlns="" xmlns:a16="http://schemas.microsoft.com/office/drawing/2014/main" id="{2D538815-CBEF-E37B-5659-B5091F86B485}"/>
+                <a16:creationId xmlns:a16="http://schemas.microsoft.com/office/drawing/2014/main" id="{2D538815-CBEF-E37B-5659-B5091F86B485}"/>
               </a:ext>
             </a:extLst>
           </p:cNvPr>
@@ -6643,28 +7043,14 @@
           <a:lstStyle/>
           <a:p>
             <a:r>
-              <a:rPr lang="en-US" altLang="ko-KR" sz="1200" dirty="0" smtClean="0">
-                <a:latin typeface="나눔바른고딕" panose="020B0603020101020101" pitchFamily="34" charset="-127"/>
-                <a:ea typeface="나눔바른고딕" panose="020B0603020101020101" pitchFamily="34" charset="-127"/>
-              </a:rPr>
-              <a:t>CCD </a:t>
-            </a:r>
-            <a:r>
-              <a:rPr lang="ko-KR" altLang="en-US" sz="1200" dirty="0" smtClean="0">
-                <a:latin typeface="나눔바른고딕" panose="020B0603020101020101" pitchFamily="34" charset="-127"/>
-                <a:ea typeface="나눔바른고딕" panose="020B0603020101020101" pitchFamily="34" charset="-127"/>
-              </a:rPr>
-              <a:t>방식 </a:t>
-            </a:r>
-            <a:r>
-              <a:rPr lang="en-US" altLang="ko-KR" sz="1200" dirty="0" smtClean="0">
+              <a:rPr lang="en-US" altLang="ko-KR" sz="1200" dirty="0">
                 <a:latin typeface="나눔바른고딕" panose="020B0603020101020101" pitchFamily="34" charset="-127"/>
                 <a:ea typeface="나눔바른고딕" panose="020B0603020101020101" pitchFamily="34" charset="-127"/>
               </a:rPr>
               <a:t>2 bone IK </a:t>
             </a:r>
             <a:r>
-              <a:rPr lang="ko-KR" altLang="en-US" sz="1200" dirty="0" smtClean="0">
+              <a:rPr lang="ko-KR" altLang="en-US" sz="1200" dirty="0">
                 <a:latin typeface="나눔바른고딕" panose="020B0603020101020101" pitchFamily="34" charset="-127"/>
                 <a:ea typeface="나눔바른고딕" panose="020B0603020101020101" pitchFamily="34" charset="-127"/>
               </a:rPr>
@@ -6682,7 +7068,7 @@
           <p:cNvPr id="11" name="TextBox 10">
             <a:extLst>
               <a:ext uri="{FF2B5EF4-FFF2-40B4-BE49-F238E27FC236}">
-                <a16:creationId xmlns="" xmlns:a16="http://schemas.microsoft.com/office/drawing/2014/main" id="{2D538815-CBEF-E37B-5659-B5091F86B485}"/>
+                <a16:creationId xmlns:a16="http://schemas.microsoft.com/office/drawing/2014/main" id="{2D538815-CBEF-E37B-5659-B5091F86B485}"/>
               </a:ext>
             </a:extLst>
           </p:cNvPr>
@@ -6706,41 +7092,41 @@
           <a:lstStyle/>
           <a:p>
             <a:r>
-              <a:rPr lang="ko-KR" altLang="en-US" sz="1200" dirty="0" smtClean="0">
+              <a:rPr lang="ko-KR" altLang="en-US" sz="1200" dirty="0">
                 <a:latin typeface="나눔바른고딕" panose="020B0603020101020101" pitchFamily="34" charset="-127"/>
                 <a:ea typeface="나눔바른고딕" panose="020B0603020101020101" pitchFamily="34" charset="-127"/>
               </a:rPr>
               <a:t>발생한 문제점 </a:t>
             </a:r>
             <a:r>
-              <a:rPr lang="en-US" altLang="ko-KR" sz="1200" dirty="0" smtClean="0">
+              <a:rPr lang="en-US" altLang="ko-KR" sz="1200" dirty="0">
                 <a:latin typeface="나눔바른고딕" panose="020B0603020101020101" pitchFamily="34" charset="-127"/>
                 <a:ea typeface="나눔바른고딕" panose="020B0603020101020101" pitchFamily="34" charset="-127"/>
               </a:rPr>
               <a:t>2. </a:t>
             </a:r>
             <a:r>
-              <a:rPr lang="ko-KR" altLang="en-US" sz="1200" dirty="0" smtClean="0">
+              <a:rPr lang="ko-KR" altLang="en-US" sz="1200" dirty="0">
                 <a:latin typeface="나눔바른고딕" panose="020B0603020101020101" pitchFamily="34" charset="-127"/>
                 <a:ea typeface="나눔바른고딕" panose="020B0603020101020101" pitchFamily="34" charset="-127"/>
               </a:rPr>
               <a:t>경사로 상에서 발 </a:t>
             </a:r>
             <a:r>
-              <a:rPr lang="en-US" altLang="ko-KR" sz="1200" dirty="0" smtClean="0">
+              <a:rPr lang="en-US" altLang="ko-KR" sz="1200" dirty="0">
                 <a:latin typeface="나눔바른고딕" panose="020B0603020101020101" pitchFamily="34" charset="-127"/>
                 <a:ea typeface="나눔바른고딕" panose="020B0603020101020101" pitchFamily="34" charset="-127"/>
               </a:rPr>
               <a:t>IK </a:t>
             </a:r>
             <a:r>
-              <a:rPr lang="ko-KR" altLang="en-US" sz="1200" dirty="0" smtClean="0">
+              <a:rPr lang="ko-KR" altLang="en-US" sz="1200" dirty="0">
                 <a:latin typeface="나눔바른고딕" panose="020B0603020101020101" pitchFamily="34" charset="-127"/>
                 <a:ea typeface="나눔바른고딕" panose="020B0603020101020101" pitchFamily="34" charset="-127"/>
               </a:rPr>
               <a:t>적용</a:t>
             </a:r>
-            <a:endParaRPr lang="en-US" altLang="ko-KR" sz="1200" dirty="0" smtClean="0">
+            <a:endParaRPr lang="en-US" altLang="ko-KR" sz="1200" dirty="0">
               <a:latin typeface="나눔바른고딕" panose="020B0603020101020101" pitchFamily="34" charset="-127"/>
               <a:ea typeface="나눔바른고딕" panose="020B0603020101020101" pitchFamily="34" charset="-127"/>
             </a:endParaRPr>
@@ -6751,14 +7137,14 @@
               <a:buChar char="•"/>
             </a:pPr>
             <a:r>
-              <a:rPr lang="ko-KR" altLang="en-US" sz="1200" dirty="0" smtClean="0">
+              <a:rPr lang="ko-KR" altLang="en-US" sz="1200" dirty="0">
                 <a:latin typeface="나눔바른고딕" panose="020B0603020101020101" pitchFamily="34" charset="-127"/>
                 <a:ea typeface="나눔바른고딕" panose="020B0603020101020101" pitchFamily="34" charset="-127"/>
               </a:rPr>
               <a:t>원래는 장애물 </a:t>
             </a:r>
             <a:r>
-              <a:rPr lang="ko-KR" altLang="en-US" sz="1200" dirty="0" err="1" smtClean="0">
+              <a:rPr lang="ko-KR" altLang="en-US" sz="1200" dirty="0" err="1">
                 <a:latin typeface="나눔바른고딕" panose="020B0603020101020101" pitchFamily="34" charset="-127"/>
                 <a:ea typeface="나눔바른고딕" panose="020B0603020101020101" pitchFamily="34" charset="-127"/>
               </a:rPr>
@@ -6772,7 +7158,7 @@
               <a:t> </a:t>
             </a:r>
             <a:r>
-              <a:rPr lang="ko-KR" altLang="en-US" sz="1200" dirty="0" smtClean="0">
+              <a:rPr lang="ko-KR" altLang="en-US" sz="1200" dirty="0">
                 <a:latin typeface="나눔바른고딕" panose="020B0603020101020101" pitchFamily="34" charset="-127"/>
                 <a:ea typeface="나눔바른고딕" panose="020B0603020101020101" pitchFamily="34" charset="-127"/>
               </a:rPr>
@@ -6786,28 +7172,28 @@
               <a:t> </a:t>
             </a:r>
             <a:r>
-              <a:rPr lang="ko-KR" altLang="en-US" sz="1200" dirty="0" smtClean="0">
+              <a:rPr lang="ko-KR" altLang="en-US" sz="1200" dirty="0">
                 <a:latin typeface="나눔바른고딕" panose="020B0603020101020101" pitchFamily="34" charset="-127"/>
                 <a:ea typeface="나눔바른고딕" panose="020B0603020101020101" pitchFamily="34" charset="-127"/>
               </a:rPr>
               <a:t>매달린 상태의 보정을 위해서 고려한 발</a:t>
             </a:r>
             <a:r>
-              <a:rPr lang="en-US" altLang="ko-KR" sz="1200" dirty="0" smtClean="0">
+              <a:rPr lang="en-US" altLang="ko-KR" sz="1200" dirty="0">
                 <a:latin typeface="나눔바른고딕" panose="020B0603020101020101" pitchFamily="34" charset="-127"/>
                 <a:ea typeface="나눔바른고딕" panose="020B0603020101020101" pitchFamily="34" charset="-127"/>
               </a:rPr>
               <a:t>, </a:t>
             </a:r>
             <a:r>
-              <a:rPr lang="ko-KR" altLang="en-US" sz="1200" dirty="0" smtClean="0">
+              <a:rPr lang="ko-KR" altLang="en-US" sz="1200" dirty="0">
                 <a:latin typeface="나눔바른고딕" panose="020B0603020101020101" pitchFamily="34" charset="-127"/>
                 <a:ea typeface="나눔바른고딕" panose="020B0603020101020101" pitchFamily="34" charset="-127"/>
               </a:rPr>
               <a:t>손 </a:t>
             </a:r>
             <a:r>
-              <a:rPr lang="en-US" altLang="ko-KR" sz="1200" dirty="0" smtClean="0">
+              <a:rPr lang="en-US" altLang="ko-KR" sz="1200" dirty="0">
                 <a:latin typeface="나눔바른고딕" panose="020B0603020101020101" pitchFamily="34" charset="-127"/>
                 <a:ea typeface="나눔바른고딕" panose="020B0603020101020101" pitchFamily="34" charset="-127"/>
               </a:rPr>
@@ -6820,27 +7206,27 @@
               <a:buChar char="•"/>
             </a:pPr>
             <a:r>
-              <a:rPr lang="ko-KR" altLang="en-US" sz="1200" dirty="0" smtClean="0">
+              <a:rPr lang="ko-KR" altLang="en-US" sz="1200" dirty="0">
                 <a:latin typeface="나눔바른고딕" panose="020B0603020101020101" pitchFamily="34" charset="-127"/>
                 <a:ea typeface="나눔바른고딕" panose="020B0603020101020101" pitchFamily="34" charset="-127"/>
               </a:rPr>
               <a:t>적용해보니 경사로에서도 발 </a:t>
             </a:r>
             <a:r>
-              <a:rPr lang="en-US" altLang="ko-KR" sz="1200" dirty="0" smtClean="0">
+              <a:rPr lang="en-US" altLang="ko-KR" sz="1200" dirty="0">
                 <a:latin typeface="나눔바른고딕" panose="020B0603020101020101" pitchFamily="34" charset="-127"/>
                 <a:ea typeface="나눔바른고딕" panose="020B0603020101020101" pitchFamily="34" charset="-127"/>
               </a:rPr>
               <a:t>IK</a:t>
             </a:r>
             <a:r>
-              <a:rPr lang="ko-KR" altLang="en-US" sz="1200" dirty="0" smtClean="0">
+              <a:rPr lang="ko-KR" altLang="en-US" sz="1200" dirty="0">
                 <a:latin typeface="나눔바른고딕" panose="020B0603020101020101" pitchFamily="34" charset="-127"/>
                 <a:ea typeface="나눔바른고딕" panose="020B0603020101020101" pitchFamily="34" charset="-127"/>
               </a:rPr>
               <a:t>를 적용할 필요성이 생김</a:t>
             </a:r>
-            <a:endParaRPr lang="en-US" altLang="ko-KR" sz="1200" dirty="0" smtClean="0">
+            <a:endParaRPr lang="en-US" altLang="ko-KR" sz="1200" dirty="0">
               <a:latin typeface="나눔바른고딕" panose="020B0603020101020101" pitchFamily="34" charset="-127"/>
               <a:ea typeface="나눔바른고딕" panose="020B0603020101020101" pitchFamily="34" charset="-127"/>
             </a:endParaRPr>
@@ -6851,21 +7237,21 @@
               <a:buChar char="•"/>
             </a:pPr>
             <a:r>
-              <a:rPr lang="ko-KR" altLang="en-US" sz="1200" dirty="0" smtClean="0">
+              <a:rPr lang="ko-KR" altLang="en-US" sz="1200" dirty="0">
                 <a:latin typeface="나눔바른고딕" panose="020B0603020101020101" pitchFamily="34" charset="-127"/>
                 <a:ea typeface="나눔바른고딕" panose="020B0603020101020101" pitchFamily="34" charset="-127"/>
               </a:rPr>
               <a:t>적용 시</a:t>
             </a:r>
             <a:r>
-              <a:rPr lang="en-US" altLang="ko-KR" sz="1200" dirty="0" smtClean="0">
+              <a:rPr lang="en-US" altLang="ko-KR" sz="1200" dirty="0">
                 <a:latin typeface="나눔바른고딕" panose="020B0603020101020101" pitchFamily="34" charset="-127"/>
                 <a:ea typeface="나눔바른고딕" panose="020B0603020101020101" pitchFamily="34" charset="-127"/>
               </a:rPr>
               <a:t>, </a:t>
             </a:r>
             <a:r>
-              <a:rPr lang="ko-KR" altLang="en-US" sz="1200" dirty="0" smtClean="0">
+              <a:rPr lang="ko-KR" altLang="en-US" sz="1200" dirty="0">
                 <a:latin typeface="나눔바른고딕" panose="020B0603020101020101" pitchFamily="34" charset="-127"/>
                 <a:ea typeface="나눔바른고딕" panose="020B0603020101020101" pitchFamily="34" charset="-127"/>
               </a:rPr>
@@ -6879,13 +7265,13 @@
               <a:t> </a:t>
             </a:r>
             <a:r>
-              <a:rPr lang="ko-KR" altLang="en-US" sz="1200" dirty="0" smtClean="0">
+              <a:rPr lang="ko-KR" altLang="en-US" sz="1200" dirty="0">
                 <a:latin typeface="나눔바른고딕" panose="020B0603020101020101" pitchFamily="34" charset="-127"/>
                 <a:ea typeface="나눔바른고딕" panose="020B0603020101020101" pitchFamily="34" charset="-127"/>
               </a:rPr>
               <a:t>쭉 뻗어져 닫지 않음</a:t>
             </a:r>
-            <a:endParaRPr lang="en-US" altLang="ko-KR" sz="1200" dirty="0" smtClean="0">
+            <a:endParaRPr lang="en-US" altLang="ko-KR" sz="1200" dirty="0">
               <a:latin typeface="나눔바른고딕" panose="020B0603020101020101" pitchFamily="34" charset="-127"/>
               <a:ea typeface="나눔바른고딕" panose="020B0603020101020101" pitchFamily="34" charset="-127"/>
             </a:endParaRPr>
@@ -6893,20 +7279,20 @@
           <a:p>
             <a:pPr lvl="1"/>
             <a:r>
-              <a:rPr lang="en-US" altLang="ko-KR" sz="1200" dirty="0" smtClean="0">
+              <a:rPr lang="en-US" altLang="ko-KR" sz="1200" dirty="0">
                 <a:latin typeface="나눔바른고딕" panose="020B0603020101020101" pitchFamily="34" charset="-127"/>
                 <a:ea typeface="나눔바른고딕" panose="020B0603020101020101" pitchFamily="34" charset="-127"/>
               </a:rPr>
               <a:t>- </a:t>
             </a:r>
             <a:r>
-              <a:rPr lang="ko-KR" altLang="en-US" sz="1200" dirty="0" smtClean="0">
+              <a:rPr lang="ko-KR" altLang="en-US" sz="1200" dirty="0">
                 <a:latin typeface="나눔바른고딕" panose="020B0603020101020101" pitchFamily="34" charset="-127"/>
                 <a:ea typeface="나눔바른고딕" panose="020B0603020101020101" pitchFamily="34" charset="-127"/>
               </a:rPr>
               <a:t>골반 뼈를 아래쪽 발에 맞춰서 같이 내려주기</a:t>
             </a:r>
-            <a:endParaRPr lang="en-US" altLang="ko-KR" sz="1200" dirty="0" smtClean="0">
+            <a:endParaRPr lang="en-US" altLang="ko-KR" sz="1200" dirty="0">
               <a:latin typeface="나눔바른고딕" panose="020B0603020101020101" pitchFamily="34" charset="-127"/>
               <a:ea typeface="나눔바른고딕" panose="020B0603020101020101" pitchFamily="34" charset="-127"/>
             </a:endParaRPr>
@@ -6934,7 +7320,7 @@
         <p:cNvPr id="1" name="">
           <a:extLst>
             <a:ext uri="{FF2B5EF4-FFF2-40B4-BE49-F238E27FC236}">
-              <a16:creationId xmlns="" xmlns:a16="http://schemas.microsoft.com/office/drawing/2014/main" id="{49DA7EAA-204E-2F90-E52A-6C83B9013025}"/>
+              <a16:creationId xmlns:a16="http://schemas.microsoft.com/office/drawing/2014/main" id="{49DA7EAA-204E-2F90-E52A-6C83B9013025}"/>
             </a:ext>
           </a:extLst>
         </p:cNvPr>
@@ -6954,7 +7340,7 @@
           <p:cNvPr id="8" name="TextBox 7">
             <a:extLst>
               <a:ext uri="{FF2B5EF4-FFF2-40B4-BE49-F238E27FC236}">
-                <a16:creationId xmlns="" xmlns:a16="http://schemas.microsoft.com/office/drawing/2014/main" id="{701093AF-254C-83D7-8032-465A5FB513FB}"/>
+                <a16:creationId xmlns:a16="http://schemas.microsoft.com/office/drawing/2014/main" id="{701093AF-254C-83D7-8032-465A5FB513FB}"/>
               </a:ext>
             </a:extLst>
           </p:cNvPr>
@@ -6996,7 +7382,7 @@
           <p:cNvPr id="10" name="TextBox 9">
             <a:extLst>
               <a:ext uri="{FF2B5EF4-FFF2-40B4-BE49-F238E27FC236}">
-                <a16:creationId xmlns="" xmlns:a16="http://schemas.microsoft.com/office/drawing/2014/main" id="{2D538815-CBEF-E37B-5659-B5091F86B485}"/>
+                <a16:creationId xmlns:a16="http://schemas.microsoft.com/office/drawing/2014/main" id="{2D538815-CBEF-E37B-5659-B5091F86B485}"/>
               </a:ext>
             </a:extLst>
           </p:cNvPr>
@@ -7020,21 +7406,21 @@
           <a:lstStyle/>
           <a:p>
             <a:r>
-              <a:rPr lang="ko-KR" altLang="en-US" sz="1600" dirty="0" smtClean="0">
+              <a:rPr lang="ko-KR" altLang="en-US" sz="1600" dirty="0">
                 <a:latin typeface="나눔바른고딕" panose="020B0603020101020101" pitchFamily="34" charset="-127"/>
                 <a:ea typeface="나눔바른고딕" panose="020B0603020101020101" pitchFamily="34" charset="-127"/>
               </a:rPr>
               <a:t>애니메이션 </a:t>
             </a:r>
             <a:r>
-              <a:rPr lang="en-US" altLang="ko-KR" sz="1600" dirty="0" smtClean="0">
+              <a:rPr lang="en-US" altLang="ko-KR" sz="1600" dirty="0">
                 <a:latin typeface="나눔바른고딕" panose="020B0603020101020101" pitchFamily="34" charset="-127"/>
                 <a:ea typeface="나눔바른고딕" panose="020B0603020101020101" pitchFamily="34" charset="-127"/>
               </a:rPr>
               <a:t>IK </a:t>
             </a:r>
             <a:r>
-              <a:rPr lang="ko-KR" altLang="en-US" sz="1600" dirty="0" smtClean="0">
+              <a:rPr lang="ko-KR" altLang="en-US" sz="1600" dirty="0">
                 <a:latin typeface="나눔바른고딕" panose="020B0603020101020101" pitchFamily="34" charset="-127"/>
                 <a:ea typeface="나눔바른고딕" panose="020B0603020101020101" pitchFamily="34" charset="-127"/>
               </a:rPr>
@@ -7052,7 +7438,7 @@
           <p:cNvPr id="3" name="직선 연결선 2">
             <a:extLst>
               <a:ext uri="{FF2B5EF4-FFF2-40B4-BE49-F238E27FC236}">
-                <a16:creationId xmlns="" xmlns:a16="http://schemas.microsoft.com/office/drawing/2014/main" id="{76FFFECF-4B1C-95DF-32C3-2D2F19BEDAFB}"/>
+                <a16:creationId xmlns:a16="http://schemas.microsoft.com/office/drawing/2014/main" id="{76FFFECF-4B1C-95DF-32C3-2D2F19BEDAFB}"/>
               </a:ext>
             </a:extLst>
           </p:cNvPr>
@@ -7188,7 +7574,7 @@
           <p:cNvPr id="13" name="TextBox 12">
             <a:extLst>
               <a:ext uri="{FF2B5EF4-FFF2-40B4-BE49-F238E27FC236}">
-                <a16:creationId xmlns="" xmlns:a16="http://schemas.microsoft.com/office/drawing/2014/main" id="{2D538815-CBEF-E37B-5659-B5091F86B485}"/>
+                <a16:creationId xmlns:a16="http://schemas.microsoft.com/office/drawing/2014/main" id="{2D538815-CBEF-E37B-5659-B5091F86B485}"/>
               </a:ext>
             </a:extLst>
           </p:cNvPr>
@@ -7212,28 +7598,14 @@
           <a:lstStyle/>
           <a:p>
             <a:r>
-              <a:rPr lang="en-US" altLang="ko-KR" sz="1200" dirty="0" smtClean="0">
-                <a:latin typeface="나눔바른고딕" panose="020B0603020101020101" pitchFamily="34" charset="-127"/>
-                <a:ea typeface="나눔바른고딕" panose="020B0603020101020101" pitchFamily="34" charset="-127"/>
-              </a:rPr>
-              <a:t>CCD </a:t>
-            </a:r>
-            <a:r>
-              <a:rPr lang="ko-KR" altLang="en-US" sz="1200" dirty="0" smtClean="0">
-                <a:latin typeface="나눔바른고딕" panose="020B0603020101020101" pitchFamily="34" charset="-127"/>
-                <a:ea typeface="나눔바른고딕" panose="020B0603020101020101" pitchFamily="34" charset="-127"/>
-              </a:rPr>
-              <a:t>방식 </a:t>
-            </a:r>
-            <a:r>
-              <a:rPr lang="en-US" altLang="ko-KR" sz="1200" dirty="0" smtClean="0">
+              <a:rPr lang="en-US" altLang="ko-KR" sz="1200" dirty="0">
                 <a:latin typeface="나눔바른고딕" panose="020B0603020101020101" pitchFamily="34" charset="-127"/>
                 <a:ea typeface="나눔바른고딕" panose="020B0603020101020101" pitchFamily="34" charset="-127"/>
               </a:rPr>
               <a:t>2 bone IK </a:t>
             </a:r>
             <a:r>
-              <a:rPr lang="ko-KR" altLang="en-US" sz="1200" dirty="0" smtClean="0">
+              <a:rPr lang="ko-KR" altLang="en-US" sz="1200" dirty="0">
                 <a:latin typeface="나눔바른고딕" panose="020B0603020101020101" pitchFamily="34" charset="-127"/>
                 <a:ea typeface="나눔바른고딕" panose="020B0603020101020101" pitchFamily="34" charset="-127"/>
               </a:rPr>
@@ -7251,7 +7623,7 @@
           <p:cNvPr id="11" name="TextBox 10">
             <a:extLst>
               <a:ext uri="{FF2B5EF4-FFF2-40B4-BE49-F238E27FC236}">
-                <a16:creationId xmlns="" xmlns:a16="http://schemas.microsoft.com/office/drawing/2014/main" id="{2D538815-CBEF-E37B-5659-B5091F86B485}"/>
+                <a16:creationId xmlns:a16="http://schemas.microsoft.com/office/drawing/2014/main" id="{2D538815-CBEF-E37B-5659-B5091F86B485}"/>
               </a:ext>
             </a:extLst>
           </p:cNvPr>
@@ -7275,27 +7647,27 @@
           <a:lstStyle/>
           <a:p>
             <a:r>
-              <a:rPr lang="ko-KR" altLang="en-US" sz="1200" dirty="0" smtClean="0">
+              <a:rPr lang="ko-KR" altLang="en-US" sz="1200" dirty="0">
                 <a:latin typeface="나눔바른고딕" panose="020B0603020101020101" pitchFamily="34" charset="-127"/>
                 <a:ea typeface="나눔바른고딕" panose="020B0603020101020101" pitchFamily="34" charset="-127"/>
               </a:rPr>
               <a:t>발생한 문제점 </a:t>
             </a:r>
             <a:r>
-              <a:rPr lang="en-US" altLang="ko-KR" sz="1200" dirty="0" smtClean="0">
+              <a:rPr lang="en-US" altLang="ko-KR" sz="1200" dirty="0">
                 <a:latin typeface="나눔바른고딕" panose="020B0603020101020101" pitchFamily="34" charset="-127"/>
                 <a:ea typeface="나눔바른고딕" panose="020B0603020101020101" pitchFamily="34" charset="-127"/>
               </a:rPr>
               <a:t>3. </a:t>
             </a:r>
             <a:r>
-              <a:rPr lang="ko-KR" altLang="en-US" sz="1200" dirty="0" smtClean="0">
+              <a:rPr lang="ko-KR" altLang="en-US" sz="1200" dirty="0">
                 <a:latin typeface="나눔바른고딕" panose="020B0603020101020101" pitchFamily="34" charset="-127"/>
                 <a:ea typeface="나눔바른고딕" panose="020B0603020101020101" pitchFamily="34" charset="-127"/>
               </a:rPr>
               <a:t>적용했으나 직접 보고 추가 보정이 필요</a:t>
             </a:r>
-            <a:endParaRPr lang="en-US" altLang="ko-KR" sz="1200" dirty="0" smtClean="0">
+            <a:endParaRPr lang="en-US" altLang="ko-KR" sz="1200" dirty="0">
               <a:latin typeface="나눔바른고딕" panose="020B0603020101020101" pitchFamily="34" charset="-127"/>
               <a:ea typeface="나눔바른고딕" panose="020B0603020101020101" pitchFamily="34" charset="-127"/>
             </a:endParaRPr>
@@ -7317,16 +7689,9 @@
                 <a:latin typeface="나눔바른고딕" panose="020B0603020101020101" pitchFamily="34" charset="-127"/>
                 <a:ea typeface="나눔바른고딕" panose="020B0603020101020101" pitchFamily="34" charset="-127"/>
               </a:rPr>
-              <a:t>의 의존을 최소화하려고 </a:t>
-            </a:r>
-            <a:r>
-              <a:rPr lang="ko-KR" altLang="en-US" sz="1200" dirty="0" smtClean="0">
-                <a:latin typeface="나눔바른고딕" panose="020B0603020101020101" pitchFamily="34" charset="-127"/>
-                <a:ea typeface="나눔바른고딕" panose="020B0603020101020101" pitchFamily="34" charset="-127"/>
-              </a:rPr>
-              <a:t>캐릭터의 위치를 기본적으로 장애물에 가깝게 붙여둔 상태</a:t>
-            </a:r>
-            <a:endParaRPr lang="en-US" altLang="ko-KR" sz="1200" dirty="0" smtClean="0">
+              <a:t>의 의존을 최소화하려고 캐릭터의 위치를 기본적으로 장애물에 가깝게 붙여둔 상태</a:t>
+            </a:r>
+            <a:endParaRPr lang="en-US" altLang="ko-KR" sz="1200" dirty="0">
               <a:latin typeface="나눔바른고딕" panose="020B0603020101020101" pitchFamily="34" charset="-127"/>
               <a:ea typeface="나눔바른고딕" panose="020B0603020101020101" pitchFamily="34" charset="-127"/>
             </a:endParaRPr>
@@ -7337,69 +7702,69 @@
               <a:buChar char="•"/>
             </a:pPr>
             <a:r>
-              <a:rPr lang="ko-KR" altLang="en-US" sz="1200" dirty="0" smtClean="0">
+              <a:rPr lang="ko-KR" altLang="en-US" sz="1200" dirty="0">
                 <a:latin typeface="나눔바른고딕" panose="020B0603020101020101" pitchFamily="34" charset="-127"/>
                 <a:ea typeface="나눔바른고딕" panose="020B0603020101020101" pitchFamily="34" charset="-127"/>
               </a:rPr>
               <a:t>이렇게 하면 손</a:t>
             </a:r>
             <a:r>
-              <a:rPr lang="en-US" altLang="ko-KR" sz="1200" dirty="0" smtClean="0">
+              <a:rPr lang="en-US" altLang="ko-KR" sz="1200" dirty="0">
                 <a:latin typeface="나눔바른고딕" panose="020B0603020101020101" pitchFamily="34" charset="-127"/>
                 <a:ea typeface="나눔바른고딕" panose="020B0603020101020101" pitchFamily="34" charset="-127"/>
               </a:rPr>
               <a:t>, </a:t>
             </a:r>
             <a:r>
-              <a:rPr lang="ko-KR" altLang="en-US" sz="1200" dirty="0" smtClean="0">
+              <a:rPr lang="ko-KR" altLang="en-US" sz="1200" dirty="0">
                 <a:latin typeface="나눔바른고딕" panose="020B0603020101020101" pitchFamily="34" charset="-127"/>
                 <a:ea typeface="나눔바른고딕" panose="020B0603020101020101" pitchFamily="34" charset="-127"/>
               </a:rPr>
               <a:t>발 </a:t>
             </a:r>
             <a:r>
-              <a:rPr lang="en-US" altLang="ko-KR" sz="1200" dirty="0" smtClean="0">
+              <a:rPr lang="en-US" altLang="ko-KR" sz="1200" dirty="0">
                 <a:latin typeface="나눔바른고딕" panose="020B0603020101020101" pitchFamily="34" charset="-127"/>
                 <a:ea typeface="나눔바른고딕" panose="020B0603020101020101" pitchFamily="34" charset="-127"/>
               </a:rPr>
               <a:t>IK</a:t>
             </a:r>
             <a:r>
-              <a:rPr lang="ko-KR" altLang="en-US" sz="1200" dirty="0" smtClean="0">
+              <a:rPr lang="ko-KR" altLang="en-US" sz="1200" dirty="0">
                 <a:latin typeface="나눔바른고딕" panose="020B0603020101020101" pitchFamily="34" charset="-127"/>
                 <a:ea typeface="나눔바른고딕" panose="020B0603020101020101" pitchFamily="34" charset="-127"/>
               </a:rPr>
               <a:t>의 </a:t>
             </a:r>
             <a:r>
-              <a:rPr lang="ko-KR" altLang="en-US" sz="1200" dirty="0" err="1" smtClean="0">
+              <a:rPr lang="ko-KR" altLang="en-US" sz="1200" dirty="0" err="1">
                 <a:latin typeface="나눔바른고딕" panose="020B0603020101020101" pitchFamily="34" charset="-127"/>
                 <a:ea typeface="나눔바른고딕" panose="020B0603020101020101" pitchFamily="34" charset="-127"/>
               </a:rPr>
               <a:t>타겟을</a:t>
             </a:r>
             <a:r>
-              <a:rPr lang="ko-KR" altLang="en-US" sz="1200" dirty="0" smtClean="0">
+              <a:rPr lang="ko-KR" altLang="en-US" sz="1200" dirty="0">
                 <a:latin typeface="나눔바른고딕" panose="020B0603020101020101" pitchFamily="34" charset="-127"/>
                 <a:ea typeface="나눔바른고딕" panose="020B0603020101020101" pitchFamily="34" charset="-127"/>
               </a:rPr>
               <a:t> </a:t>
             </a:r>
             <a:r>
-              <a:rPr lang="ko-KR" altLang="en-US" sz="1200" dirty="0" err="1" smtClean="0">
+              <a:rPr lang="ko-KR" altLang="en-US" sz="1200" dirty="0" err="1">
                 <a:latin typeface="나눔바른고딕" panose="020B0603020101020101" pitchFamily="34" charset="-127"/>
                 <a:ea typeface="나눔바른고딕" panose="020B0603020101020101" pitchFamily="34" charset="-127"/>
               </a:rPr>
               <a:t>살짝만</a:t>
             </a:r>
             <a:r>
-              <a:rPr lang="ko-KR" altLang="en-US" sz="1200" dirty="0" smtClean="0">
+              <a:rPr lang="ko-KR" altLang="en-US" sz="1200" dirty="0">
                 <a:latin typeface="나눔바른고딕" panose="020B0603020101020101" pitchFamily="34" charset="-127"/>
                 <a:ea typeface="나눔바른고딕" panose="020B0603020101020101" pitchFamily="34" charset="-127"/>
               </a:rPr>
               <a:t> 붙이면 될 것이라 예상</a:t>
             </a:r>
-            <a:endParaRPr lang="en-US" altLang="ko-KR" sz="1200" dirty="0" smtClean="0">
+            <a:endParaRPr lang="en-US" altLang="ko-KR" sz="1200" dirty="0">
               <a:latin typeface="나눔바른고딕" panose="020B0603020101020101" pitchFamily="34" charset="-127"/>
               <a:ea typeface="나눔바른고딕" panose="020B0603020101020101" pitchFamily="34" charset="-127"/>
             </a:endParaRPr>
@@ -7410,13 +7775,13 @@
               <a:buChar char="•"/>
             </a:pPr>
             <a:r>
-              <a:rPr lang="ko-KR" altLang="en-US" sz="1200" dirty="0" smtClean="0">
+              <a:rPr lang="ko-KR" altLang="en-US" sz="1200" dirty="0">
                 <a:latin typeface="나눔바른고딕" panose="020B0603020101020101" pitchFamily="34" charset="-127"/>
                 <a:ea typeface="나눔바른고딕" panose="020B0603020101020101" pitchFamily="34" charset="-127"/>
               </a:rPr>
               <a:t>실제로 적용된 결과</a:t>
             </a:r>
-            <a:endParaRPr lang="en-US" altLang="ko-KR" sz="1200" dirty="0" smtClean="0">
+            <a:endParaRPr lang="en-US" altLang="ko-KR" sz="1200" dirty="0">
               <a:latin typeface="나눔바른고딕" panose="020B0603020101020101" pitchFamily="34" charset="-127"/>
               <a:ea typeface="나눔바른고딕" panose="020B0603020101020101" pitchFamily="34" charset="-127"/>
             </a:endParaRPr>
@@ -7427,21 +7792,21 @@
               <a:buChar char="•"/>
             </a:pPr>
             <a:r>
-              <a:rPr lang="ko-KR" altLang="en-US" sz="1200" dirty="0" smtClean="0">
+              <a:rPr lang="ko-KR" altLang="en-US" sz="1200" dirty="0">
                 <a:latin typeface="나눔바른고딕" panose="020B0603020101020101" pitchFamily="34" charset="-127"/>
                 <a:ea typeface="나눔바른고딕" panose="020B0603020101020101" pitchFamily="34" charset="-127"/>
               </a:rPr>
               <a:t>오히려 더 기괴하게 어깨</a:t>
             </a:r>
             <a:r>
-              <a:rPr lang="en-US" altLang="ko-KR" sz="1200" dirty="0" smtClean="0">
+              <a:rPr lang="en-US" altLang="ko-KR" sz="1200" dirty="0">
                 <a:latin typeface="나눔바른고딕" panose="020B0603020101020101" pitchFamily="34" charset="-127"/>
                 <a:ea typeface="나눔바른고딕" panose="020B0603020101020101" pitchFamily="34" charset="-127"/>
               </a:rPr>
               <a:t>, </a:t>
             </a:r>
             <a:r>
-              <a:rPr lang="ko-KR" altLang="en-US" sz="1200" dirty="0" smtClean="0">
+              <a:rPr lang="ko-KR" altLang="en-US" sz="1200" dirty="0">
                 <a:latin typeface="나눔바른고딕" panose="020B0603020101020101" pitchFamily="34" charset="-127"/>
                 <a:ea typeface="나눔바른고딕" panose="020B0603020101020101" pitchFamily="34" charset="-127"/>
               </a:rPr>
@@ -7458,55 +7823,55 @@
               <a:buChar char="•"/>
             </a:pPr>
             <a:r>
-              <a:rPr lang="ko-KR" altLang="en-US" sz="1200" dirty="0" smtClean="0">
+              <a:rPr lang="ko-KR" altLang="en-US" sz="1200" dirty="0">
                 <a:latin typeface="나눔바른고딕" panose="020B0603020101020101" pitchFamily="34" charset="-127"/>
                 <a:ea typeface="나눔바른고딕" panose="020B0603020101020101" pitchFamily="34" charset="-127"/>
               </a:rPr>
               <a:t>애니메이션들에서 </a:t>
             </a:r>
             <a:r>
-              <a:rPr lang="en-US" altLang="ko-KR" sz="1200" dirty="0" smtClean="0">
+              <a:rPr lang="en-US" altLang="ko-KR" sz="1200" dirty="0">
                 <a:latin typeface="나눔바른고딕" panose="020B0603020101020101" pitchFamily="34" charset="-127"/>
                 <a:ea typeface="나눔바른고딕" panose="020B0603020101020101" pitchFamily="34" charset="-127"/>
               </a:rPr>
               <a:t>IK</a:t>
             </a:r>
             <a:r>
-              <a:rPr lang="ko-KR" altLang="en-US" sz="1200" dirty="0" smtClean="0">
+              <a:rPr lang="ko-KR" altLang="en-US" sz="1200" dirty="0">
                 <a:latin typeface="나눔바른고딕" panose="020B0603020101020101" pitchFamily="34" charset="-127"/>
                 <a:ea typeface="나눔바른고딕" panose="020B0603020101020101" pitchFamily="34" charset="-127"/>
               </a:rPr>
               <a:t>를 쓰는 경우</a:t>
             </a:r>
             <a:r>
-              <a:rPr lang="en-US" altLang="ko-KR" sz="1200" dirty="0" smtClean="0">
+              <a:rPr lang="en-US" altLang="ko-KR" sz="1200" dirty="0">
                 <a:latin typeface="나눔바른고딕" panose="020B0603020101020101" pitchFamily="34" charset="-127"/>
                 <a:ea typeface="나눔바른고딕" panose="020B0603020101020101" pitchFamily="34" charset="-127"/>
               </a:rPr>
               <a:t>, </a:t>
             </a:r>
             <a:r>
-              <a:rPr lang="ko-KR" altLang="en-US" sz="1200" dirty="0" smtClean="0">
+              <a:rPr lang="ko-KR" altLang="en-US" sz="1200" dirty="0">
                 <a:latin typeface="나눔바른고딕" panose="020B0603020101020101" pitchFamily="34" charset="-127"/>
                 <a:ea typeface="나눔바른고딕" panose="020B0603020101020101" pitchFamily="34" charset="-127"/>
               </a:rPr>
               <a:t>일정량 </a:t>
             </a:r>
             <a:r>
-              <a:rPr lang="en-US" altLang="ko-KR" sz="1200" dirty="0" smtClean="0">
+              <a:rPr lang="en-US" altLang="ko-KR" sz="1200" dirty="0">
                 <a:latin typeface="나눔바른고딕" panose="020B0603020101020101" pitchFamily="34" charset="-127"/>
                 <a:ea typeface="나눔바른고딕" panose="020B0603020101020101" pitchFamily="34" charset="-127"/>
               </a:rPr>
               <a:t>Offset</a:t>
             </a:r>
             <a:r>
-              <a:rPr lang="ko-KR" altLang="en-US" sz="1200" dirty="0" smtClean="0">
+              <a:rPr lang="ko-KR" altLang="en-US" sz="1200" dirty="0">
                 <a:latin typeface="나눔바른고딕" panose="020B0603020101020101" pitchFamily="34" charset="-127"/>
                 <a:ea typeface="나눔바른고딕" panose="020B0603020101020101" pitchFamily="34" charset="-127"/>
               </a:rPr>
               <a:t>을 주어서 보정할 필요성이 생김</a:t>
             </a:r>
-            <a:endParaRPr lang="en-US" altLang="ko-KR" sz="1200" dirty="0" smtClean="0">
+            <a:endParaRPr lang="en-US" altLang="ko-KR" sz="1200" dirty="0">
               <a:latin typeface="나눔바른고딕" panose="020B0603020101020101" pitchFamily="34" charset="-127"/>
               <a:ea typeface="나눔바른고딕" panose="020B0603020101020101" pitchFamily="34" charset="-127"/>
             </a:endParaRPr>
@@ -7534,7 +7899,7 @@
         <p:cNvPr id="1" name="">
           <a:extLst>
             <a:ext uri="{FF2B5EF4-FFF2-40B4-BE49-F238E27FC236}">
-              <a16:creationId xmlns="" xmlns:a16="http://schemas.microsoft.com/office/drawing/2014/main" id="{49DA7EAA-204E-2F90-E52A-6C83B9013025}"/>
+              <a16:creationId xmlns:a16="http://schemas.microsoft.com/office/drawing/2014/main" id="{49DA7EAA-204E-2F90-E52A-6C83B9013025}"/>
             </a:ext>
           </a:extLst>
         </p:cNvPr>
@@ -7554,7 +7919,7 @@
           <p:cNvPr id="5" name="TextBox 4">
             <a:extLst>
               <a:ext uri="{FF2B5EF4-FFF2-40B4-BE49-F238E27FC236}">
-                <a16:creationId xmlns="" xmlns:a16="http://schemas.microsoft.com/office/drawing/2014/main" id="{4715F932-2F2C-4A3F-7F16-1B13D352985A}"/>
+                <a16:creationId xmlns:a16="http://schemas.microsoft.com/office/drawing/2014/main" id="{4715F932-2F2C-4A3F-7F16-1B13D352985A}"/>
               </a:ext>
             </a:extLst>
           </p:cNvPr>
@@ -7643,21 +8008,21 @@
                 <a:gridCol w="791436">
                   <a:extLst>
                     <a:ext uri="{9D8B030D-6E8A-4147-A177-3AD203B41FA5}">
-                      <a16:colId xmlns="" xmlns:a16="http://schemas.microsoft.com/office/drawing/2014/main" val="20000"/>
+                      <a16:colId xmlns:a16="http://schemas.microsoft.com/office/drawing/2014/main" val="20000"/>
                     </a:ext>
                   </a:extLst>
                 </a:gridCol>
                 <a:gridCol w="4207281">
                   <a:extLst>
                     <a:ext uri="{9D8B030D-6E8A-4147-A177-3AD203B41FA5}">
-                      <a16:colId xmlns="" xmlns:a16="http://schemas.microsoft.com/office/drawing/2014/main" val="20001"/>
+                      <a16:colId xmlns:a16="http://schemas.microsoft.com/office/drawing/2014/main" val="20001"/>
                     </a:ext>
                   </a:extLst>
                 </a:gridCol>
                 <a:gridCol w="6320143">
                   <a:extLst>
                     <a:ext uri="{9D8B030D-6E8A-4147-A177-3AD203B41FA5}">
-                      <a16:colId xmlns="" xmlns:a16="http://schemas.microsoft.com/office/drawing/2014/main" val="20002"/>
+                      <a16:colId xmlns:a16="http://schemas.microsoft.com/office/drawing/2014/main" val="20002"/>
                     </a:ext>
                   </a:extLst>
                 </a:gridCol>
@@ -7713,7 +8078,7 @@
                 </a:tc>
                 <a:extLst>
                   <a:ext uri="{0D108BD9-81ED-4DB2-BD59-A6C34878D82A}">
-                    <a16:rowId xmlns="" xmlns:a16="http://schemas.microsoft.com/office/drawing/2014/main" val="10000"/>
+                    <a16:rowId xmlns:a16="http://schemas.microsoft.com/office/drawing/2014/main" val="10000"/>
                   </a:ext>
                 </a:extLst>
               </a:tr>
@@ -7892,7 +8257,7 @@
                 </a:tc>
                 <a:extLst>
                   <a:ext uri="{0D108BD9-81ED-4DB2-BD59-A6C34878D82A}">
-                    <a16:rowId xmlns="" xmlns:a16="http://schemas.microsoft.com/office/drawing/2014/main" val="10001"/>
+                    <a16:rowId xmlns:a16="http://schemas.microsoft.com/office/drawing/2014/main" val="10001"/>
                   </a:ext>
                 </a:extLst>
               </a:tr>
@@ -8112,7 +8477,7 @@
                 </a:tc>
                 <a:extLst>
                   <a:ext uri="{0D108BD9-81ED-4DB2-BD59-A6C34878D82A}">
-                    <a16:rowId xmlns="" xmlns:a16="http://schemas.microsoft.com/office/drawing/2014/main" val="10002"/>
+                    <a16:rowId xmlns:a16="http://schemas.microsoft.com/office/drawing/2014/main" val="10002"/>
                   </a:ext>
                 </a:extLst>
               </a:tr>
@@ -8287,7 +8652,7 @@
                 </a:tc>
                 <a:extLst>
                   <a:ext uri="{0D108BD9-81ED-4DB2-BD59-A6C34878D82A}">
-                    <a16:rowId xmlns="" xmlns:a16="http://schemas.microsoft.com/office/drawing/2014/main" val="10003"/>
+                    <a16:rowId xmlns:a16="http://schemas.microsoft.com/office/drawing/2014/main" val="10003"/>
                   </a:ext>
                 </a:extLst>
               </a:tr>
@@ -8486,7 +8851,7 @@
                 </a:tc>
                 <a:extLst>
                   <a:ext uri="{0D108BD9-81ED-4DB2-BD59-A6C34878D82A}">
-                    <a16:rowId xmlns="" xmlns:a16="http://schemas.microsoft.com/office/drawing/2014/main" val="10004"/>
+                    <a16:rowId xmlns:a16="http://schemas.microsoft.com/office/drawing/2014/main" val="10004"/>
                   </a:ext>
                 </a:extLst>
               </a:tr>
@@ -8691,7 +9056,7 @@
                 </a:tc>
                 <a:extLst>
                   <a:ext uri="{0D108BD9-81ED-4DB2-BD59-A6C34878D82A}">
-                    <a16:rowId xmlns="" xmlns:a16="http://schemas.microsoft.com/office/drawing/2014/main" val="10005"/>
+                    <a16:rowId xmlns:a16="http://schemas.microsoft.com/office/drawing/2014/main" val="10005"/>
                   </a:ext>
                 </a:extLst>
               </a:tr>
@@ -8740,41 +9105,41 @@
                         <a:defRPr/>
                       </a:pPr>
                       <a:r>
-                        <a:rPr lang="ko-KR" altLang="en-US" sz="1400" dirty="0" err="1" smtClean="0">
+                        <a:rPr lang="ko-KR" altLang="en-US" sz="1400" dirty="0" err="1">
                           <a:latin typeface="나눔바른고딕" panose="020B0603020101020101" pitchFamily="34" charset="-127"/>
                           <a:ea typeface="나눔바른고딕" panose="020B0603020101020101" pitchFamily="34" charset="-127"/>
                         </a:rPr>
                         <a:t>파쿠르</a:t>
                       </a:r>
                       <a:r>
-                        <a:rPr lang="ko-KR" altLang="en-US" sz="1400" dirty="0" smtClean="0">
+                        <a:rPr lang="ko-KR" altLang="en-US" sz="1400" dirty="0">
                           <a:latin typeface="나눔바른고딕" panose="020B0603020101020101" pitchFamily="34" charset="-127"/>
                           <a:ea typeface="나눔바른고딕" panose="020B0603020101020101" pitchFamily="34" charset="-127"/>
                         </a:rPr>
                         <a:t> 시스템 보완 </a:t>
                       </a:r>
                       <a:r>
-                        <a:rPr lang="en-US" altLang="ko-KR" sz="1400" dirty="0" smtClean="0">
+                        <a:rPr lang="en-US" altLang="ko-KR" sz="1400" dirty="0">
                           <a:latin typeface="나눔바른고딕" panose="020B0603020101020101" pitchFamily="34" charset="-127"/>
                           <a:ea typeface="나눔바른고딕" panose="020B0603020101020101" pitchFamily="34" charset="-127"/>
                         </a:rPr>
                         <a:t>(</a:t>
                       </a:r>
                       <a:r>
-                        <a:rPr lang="ko-KR" altLang="en-US" sz="1400" dirty="0" err="1" smtClean="0">
+                        <a:rPr lang="ko-KR" altLang="en-US" sz="1400" dirty="0" err="1">
                           <a:latin typeface="나눔바른고딕" panose="020B0603020101020101" pitchFamily="34" charset="-127"/>
                           <a:ea typeface="나눔바른고딕" panose="020B0603020101020101" pitchFamily="34" charset="-127"/>
                         </a:rPr>
                         <a:t>폴리싱</a:t>
                       </a:r>
                       <a:r>
-                        <a:rPr lang="en-US" altLang="ko-KR" sz="1400" dirty="0" smtClean="0">
+                        <a:rPr lang="en-US" altLang="ko-KR" sz="1400" dirty="0">
                           <a:latin typeface="나눔바른고딕" panose="020B0603020101020101" pitchFamily="34" charset="-127"/>
                           <a:ea typeface="나눔바른고딕" panose="020B0603020101020101" pitchFamily="34" charset="-127"/>
                         </a:rPr>
                         <a:t>)</a:t>
                       </a:r>
-                      <a:endParaRPr lang="ko-KR" altLang="en-US" sz="1400" dirty="0" smtClean="0">
+                      <a:endParaRPr lang="ko-KR" altLang="en-US" sz="1400" dirty="0">
                         <a:latin typeface="나눔바른고딕" panose="020B0603020101020101" pitchFamily="34" charset="-127"/>
                         <a:ea typeface="나눔바른고딕" panose="020B0603020101020101" pitchFamily="34" charset="-127"/>
                       </a:endParaRPr>
@@ -8789,69 +9154,69 @@
                     <a:p>
                       <a:pPr latinLnBrk="1"/>
                       <a:r>
-                        <a:rPr lang="en-US" altLang="ko-KR" sz="1400" strike="noStrike" dirty="0" smtClean="0">
+                        <a:rPr lang="en-US" altLang="ko-KR" sz="1400" strike="noStrike" dirty="0">
                           <a:latin typeface="나눔바른고딕" panose="020B0603020101020101" pitchFamily="34" charset="-127"/>
                           <a:ea typeface="나눔바른고딕" panose="020B0603020101020101" pitchFamily="34" charset="-127"/>
                         </a:rPr>
                         <a:t>IK</a:t>
                       </a:r>
                       <a:r>
-                        <a:rPr lang="en-US" altLang="ko-KR" sz="1400" strike="noStrike" baseline="0" dirty="0" smtClean="0">
+                        <a:rPr lang="en-US" altLang="ko-KR" sz="1400" strike="noStrike" baseline="0" dirty="0">
                           <a:latin typeface="나눔바른고딕" panose="020B0603020101020101" pitchFamily="34" charset="-127"/>
                           <a:ea typeface="나눔바른고딕" panose="020B0603020101020101" pitchFamily="34" charset="-127"/>
                         </a:rPr>
                         <a:t> </a:t>
                       </a:r>
                       <a:r>
-                        <a:rPr lang="ko-KR" altLang="en-US" sz="1400" strike="noStrike" baseline="0" dirty="0" smtClean="0">
+                        <a:rPr lang="ko-KR" altLang="en-US" sz="1400" strike="noStrike" baseline="0" dirty="0">
                           <a:latin typeface="나눔바른고딕" panose="020B0603020101020101" pitchFamily="34" charset="-127"/>
                           <a:ea typeface="나눔바른고딕" panose="020B0603020101020101" pitchFamily="34" charset="-127"/>
                         </a:rPr>
                         <a:t>적용 디테일 보정 작업</a:t>
                       </a:r>
                       <a:r>
-                        <a:rPr lang="en-US" altLang="ko-KR" sz="1400" strike="noStrike" baseline="0" dirty="0" smtClean="0">
+                        <a:rPr lang="en-US" altLang="ko-KR" sz="1400" strike="noStrike" baseline="0" dirty="0">
                           <a:latin typeface="나눔바른고딕" panose="020B0603020101020101" pitchFamily="34" charset="-127"/>
                           <a:ea typeface="나눔바른고딕" panose="020B0603020101020101" pitchFamily="34" charset="-127"/>
                         </a:rPr>
                         <a:t>, </a:t>
                       </a:r>
                       <a:r>
-                        <a:rPr lang="ko-KR" altLang="en-US" sz="1400" strike="noStrike" baseline="0" dirty="0" smtClean="0">
+                        <a:rPr lang="ko-KR" altLang="en-US" sz="1400" strike="noStrike" baseline="0" dirty="0">
                           <a:latin typeface="나눔바른고딕" panose="020B0603020101020101" pitchFamily="34" charset="-127"/>
                           <a:ea typeface="나눔바른고딕" panose="020B0603020101020101" pitchFamily="34" charset="-127"/>
                         </a:rPr>
                         <a:t>지형 높이 및 깊이 인식 </a:t>
                       </a:r>
                       <a:r>
-                        <a:rPr lang="ko-KR" altLang="en-US" sz="1400" strike="noStrike" baseline="0" dirty="0" err="1" smtClean="0">
+                        <a:rPr lang="ko-KR" altLang="en-US" sz="1400" strike="noStrike" baseline="0" dirty="0" err="1">
                           <a:latin typeface="나눔바른고딕" panose="020B0603020101020101" pitchFamily="34" charset="-127"/>
                           <a:ea typeface="나눔바른고딕" panose="020B0603020101020101" pitchFamily="34" charset="-127"/>
                         </a:rPr>
                         <a:t>경계값</a:t>
                       </a:r>
                       <a:r>
-                        <a:rPr lang="ko-KR" altLang="en-US" sz="1400" strike="noStrike" baseline="0" dirty="0" smtClean="0">
+                        <a:rPr lang="ko-KR" altLang="en-US" sz="1400" strike="noStrike" baseline="0" dirty="0">
                           <a:latin typeface="나눔바른고딕" panose="020B0603020101020101" pitchFamily="34" charset="-127"/>
                           <a:ea typeface="나눔바른고딕" panose="020B0603020101020101" pitchFamily="34" charset="-127"/>
                         </a:rPr>
                         <a:t> 처리</a:t>
                       </a:r>
                       <a:r>
-                        <a:rPr lang="en-US" altLang="ko-KR" sz="1400" strike="noStrike" baseline="0" dirty="0" smtClean="0">
+                        <a:rPr lang="en-US" altLang="ko-KR" sz="1400" strike="noStrike" baseline="0" dirty="0">
                           <a:latin typeface="나눔바른고딕" panose="020B0603020101020101" pitchFamily="34" charset="-127"/>
                           <a:ea typeface="나눔바른고딕" panose="020B0603020101020101" pitchFamily="34" charset="-127"/>
                         </a:rPr>
                         <a:t>, </a:t>
                       </a:r>
                       <a:br>
-                        <a:rPr lang="en-US" altLang="ko-KR" sz="1400" strike="noStrike" baseline="0" dirty="0" smtClean="0">
+                        <a:rPr lang="en-US" altLang="ko-KR" sz="1400" strike="noStrike" baseline="0" dirty="0">
                           <a:latin typeface="나눔바른고딕" panose="020B0603020101020101" pitchFamily="34" charset="-127"/>
                           <a:ea typeface="나눔바른고딕" panose="020B0603020101020101" pitchFamily="34" charset="-127"/>
                         </a:rPr>
                       </a:br>
                       <a:r>
-                        <a:rPr lang="ko-KR" altLang="en-US" sz="1400" strike="noStrike" baseline="0" dirty="0" smtClean="0">
+                        <a:rPr lang="ko-KR" altLang="en-US" sz="1400" strike="noStrike" baseline="0" dirty="0">
                           <a:latin typeface="나눔바른고딕" panose="020B0603020101020101" pitchFamily="34" charset="-127"/>
                           <a:ea typeface="나눔바른고딕" panose="020B0603020101020101" pitchFamily="34" charset="-127"/>
                         </a:rPr>
@@ -8867,7 +9232,7 @@
                 </a:tc>
                 <a:extLst>
                   <a:ext uri="{0D108BD9-81ED-4DB2-BD59-A6C34878D82A}">
-                    <a16:rowId xmlns="" xmlns:a16="http://schemas.microsoft.com/office/drawing/2014/main" val="10006"/>
+                    <a16:rowId xmlns:a16="http://schemas.microsoft.com/office/drawing/2014/main" val="10006"/>
                   </a:ext>
                 </a:extLst>
               </a:tr>
@@ -8939,7 +9304,7 @@
                 </a:tc>
                 <a:extLst>
                   <a:ext uri="{0D108BD9-81ED-4DB2-BD59-A6C34878D82A}">
-                    <a16:rowId xmlns="" xmlns:a16="http://schemas.microsoft.com/office/drawing/2014/main" val="10007"/>
+                    <a16:rowId xmlns:a16="http://schemas.microsoft.com/office/drawing/2014/main" val="10007"/>
                   </a:ext>
                 </a:extLst>
               </a:tr>
@@ -8998,7 +9363,7 @@
                 </a:tc>
                 <a:extLst>
                   <a:ext uri="{0D108BD9-81ED-4DB2-BD59-A6C34878D82A}">
-                    <a16:rowId xmlns="" xmlns:a16="http://schemas.microsoft.com/office/drawing/2014/main" val="10008"/>
+                    <a16:rowId xmlns:a16="http://schemas.microsoft.com/office/drawing/2014/main" val="10008"/>
                   </a:ext>
                 </a:extLst>
               </a:tr>

--- a/PPT/week5.pptx
+++ b/PPT/week5.pptx
@@ -4771,7 +4771,7 @@
         <p:spPr>
           <a:xfrm>
             <a:off x="302450" y="1342316"/>
-            <a:ext cx="5138684" cy="2123658"/>
+            <a:ext cx="5138684" cy="2308324"/>
           </a:xfrm>
           <a:prstGeom prst="rect">
             <a:avLst/>
@@ -4863,41 +4863,79 @@
             </a:endParaRPr>
           </a:p>
           <a:p>
+            <a:r>
+              <a:rPr lang="ko-KR" altLang="en-US" sz="1200" dirty="0">
+                <a:latin typeface="나눔바른고딕" panose="020B0603020101020101" pitchFamily="34" charset="-127"/>
+                <a:ea typeface="나눔바른고딕" panose="020B0603020101020101" pitchFamily="34" charset="-127"/>
+              </a:rPr>
+              <a:t>문제 원인 </a:t>
+            </a:r>
+            <a:r>
+              <a:rPr lang="en-US" altLang="ko-KR" sz="1200" dirty="0">
+                <a:latin typeface="나눔바른고딕" panose="020B0603020101020101" pitchFamily="34" charset="-127"/>
+                <a:ea typeface="나눔바른고딕" panose="020B0603020101020101" pitchFamily="34" charset="-127"/>
+              </a:rPr>
+              <a:t>:</a:t>
+            </a:r>
+          </a:p>
+          <a:p>
+            <a:r>
+              <a:rPr lang="en-US" altLang="ko-KR" sz="1200" dirty="0">
+                <a:latin typeface="나눔바른고딕" panose="020B0603020101020101" pitchFamily="34" charset="-127"/>
+                <a:ea typeface="나눔바른고딕" panose="020B0603020101020101" pitchFamily="34" charset="-127"/>
+              </a:rPr>
+              <a:t>- </a:t>
+            </a:r>
+            <a:r>
+              <a:rPr lang="ko-KR" altLang="en-US" sz="1200" dirty="0">
+                <a:latin typeface="나눔바른고딕" panose="020B0603020101020101" pitchFamily="34" charset="-127"/>
+                <a:ea typeface="나눔바른고딕" panose="020B0603020101020101" pitchFamily="34" charset="-127"/>
+              </a:rPr>
+              <a:t>지형 인식과 행동 선택이 같은 곳에서 이루어 지는 것이 문제</a:t>
+            </a:r>
             <a:endParaRPr lang="en-US" altLang="ko-KR" sz="1200" dirty="0">
               <a:latin typeface="나눔바른고딕" panose="020B0603020101020101" pitchFamily="34" charset="-127"/>
               <a:ea typeface="나눔바른고딕" panose="020B0603020101020101" pitchFamily="34" charset="-127"/>
             </a:endParaRPr>
           </a:p>
           <a:p>
+            <a:pPr marL="171450" indent="-171450">
+              <a:buFontTx/>
+              <a:buChar char="-"/>
+            </a:pPr>
             <a:r>
               <a:rPr lang="ko-KR" altLang="en-US" sz="1200" dirty="0">
                 <a:latin typeface="나눔바른고딕" panose="020B0603020101020101" pitchFamily="34" charset="-127"/>
                 <a:ea typeface="나눔바른고딕" panose="020B0603020101020101" pitchFamily="34" charset="-127"/>
               </a:rPr>
-              <a:t>문제 원인 </a:t>
+              <a:t>이렇게 되면 상태가 늘어남에 따라 지형 인식 로직에서 수정을 하거나</a:t>
             </a:r>
             <a:r>
               <a:rPr lang="en-US" altLang="ko-KR" sz="1200" dirty="0">
                 <a:latin typeface="나눔바른고딕" panose="020B0603020101020101" pitchFamily="34" charset="-127"/>
                 <a:ea typeface="나눔바른고딕" panose="020B0603020101020101" pitchFamily="34" charset="-127"/>
               </a:rPr>
-              <a:t>:</a:t>
-            </a:r>
-          </a:p>
-          <a:p>
+              <a:t>,</a:t>
+            </a:r>
+            <a:br>
+              <a:rPr lang="en-US" altLang="ko-KR" sz="1200" dirty="0">
+                <a:latin typeface="나눔바른고딕" panose="020B0603020101020101" pitchFamily="34" charset="-127"/>
+                <a:ea typeface="나눔바른고딕" panose="020B0603020101020101" pitchFamily="34" charset="-127"/>
+              </a:rPr>
+            </a:br>
             <a:r>
               <a:rPr lang="ko-KR" altLang="en-US" sz="1200" dirty="0">
                 <a:latin typeface="나눔바른고딕" panose="020B0603020101020101" pitchFamily="34" charset="-127"/>
                 <a:ea typeface="나눔바른고딕" panose="020B0603020101020101" pitchFamily="34" charset="-127"/>
               </a:rPr>
-              <a:t>지형 인식과 행동 선택이 같은 곳에서 이루어 지는 것이 문제</a:t>
-            </a:r>
-            <a:endParaRPr lang="en-US" altLang="ko-KR" sz="1200" dirty="0">
-              <a:latin typeface="나눔바른고딕" panose="020B0603020101020101" pitchFamily="34" charset="-127"/>
-              <a:ea typeface="나눔바른고딕" panose="020B0603020101020101" pitchFamily="34" charset="-127"/>
-            </a:endParaRPr>
-          </a:p>
-          <a:p>
+              <a:t>현재처럼 적용 전에 번복하는 상황이 반복</a:t>
+            </a:r>
+            <a:br>
+              <a:rPr lang="en-US" altLang="ko-KR" sz="1200" dirty="0">
+                <a:latin typeface="나눔바른고딕" panose="020B0603020101020101" pitchFamily="34" charset="-127"/>
+                <a:ea typeface="나눔바른고딕" panose="020B0603020101020101" pitchFamily="34" charset="-127"/>
+              </a:rPr>
+            </a:br>
             <a:endParaRPr lang="en-US" altLang="ko-KR" sz="1200" dirty="0">
               <a:latin typeface="나눔바른고딕" panose="020B0603020101020101" pitchFamily="34" charset="-127"/>
               <a:ea typeface="나눔바른고딕" panose="020B0603020101020101" pitchFamily="34" charset="-127"/>
@@ -4956,7 +4994,7 @@
         </p:blipFill>
         <p:spPr>
           <a:xfrm>
-            <a:off x="5669280" y="1003763"/>
+            <a:off x="6096000" y="1003763"/>
             <a:ext cx="4642617" cy="2360798"/>
           </a:xfrm>
           <a:prstGeom prst="rect">
@@ -4978,7 +5016,7 @@
         </p:nvSpPr>
         <p:spPr>
           <a:xfrm>
-            <a:off x="4716877" y="3493440"/>
+            <a:off x="4716877" y="3549616"/>
             <a:ext cx="2279619" cy="246221"/>
           </a:xfrm>
           <a:prstGeom prst="rect">
@@ -5406,7 +5444,7 @@
                 <a:latin typeface="나눔바른고딕" panose="020B0603020101020101" pitchFamily="34" charset="-127"/>
                 <a:ea typeface="나눔바른고딕" panose="020B0603020101020101" pitchFamily="34" charset="-127"/>
               </a:rPr>
-              <a:t>지형 인식 및 인식 결과 처리 분리</a:t>
+              <a:t>지형 인식과 인식 결과 처리 분리</a:t>
             </a:r>
             <a:endParaRPr lang="en-US" altLang="ko-KR" sz="1600" dirty="0">
               <a:latin typeface="나눔바른고딕" panose="020B0603020101020101" pitchFamily="34" charset="-127"/>
@@ -5565,8 +5603,8 @@
         </p:nvSpPr>
         <p:spPr>
           <a:xfrm>
-            <a:off x="302449" y="2938494"/>
-            <a:ext cx="4676957" cy="646331"/>
+            <a:off x="1320128" y="5817273"/>
+            <a:ext cx="3789714" cy="646331"/>
           </a:xfrm>
           <a:prstGeom prst="rect">
             <a:avLst/>
@@ -5794,7 +5832,7 @@
                 <a:latin typeface="나눔바른고딕" panose="020B0603020101020101" pitchFamily="34" charset="-127"/>
                 <a:ea typeface="나눔바른고딕" panose="020B0603020101020101" pitchFamily="34" charset="-127"/>
               </a:rPr>
-              <a:t>현재 상태에 맞는 액션을 선택</a:t>
+              <a:t>각 상태에 따라 적절한 액션을 선택하도록 확인</a:t>
             </a:r>
             <a:endParaRPr lang="en-US" altLang="ko-KR" sz="1200" dirty="0">
               <a:latin typeface="나눔바른고딕" panose="020B0603020101020101" pitchFamily="34" charset="-127"/>
@@ -5825,8 +5863,8 @@
         </p:blipFill>
         <p:spPr>
           <a:xfrm>
-            <a:off x="7686002" y="1173039"/>
-            <a:ext cx="4203548" cy="1596178"/>
+            <a:off x="8377760" y="1263754"/>
+            <a:ext cx="3511790" cy="1333503"/>
           </a:xfrm>
           <a:prstGeom prst="rect">
             <a:avLst/>
@@ -5855,7 +5893,7 @@
         </p:blipFill>
         <p:spPr>
           <a:xfrm>
-            <a:off x="5510820" y="2938494"/>
+            <a:off x="5558247" y="2905391"/>
             <a:ext cx="2604379" cy="3516257"/>
           </a:xfrm>
           <a:prstGeom prst="rect">
@@ -5863,6 +5901,212 @@
           </a:prstGeom>
         </p:spPr>
       </p:pic>
+      <p:pic>
+        <p:nvPicPr>
+          <p:cNvPr id="7" name="그림 6">
+            <a:extLst>
+              <a:ext uri="{FF2B5EF4-FFF2-40B4-BE49-F238E27FC236}">
+                <a16:creationId xmlns:a16="http://schemas.microsoft.com/office/drawing/2014/main" id="{1E06D676-A94F-196C-6BD3-B36EC073F765}"/>
+              </a:ext>
+            </a:extLst>
+          </p:cNvPr>
+          <p:cNvPicPr>
+            <a:picLocks noChangeAspect="1"/>
+          </p:cNvPicPr>
+          <p:nvPr/>
+        </p:nvPicPr>
+        <p:blipFill>
+          <a:blip r:embed="rId5"/>
+          <a:stretch>
+            <a:fillRect/>
+          </a:stretch>
+        </p:blipFill>
+        <p:spPr>
+          <a:xfrm>
+            <a:off x="5109842" y="1263755"/>
+            <a:ext cx="2687117" cy="1333508"/>
+          </a:xfrm>
+          <a:prstGeom prst="rect">
+            <a:avLst/>
+          </a:prstGeom>
+        </p:spPr>
+      </p:pic>
+      <p:cxnSp>
+        <p:nvCxnSpPr>
+          <p:cNvPr id="17" name="직선 화살표 연결선 16">
+            <a:extLst>
+              <a:ext uri="{FF2B5EF4-FFF2-40B4-BE49-F238E27FC236}">
+                <a16:creationId xmlns:a16="http://schemas.microsoft.com/office/drawing/2014/main" id="{36B6D84B-67D0-F674-9E31-319537267AAA}"/>
+              </a:ext>
+            </a:extLst>
+          </p:cNvPr>
+          <p:cNvCxnSpPr>
+            <a:cxnSpLocks/>
+          </p:cNvCxnSpPr>
+          <p:nvPr/>
+        </p:nvCxnSpPr>
+        <p:spPr>
+          <a:xfrm>
+            <a:off x="7796959" y="1927219"/>
+            <a:ext cx="434431" cy="0"/>
+          </a:xfrm>
+          <a:prstGeom prst="straightConnector1">
+            <a:avLst/>
+          </a:prstGeom>
+          <a:ln>
+            <a:tailEnd type="triangle"/>
+          </a:ln>
+        </p:spPr>
+        <p:style>
+          <a:lnRef idx="2">
+            <a:schemeClr val="accent1"/>
+          </a:lnRef>
+          <a:fillRef idx="0">
+            <a:schemeClr val="accent1"/>
+          </a:fillRef>
+          <a:effectRef idx="1">
+            <a:schemeClr val="accent1"/>
+          </a:effectRef>
+          <a:fontRef idx="minor">
+            <a:schemeClr val="tx1"/>
+          </a:fontRef>
+        </p:style>
+      </p:cxnSp>
+      <p:pic>
+        <p:nvPicPr>
+          <p:cNvPr id="20" name="그림 19">
+            <a:extLst>
+              <a:ext uri="{FF2B5EF4-FFF2-40B4-BE49-F238E27FC236}">
+                <a16:creationId xmlns:a16="http://schemas.microsoft.com/office/drawing/2014/main" id="{DDC12C05-4A82-E75F-B103-28C4D94CAEF0}"/>
+              </a:ext>
+            </a:extLst>
+          </p:cNvPr>
+          <p:cNvPicPr>
+            <a:picLocks noChangeAspect="1"/>
+          </p:cNvPicPr>
+          <p:nvPr/>
+        </p:nvPicPr>
+        <p:blipFill>
+          <a:blip r:embed="rId6"/>
+          <a:stretch>
+            <a:fillRect/>
+          </a:stretch>
+        </p:blipFill>
+        <p:spPr>
+          <a:xfrm>
+            <a:off x="387511" y="2905391"/>
+            <a:ext cx="4600472" cy="2501767"/>
+          </a:xfrm>
+          <a:prstGeom prst="rect">
+            <a:avLst/>
+          </a:prstGeom>
+        </p:spPr>
+      </p:pic>
+      <p:sp>
+        <p:nvSpPr>
+          <p:cNvPr id="21" name="직사각형 20">
+            <a:extLst>
+              <a:ext uri="{FF2B5EF4-FFF2-40B4-BE49-F238E27FC236}">
+                <a16:creationId xmlns:a16="http://schemas.microsoft.com/office/drawing/2014/main" id="{0FF4B31C-76CC-1F4C-DF75-E9B8BBA1FE28}"/>
+              </a:ext>
+            </a:extLst>
+          </p:cNvPr>
+          <p:cNvSpPr/>
+          <p:nvPr/>
+        </p:nvSpPr>
+        <p:spPr>
+          <a:xfrm>
+            <a:off x="525101" y="3232087"/>
+            <a:ext cx="3268301" cy="196913"/>
+          </a:xfrm>
+          <a:prstGeom prst="rect">
+            <a:avLst/>
+          </a:prstGeom>
+          <a:noFill/>
+          <a:ln>
+            <a:solidFill>
+              <a:schemeClr val="tx2">
+                <a:lumMod val="50000"/>
+                <a:lumOff val="50000"/>
+              </a:schemeClr>
+            </a:solidFill>
+          </a:ln>
+        </p:spPr>
+        <p:style>
+          <a:lnRef idx="2">
+            <a:schemeClr val="accent1">
+              <a:shade val="15000"/>
+            </a:schemeClr>
+          </a:lnRef>
+          <a:fillRef idx="1">
+            <a:schemeClr val="accent1"/>
+          </a:fillRef>
+          <a:effectRef idx="0">
+            <a:schemeClr val="accent1"/>
+          </a:effectRef>
+          <a:fontRef idx="minor">
+            <a:schemeClr val="lt1"/>
+          </a:fontRef>
+        </p:style>
+        <p:txBody>
+          <a:bodyPr rtlCol="0" anchor="ctr"/>
+          <a:lstStyle/>
+          <a:p>
+            <a:pPr algn="ctr"/>
+            <a:endParaRPr lang="ko-KR" altLang="en-US"/>
+          </a:p>
+        </p:txBody>
+      </p:sp>
+      <p:cxnSp>
+        <p:nvCxnSpPr>
+          <p:cNvPr id="23" name="연결선: 꺾임 22">
+            <a:extLst>
+              <a:ext uri="{FF2B5EF4-FFF2-40B4-BE49-F238E27FC236}">
+                <a16:creationId xmlns:a16="http://schemas.microsoft.com/office/drawing/2014/main" id="{87061010-C649-3556-7822-CA538B9DF740}"/>
+              </a:ext>
+            </a:extLst>
+          </p:cNvPr>
+          <p:cNvCxnSpPr>
+            <a:stCxn id="21" idx="3"/>
+            <a:endCxn id="14" idx="1"/>
+          </p:cNvCxnSpPr>
+          <p:nvPr/>
+        </p:nvCxnSpPr>
+        <p:spPr>
+          <a:xfrm>
+            <a:off x="3793402" y="3330544"/>
+            <a:ext cx="1764845" cy="1332976"/>
+          </a:xfrm>
+          <a:prstGeom prst="bentConnector3">
+            <a:avLst>
+              <a:gd name="adj1" fmla="val 82831"/>
+            </a:avLst>
+          </a:prstGeom>
+          <a:ln>
+            <a:solidFill>
+              <a:schemeClr val="tx2">
+                <a:lumMod val="50000"/>
+                <a:lumOff val="50000"/>
+              </a:schemeClr>
+            </a:solidFill>
+            <a:tailEnd type="triangle"/>
+          </a:ln>
+        </p:spPr>
+        <p:style>
+          <a:lnRef idx="2">
+            <a:schemeClr val="accent1"/>
+          </a:lnRef>
+          <a:fillRef idx="0">
+            <a:schemeClr val="accent1"/>
+          </a:fillRef>
+          <a:effectRef idx="1">
+            <a:schemeClr val="accent1"/>
+          </a:effectRef>
+          <a:fontRef idx="minor">
+            <a:schemeClr val="tx1"/>
+          </a:fontRef>
+        </p:style>
+      </p:cxnSp>
     </p:spTree>
     <p:extLst>
       <p:ext uri="{BB962C8B-B14F-4D97-AF65-F5344CB8AC3E}">
@@ -6230,6 +6474,13 @@
                 <a:ea typeface="나눔바른고딕" panose="020B0603020101020101" pitchFamily="34" charset="-127"/>
               </a:rPr>
               <a:t>손이 파 들어가거나 손이 붕 뜨며 어색해짐</a:t>
+            </a:r>
+            <a:r>
+              <a:rPr lang="en-US" altLang="ko-KR" sz="1200">
+                <a:latin typeface="나눔바른고딕" panose="020B0603020101020101" pitchFamily="34" charset="-127"/>
+                <a:ea typeface="나눔바른고딕" panose="020B0603020101020101" pitchFamily="34" charset="-127"/>
+              </a:rPr>
+              <a:t>.</a:t>
             </a:r>
             <a:endParaRPr lang="en-US" altLang="ko-KR" sz="1200" dirty="0">
               <a:latin typeface="나눔바른고딕" panose="020B0603020101020101" pitchFamily="34" charset="-127"/>
